--- a/BookMyShow.pptx
+++ b/BookMyShow.pptx
@@ -5,22 +5,18 @@
     <p:sldMasterId id="2147483648" r:id="rId1"/>
   </p:sldMasterIdLst>
   <p:sldIdLst>
-    <p:sldId id="256" r:id="rId2"/>
-    <p:sldId id="257" r:id="rId3"/>
-    <p:sldId id="258" r:id="rId4"/>
-    <p:sldId id="260" r:id="rId5"/>
-    <p:sldId id="259" r:id="rId6"/>
-    <p:sldId id="261" r:id="rId7"/>
+    <p:sldId id="258" r:id="rId2"/>
+    <p:sldId id="259" r:id="rId3"/>
+    <p:sldId id="260" r:id="rId4"/>
+    <p:sldId id="261" r:id="rId5"/>
+    <p:sldId id="264" r:id="rId6"/>
+    <p:sldId id="263" r:id="rId7"/>
     <p:sldId id="262" r:id="rId8"/>
-    <p:sldId id="263" r:id="rId9"/>
-    <p:sldId id="264" r:id="rId10"/>
-    <p:sldId id="265" r:id="rId11"/>
-    <p:sldId id="266" r:id="rId12"/>
-    <p:sldId id="268" r:id="rId13"/>
-    <p:sldId id="267" r:id="rId14"/>
-    <p:sldId id="269" r:id="rId15"/>
-    <p:sldId id="270" r:id="rId16"/>
-    <p:sldId id="271" r:id="rId17"/>
+    <p:sldId id="265" r:id="rId9"/>
+    <p:sldId id="266" r:id="rId10"/>
+    <p:sldId id="267" r:id="rId11"/>
+    <p:sldId id="268" r:id="rId12"/>
+    <p:sldId id="269" r:id="rId13"/>
   </p:sldIdLst>
   <p:sldSz cx="12192000" cy="6858000"/>
   <p:notesSz cx="6858000" cy="9144000"/>
@@ -132,459 +128,309 @@
   <pc:docChgLst>
     <pc:chgData name="Shamshika Reddy" userId="64b02f5a8dec7662" providerId="LiveId" clId="{62653A95-EF0A-4CE7-9970-1B8A4274BCBF}"/>
     <pc:docChg chg="custSel addSld modSld sldOrd">
-      <pc:chgData name="Shamshika Reddy" userId="64b02f5a8dec7662" providerId="LiveId" clId="{62653A95-EF0A-4CE7-9970-1B8A4274BCBF}" dt="2026-10-07T16:50:01.775" v="904" actId="14100"/>
+      <pc:chgData name="Shamshika Reddy" userId="64b02f5a8dec7662" providerId="LiveId" clId="{62653A95-EF0A-4CE7-9970-1B8A4274BCBF}" dt="2026-10-14T13:25:18.472" v="498" actId="20577"/>
       <pc:docMkLst>
         <pc:docMk/>
       </pc:docMkLst>
-      <pc:sldChg chg="ord">
-        <pc:chgData name="Shamshika Reddy" userId="64b02f5a8dec7662" providerId="LiveId" clId="{62653A95-EF0A-4CE7-9970-1B8A4274BCBF}" dt="2026-10-07T16:08:02.071" v="450"/>
+      <pc:sldChg chg="modSp mod">
+        <pc:chgData name="Shamshika Reddy" userId="64b02f5a8dec7662" providerId="LiveId" clId="{62653A95-EF0A-4CE7-9970-1B8A4274BCBF}" dt="2026-10-14T12:55:00.604" v="49" actId="2711"/>
         <pc:sldMkLst>
           <pc:docMk/>
-          <pc:sldMk cId="252692721" sldId="257"/>
+          <pc:sldMk cId="1012033153" sldId="258"/>
         </pc:sldMkLst>
+        <pc:spChg chg="mod">
+          <ac:chgData name="Shamshika Reddy" userId="64b02f5a8dec7662" providerId="LiveId" clId="{62653A95-EF0A-4CE7-9970-1B8A4274BCBF}" dt="2026-10-14T12:54:46.394" v="48" actId="14100"/>
+          <ac:spMkLst>
+            <pc:docMk/>
+            <pc:sldMk cId="1012033153" sldId="258"/>
+            <ac:spMk id="4" creationId="{6DCF877B-4FF8-0AEA-17E0-9C4348B69B0E}"/>
+          </ac:spMkLst>
+        </pc:spChg>
+        <pc:spChg chg="mod">
+          <ac:chgData name="Shamshika Reddy" userId="64b02f5a8dec7662" providerId="LiveId" clId="{62653A95-EF0A-4CE7-9970-1B8A4274BCBF}" dt="2026-10-14T12:55:00.604" v="49" actId="2711"/>
+          <ac:spMkLst>
+            <pc:docMk/>
+            <pc:sldMk cId="1012033153" sldId="258"/>
+            <ac:spMk id="5" creationId="{E148AF18-B6CE-D5B5-DA99-421607E04E1A}"/>
+          </ac:spMkLst>
+        </pc:spChg>
       </pc:sldChg>
-      <pc:sldChg chg="addSp modSp mod">
-        <pc:chgData name="Shamshika Reddy" userId="64b02f5a8dec7662" providerId="LiveId" clId="{62653A95-EF0A-4CE7-9970-1B8A4274BCBF}" dt="2026-10-07T15:09:36.602" v="34" actId="5793"/>
+      <pc:sldChg chg="addSp modSp new mod modClrScheme chgLayout">
+        <pc:chgData name="Shamshika Reddy" userId="64b02f5a8dec7662" providerId="LiveId" clId="{62653A95-EF0A-4CE7-9970-1B8A4274BCBF}" dt="2026-10-14T13:00:46.467" v="123" actId="20577"/>
         <pc:sldMkLst>
           <pc:docMk/>
-          <pc:sldMk cId="4005528551" sldId="259"/>
+          <pc:sldMk cId="683322872" sldId="259"/>
         </pc:sldMkLst>
-        <pc:spChg chg="add mod">
-          <ac:chgData name="Shamshika Reddy" userId="64b02f5a8dec7662" providerId="LiveId" clId="{62653A95-EF0A-4CE7-9970-1B8A4274BCBF}" dt="2026-10-07T15:07:05.550" v="20" actId="20577"/>
+        <pc:spChg chg="add mod ord">
+          <ac:chgData name="Shamshika Reddy" userId="64b02f5a8dec7662" providerId="LiveId" clId="{62653A95-EF0A-4CE7-9970-1B8A4274BCBF}" dt="2026-10-14T12:58:56.873" v="106" actId="20577"/>
           <ac:spMkLst>
             <pc:docMk/>
-            <pc:sldMk cId="4005528551" sldId="259"/>
-            <ac:spMk id="4" creationId="{EE3AFF41-4AC6-66D2-147C-FE2D0019B9DD}"/>
+            <pc:sldMk cId="683322872" sldId="259"/>
+            <ac:spMk id="4" creationId="{75F75530-7D0D-3CCD-BA57-A96F1B041082}"/>
           </ac:spMkLst>
         </pc:spChg>
-        <pc:spChg chg="add mod">
-          <ac:chgData name="Shamshika Reddy" userId="64b02f5a8dec7662" providerId="LiveId" clId="{62653A95-EF0A-4CE7-9970-1B8A4274BCBF}" dt="2026-10-07T15:09:36.602" v="34" actId="5793"/>
+        <pc:spChg chg="add mod ord">
+          <ac:chgData name="Shamshika Reddy" userId="64b02f5a8dec7662" providerId="LiveId" clId="{62653A95-EF0A-4CE7-9970-1B8A4274BCBF}" dt="2026-10-14T13:00:46.467" v="123" actId="20577"/>
           <ac:spMkLst>
             <pc:docMk/>
-            <pc:sldMk cId="4005528551" sldId="259"/>
-            <ac:spMk id="5" creationId="{AA5EF2A6-2EE3-900D-D1FE-BEB6C52F1733}"/>
+            <pc:sldMk cId="683322872" sldId="259"/>
+            <ac:spMk id="5" creationId="{39F012B9-3EBD-A2CE-EB42-3007CF8E4DA9}"/>
           </ac:spMkLst>
         </pc:spChg>
         <pc:picChg chg="add mod">
-          <ac:chgData name="Shamshika Reddy" userId="64b02f5a8dec7662" providerId="LiveId" clId="{62653A95-EF0A-4CE7-9970-1B8A4274BCBF}" dt="2026-10-07T15:06:25.630" v="5" actId="14100"/>
+          <ac:chgData name="Shamshika Reddy" userId="64b02f5a8dec7662" providerId="LiveId" clId="{62653A95-EF0A-4CE7-9970-1B8A4274BCBF}" dt="2026-10-14T12:56:02.626" v="65" actId="14100"/>
           <ac:picMkLst>
             <pc:docMk/>
-            <pc:sldMk cId="4005528551" sldId="259"/>
-            <ac:picMk id="3" creationId="{EB8C0453-44B8-1A2C-1583-2A1D1F8B9B0E}"/>
+            <pc:sldMk cId="683322872" sldId="259"/>
+            <ac:picMk id="3" creationId="{E3478E49-3642-FDEF-A1B5-9CF46DC4F521}"/>
           </ac:picMkLst>
         </pc:picChg>
       </pc:sldChg>
-      <pc:sldChg chg="addSp delSp modSp new mod">
-        <pc:chgData name="Shamshika Reddy" userId="64b02f5a8dec7662" providerId="LiveId" clId="{62653A95-EF0A-4CE7-9970-1B8A4274BCBF}" dt="2026-10-07T15:11:35.127" v="80" actId="1076"/>
+      <pc:sldChg chg="addSp delSp modSp new mod modClrScheme chgLayout">
+        <pc:chgData name="Shamshika Reddy" userId="64b02f5a8dec7662" providerId="LiveId" clId="{62653A95-EF0A-4CE7-9970-1B8A4274BCBF}" dt="2026-10-14T13:08:09.902" v="243" actId="14100"/>
         <pc:sldMkLst>
           <pc:docMk/>
-          <pc:sldMk cId="1612075854" sldId="260"/>
+          <pc:sldMk cId="4142402859" sldId="260"/>
         </pc:sldMkLst>
-        <pc:spChg chg="add del mod">
-          <ac:chgData name="Shamshika Reddy" userId="64b02f5a8dec7662" providerId="LiveId" clId="{62653A95-EF0A-4CE7-9970-1B8A4274BCBF}" dt="2026-10-07T15:10:32.783" v="40" actId="21"/>
+        <pc:spChg chg="add mod">
+          <ac:chgData name="Shamshika Reddy" userId="64b02f5a8dec7662" providerId="LiveId" clId="{62653A95-EF0A-4CE7-9970-1B8A4274BCBF}" dt="2026-10-14T13:01:47.769" v="136" actId="20577"/>
           <ac:spMkLst>
             <pc:docMk/>
-            <pc:sldMk cId="1612075854" sldId="260"/>
-            <ac:spMk id="4" creationId="{8C1D73A1-31CB-5BA1-F6F4-8FD29248127B}"/>
+            <pc:sldMk cId="4142402859" sldId="260"/>
+            <ac:spMk id="4" creationId="{2A163018-7A65-31DB-881C-FA3022ECD4D4}"/>
           </ac:spMkLst>
         </pc:spChg>
-        <pc:spChg chg="add mod">
-          <ac:chgData name="Shamshika Reddy" userId="64b02f5a8dec7662" providerId="LiveId" clId="{62653A95-EF0A-4CE7-9970-1B8A4274BCBF}" dt="2026-10-07T15:11:35.127" v="80" actId="1076"/>
+        <pc:spChg chg="add mod ord">
+          <ac:chgData name="Shamshika Reddy" userId="64b02f5a8dec7662" providerId="LiveId" clId="{62653A95-EF0A-4CE7-9970-1B8A4274BCBF}" dt="2026-10-14T13:08:09.902" v="243" actId="14100"/>
           <ac:spMkLst>
             <pc:docMk/>
-            <pc:sldMk cId="1612075854" sldId="260"/>
-            <ac:spMk id="5" creationId="{55C355AA-CC7C-08E0-0C2F-B2A7BB24C629}"/>
+            <pc:sldMk cId="4142402859" sldId="260"/>
+            <ac:spMk id="7" creationId="{30733E25-33E7-4635-A8F1-3D0847E827B4}"/>
+          </ac:spMkLst>
+        </pc:spChg>
+        <pc:spChg chg="add mod ord">
+          <ac:chgData name="Shamshika Reddy" userId="64b02f5a8dec7662" providerId="LiveId" clId="{62653A95-EF0A-4CE7-9970-1B8A4274BCBF}" dt="2026-10-14T13:05:59.242" v="223" actId="20577"/>
+          <ac:spMkLst>
+            <pc:docMk/>
+            <pc:sldMk cId="4142402859" sldId="260"/>
+            <ac:spMk id="8" creationId="{6B0E0B7E-6D6F-DD81-4E8E-CDEF7E15475B}"/>
+          </ac:spMkLst>
+        </pc:spChg>
+        <pc:picChg chg="add del mod">
+          <ac:chgData name="Shamshika Reddy" userId="64b02f5a8dec7662" providerId="LiveId" clId="{62653A95-EF0A-4CE7-9970-1B8A4274BCBF}" dt="2026-10-14T13:01:56.412" v="137" actId="21"/>
+          <ac:picMkLst>
+            <pc:docMk/>
+            <pc:sldMk cId="4142402859" sldId="260"/>
+            <ac:picMk id="3" creationId="{5E506A36-350D-C7AF-6950-1CEFF64B2DFA}"/>
+          </ac:picMkLst>
+        </pc:picChg>
+        <pc:picChg chg="add mod">
+          <ac:chgData name="Shamshika Reddy" userId="64b02f5a8dec7662" providerId="LiveId" clId="{62653A95-EF0A-4CE7-9970-1B8A4274BCBF}" dt="2026-10-14T13:03:28.241" v="155" actId="1076"/>
+          <ac:picMkLst>
+            <pc:docMk/>
+            <pc:sldMk cId="4142402859" sldId="260"/>
+            <ac:picMk id="6" creationId="{2200BF1E-28F9-2AC0-2A04-D60FBD3CD951}"/>
+          </ac:picMkLst>
+        </pc:picChg>
+      </pc:sldChg>
+      <pc:sldChg chg="addSp modSp new mod modClrScheme chgLayout">
+        <pc:chgData name="Shamshika Reddy" userId="64b02f5a8dec7662" providerId="LiveId" clId="{62653A95-EF0A-4CE7-9970-1B8A4274BCBF}" dt="2026-10-14T13:10:22.474" v="268" actId="20577"/>
+        <pc:sldMkLst>
+          <pc:docMk/>
+          <pc:sldMk cId="1491596604" sldId="261"/>
+        </pc:sldMkLst>
+        <pc:spChg chg="add mod ord">
+          <ac:chgData name="Shamshika Reddy" userId="64b02f5a8dec7662" providerId="LiveId" clId="{62653A95-EF0A-4CE7-9970-1B8A4274BCBF}" dt="2026-10-14T13:08:23.750" v="244" actId="14100"/>
+          <ac:spMkLst>
+            <pc:docMk/>
+            <pc:sldMk cId="1491596604" sldId="261"/>
+            <ac:spMk id="4" creationId="{F3479F74-92BE-FEFD-4096-CDA9EED88242}"/>
+          </ac:spMkLst>
+        </pc:spChg>
+        <pc:spChg chg="add mod ord">
+          <ac:chgData name="Shamshika Reddy" userId="64b02f5a8dec7662" providerId="LiveId" clId="{62653A95-EF0A-4CE7-9970-1B8A4274BCBF}" dt="2026-10-14T13:10:22.474" v="268" actId="20577"/>
+          <ac:spMkLst>
+            <pc:docMk/>
+            <pc:sldMk cId="1491596604" sldId="261"/>
+            <ac:spMk id="5" creationId="{C93D6FFB-7E49-3872-9D16-4B039E655E28}"/>
+          </ac:spMkLst>
+        </pc:spChg>
+        <pc:picChg chg="add">
+          <ac:chgData name="Shamshika Reddy" userId="64b02f5a8dec7662" providerId="LiveId" clId="{62653A95-EF0A-4CE7-9970-1B8A4274BCBF}" dt="2026-10-14T12:56:35.882" v="72" actId="22"/>
+          <ac:picMkLst>
+            <pc:docMk/>
+            <pc:sldMk cId="1491596604" sldId="261"/>
+            <ac:picMk id="3" creationId="{A88FE159-5802-936D-855F-3A17750D46E3}"/>
+          </ac:picMkLst>
+        </pc:picChg>
+      </pc:sldChg>
+      <pc:sldChg chg="addSp modSp new mod modClrScheme chgLayout">
+        <pc:chgData name="Shamshika Reddy" userId="64b02f5a8dec7662" providerId="LiveId" clId="{62653A95-EF0A-4CE7-9970-1B8A4274BCBF}" dt="2026-10-14T13:21:37.287" v="440" actId="5793"/>
+        <pc:sldMkLst>
+          <pc:docMk/>
+          <pc:sldMk cId="185640487" sldId="262"/>
+        </pc:sldMkLst>
+        <pc:spChg chg="add mod ord">
+          <ac:chgData name="Shamshika Reddy" userId="64b02f5a8dec7662" providerId="LiveId" clId="{62653A95-EF0A-4CE7-9970-1B8A4274BCBF}" dt="2026-10-14T13:20:33.104" v="432" actId="20577"/>
+          <ac:spMkLst>
+            <pc:docMk/>
+            <pc:sldMk cId="185640487" sldId="262"/>
+            <ac:spMk id="4" creationId="{C0C2712B-9563-CF0B-2C0F-E524BF586B3C}"/>
+          </ac:spMkLst>
+        </pc:spChg>
+        <pc:spChg chg="add mod ord">
+          <ac:chgData name="Shamshika Reddy" userId="64b02f5a8dec7662" providerId="LiveId" clId="{62653A95-EF0A-4CE7-9970-1B8A4274BCBF}" dt="2026-10-14T13:21:37.287" v="440" actId="5793"/>
+          <ac:spMkLst>
+            <pc:docMk/>
+            <pc:sldMk cId="185640487" sldId="262"/>
+            <ac:spMk id="5" creationId="{114130C4-731A-E7C3-D63B-792E18BA3388}"/>
+          </ac:spMkLst>
+        </pc:spChg>
+        <pc:picChg chg="add">
+          <ac:chgData name="Shamshika Reddy" userId="64b02f5a8dec7662" providerId="LiveId" clId="{62653A95-EF0A-4CE7-9970-1B8A4274BCBF}" dt="2026-10-14T12:56:41.294" v="73" actId="22"/>
+          <ac:picMkLst>
+            <pc:docMk/>
+            <pc:sldMk cId="185640487" sldId="262"/>
+            <ac:picMk id="3" creationId="{B6F48316-0A9E-4FE2-E2BE-2C50B5C51C3A}"/>
+          </ac:picMkLst>
+        </pc:picChg>
+      </pc:sldChg>
+      <pc:sldChg chg="addSp modSp new mod ord">
+        <pc:chgData name="Shamshika Reddy" userId="64b02f5a8dec7662" providerId="LiveId" clId="{62653A95-EF0A-4CE7-9970-1B8A4274BCBF}" dt="2026-10-14T13:15:32.526" v="321"/>
+        <pc:sldMkLst>
+          <pc:docMk/>
+          <pc:sldMk cId="1330098770" sldId="263"/>
+        </pc:sldMkLst>
+        <pc:picChg chg="add mod">
+          <ac:chgData name="Shamshika Reddy" userId="64b02f5a8dec7662" providerId="LiveId" clId="{62653A95-EF0A-4CE7-9970-1B8A4274BCBF}" dt="2026-10-14T13:12:25.622" v="278" actId="14100"/>
+          <ac:picMkLst>
+            <pc:docMk/>
+            <pc:sldMk cId="1330098770" sldId="263"/>
+            <ac:picMk id="3" creationId="{400457DD-D832-1B0C-3F39-0A9C19268A10}"/>
+          </ac:picMkLst>
+        </pc:picChg>
+        <pc:picChg chg="add mod">
+          <ac:chgData name="Shamshika Reddy" userId="64b02f5a8dec7662" providerId="LiveId" clId="{62653A95-EF0A-4CE7-9970-1B8A4274BCBF}" dt="2026-10-14T13:13:01.294" v="286" actId="14100"/>
+          <ac:picMkLst>
+            <pc:docMk/>
+            <pc:sldMk cId="1330098770" sldId="263"/>
+            <ac:picMk id="5" creationId="{2D8C34C4-61EF-E776-42E3-8D2A889248BB}"/>
+          </ac:picMkLst>
+        </pc:picChg>
+      </pc:sldChg>
+      <pc:sldChg chg="addSp modSp new mod ord modClrScheme chgLayout">
+        <pc:chgData name="Shamshika Reddy" userId="64b02f5a8dec7662" providerId="LiveId" clId="{62653A95-EF0A-4CE7-9970-1B8A4274BCBF}" dt="2026-10-14T13:17:24.532" v="395" actId="27636"/>
+        <pc:sldMkLst>
+          <pc:docMk/>
+          <pc:sldMk cId="3881232960" sldId="264"/>
+        </pc:sldMkLst>
+        <pc:spChg chg="add mod ord">
+          <ac:chgData name="Shamshika Reddy" userId="64b02f5a8dec7662" providerId="LiveId" clId="{62653A95-EF0A-4CE7-9970-1B8A4274BCBF}" dt="2026-10-14T13:14:35.922" v="316" actId="20577"/>
+          <ac:spMkLst>
+            <pc:docMk/>
+            <pc:sldMk cId="3881232960" sldId="264"/>
+            <ac:spMk id="4" creationId="{84DC3642-6BDD-12E5-F4FA-AA6E809AD0B2}"/>
+          </ac:spMkLst>
+        </pc:spChg>
+        <pc:spChg chg="add mod ord">
+          <ac:chgData name="Shamshika Reddy" userId="64b02f5a8dec7662" providerId="LiveId" clId="{62653A95-EF0A-4CE7-9970-1B8A4274BCBF}" dt="2026-10-14T13:17:24.532" v="395" actId="27636"/>
+          <ac:spMkLst>
+            <pc:docMk/>
+            <pc:sldMk cId="3881232960" sldId="264"/>
+            <ac:spMk id="5" creationId="{FC943066-45D4-3551-C696-328E513FABC2}"/>
           </ac:spMkLst>
         </pc:spChg>
         <pc:picChg chg="add mod">
-          <ac:chgData name="Shamshika Reddy" userId="64b02f5a8dec7662" providerId="LiveId" clId="{62653A95-EF0A-4CE7-9970-1B8A4274BCBF}" dt="2026-10-07T15:10:18.215" v="38" actId="14100"/>
+          <ac:chgData name="Shamshika Reddy" userId="64b02f5a8dec7662" providerId="LiveId" clId="{62653A95-EF0A-4CE7-9970-1B8A4274BCBF}" dt="2026-10-14T13:16:20.665" v="329" actId="1076"/>
           <ac:picMkLst>
             <pc:docMk/>
-            <pc:sldMk cId="1612075854" sldId="260"/>
-            <ac:picMk id="3" creationId="{2E53B697-528C-A9B9-9394-DF33C52636DC}"/>
-          </ac:picMkLst>
-        </pc:picChg>
-      </pc:sldChg>
-      <pc:sldChg chg="addSp delSp modSp new mod">
-        <pc:chgData name="Shamshika Reddy" userId="64b02f5a8dec7662" providerId="LiveId" clId="{62653A95-EF0A-4CE7-9970-1B8A4274BCBF}" dt="2026-10-07T15:21:29.673" v="303" actId="14100"/>
-        <pc:sldMkLst>
-          <pc:docMk/>
-          <pc:sldMk cId="3077186803" sldId="261"/>
-        </pc:sldMkLst>
-        <pc:spChg chg="add del mod">
-          <ac:chgData name="Shamshika Reddy" userId="64b02f5a8dec7662" providerId="LiveId" clId="{62653A95-EF0A-4CE7-9970-1B8A4274BCBF}" dt="2026-10-07T15:15:06.385" v="150"/>
-          <ac:spMkLst>
-            <pc:docMk/>
-            <pc:sldMk cId="3077186803" sldId="261"/>
-            <ac:spMk id="4" creationId="{010FF0B3-BB8A-D06C-D54A-B918B6B4CCAC}"/>
-          </ac:spMkLst>
-        </pc:spChg>
-        <pc:spChg chg="add del mod">
-          <ac:chgData name="Shamshika Reddy" userId="64b02f5a8dec7662" providerId="LiveId" clId="{62653A95-EF0A-4CE7-9970-1B8A4274BCBF}" dt="2026-10-07T15:15:38.495" v="170"/>
-          <ac:spMkLst>
-            <pc:docMk/>
-            <pc:sldMk cId="3077186803" sldId="261"/>
-            <ac:spMk id="5" creationId="{3442C50F-4208-D684-30C7-366E73CAD75A}"/>
-          </ac:spMkLst>
-        </pc:spChg>
-        <pc:spChg chg="add del mod">
-          <ac:chgData name="Shamshika Reddy" userId="64b02f5a8dec7662" providerId="LiveId" clId="{62653A95-EF0A-4CE7-9970-1B8A4274BCBF}" dt="2026-10-07T15:15:38.497" v="172"/>
-          <ac:spMkLst>
-            <pc:docMk/>
-            <pc:sldMk cId="3077186803" sldId="261"/>
-            <ac:spMk id="6" creationId="{2FD6F3ED-0868-F86C-D9E7-8442EF6581BA}"/>
-          </ac:spMkLst>
-        </pc:spChg>
-        <pc:spChg chg="add mod">
-          <ac:chgData name="Shamshika Reddy" userId="64b02f5a8dec7662" providerId="LiveId" clId="{62653A95-EF0A-4CE7-9970-1B8A4274BCBF}" dt="2026-10-07T15:21:29.673" v="303" actId="14100"/>
-          <ac:spMkLst>
-            <pc:docMk/>
-            <pc:sldMk cId="3077186803" sldId="261"/>
-            <ac:spMk id="9" creationId="{6E971EA0-00C1-F370-719C-7992D8607953}"/>
-          </ac:spMkLst>
-        </pc:spChg>
-        <pc:picChg chg="add del mod">
-          <ac:chgData name="Shamshika Reddy" userId="64b02f5a8dec7662" providerId="LiveId" clId="{62653A95-EF0A-4CE7-9970-1B8A4274BCBF}" dt="2026-10-07T15:15:38.484" v="168" actId="21"/>
-          <ac:picMkLst>
-            <pc:docMk/>
-            <pc:sldMk cId="3077186803" sldId="261"/>
-            <ac:picMk id="3" creationId="{5BC1B08C-92B4-A7F8-AA93-DC6B11C54613}"/>
-          </ac:picMkLst>
-        </pc:picChg>
-        <pc:picChg chg="add mod">
-          <ac:chgData name="Shamshika Reddy" userId="64b02f5a8dec7662" providerId="LiveId" clId="{62653A95-EF0A-4CE7-9970-1B8A4274BCBF}" dt="2026-10-07T15:21:26.533" v="302" actId="1076"/>
-          <ac:picMkLst>
-            <pc:docMk/>
-            <pc:sldMk cId="3077186803" sldId="261"/>
-            <ac:picMk id="8" creationId="{79764421-2E3C-0850-3A7D-AD515F00698C}"/>
-          </ac:picMkLst>
-        </pc:picChg>
-      </pc:sldChg>
-      <pc:sldChg chg="addSp delSp modSp new mod">
-        <pc:chgData name="Shamshika Reddy" userId="64b02f5a8dec7662" providerId="LiveId" clId="{62653A95-EF0A-4CE7-9970-1B8A4274BCBF}" dt="2026-10-07T15:24:06.177" v="341" actId="12"/>
-        <pc:sldMkLst>
-          <pc:docMk/>
-          <pc:sldMk cId="1188349219" sldId="262"/>
-        </pc:sldMkLst>
-        <pc:spChg chg="add del mod">
-          <ac:chgData name="Shamshika Reddy" userId="64b02f5a8dec7662" providerId="LiveId" clId="{62653A95-EF0A-4CE7-9970-1B8A4274BCBF}" dt="2026-10-07T15:22:33.636" v="315"/>
-          <ac:spMkLst>
-            <pc:docMk/>
-            <pc:sldMk cId="1188349219" sldId="262"/>
-            <ac:spMk id="4" creationId="{219E84EF-A80A-28E2-F8C7-3FD0F1D0403B}"/>
-          </ac:spMkLst>
-        </pc:spChg>
-        <pc:spChg chg="add mod">
-          <ac:chgData name="Shamshika Reddy" userId="64b02f5a8dec7662" providerId="LiveId" clId="{62653A95-EF0A-4CE7-9970-1B8A4274BCBF}" dt="2026-10-07T15:22:50.567" v="326" actId="20577"/>
-          <ac:spMkLst>
-            <pc:docMk/>
-            <pc:sldMk cId="1188349219" sldId="262"/>
-            <ac:spMk id="5" creationId="{4CD37EE5-041D-AED8-A37B-A11BD3CA8DC2}"/>
-          </ac:spMkLst>
-        </pc:spChg>
-        <pc:spChg chg="add mod">
-          <ac:chgData name="Shamshika Reddy" userId="64b02f5a8dec7662" providerId="LiveId" clId="{62653A95-EF0A-4CE7-9970-1B8A4274BCBF}" dt="2026-10-07T15:24:06.177" v="341" actId="12"/>
-          <ac:spMkLst>
-            <pc:docMk/>
-            <pc:sldMk cId="1188349219" sldId="262"/>
-            <ac:spMk id="6" creationId="{F6CFBAB1-BA73-459A-7A94-2F4CCABA1D7F}"/>
-          </ac:spMkLst>
-        </pc:spChg>
-        <pc:picChg chg="add mod">
-          <ac:chgData name="Shamshika Reddy" userId="64b02f5a8dec7662" providerId="LiveId" clId="{62653A95-EF0A-4CE7-9970-1B8A4274BCBF}" dt="2026-10-07T15:22:21.478" v="311" actId="14100"/>
-          <ac:picMkLst>
-            <pc:docMk/>
-            <pc:sldMk cId="1188349219" sldId="262"/>
-            <ac:picMk id="3" creationId="{09C2C9C8-D88D-CE18-38B7-E44AEFAD8AD9}"/>
-          </ac:picMkLst>
-        </pc:picChg>
-      </pc:sldChg>
-      <pc:sldChg chg="addSp delSp modSp new mod">
-        <pc:chgData name="Shamshika Reddy" userId="64b02f5a8dec7662" providerId="LiveId" clId="{62653A95-EF0A-4CE7-9970-1B8A4274BCBF}" dt="2026-10-07T15:26:08.036" v="349" actId="14100"/>
-        <pc:sldMkLst>
-          <pc:docMk/>
-          <pc:sldMk cId="4290253312" sldId="263"/>
-        </pc:sldMkLst>
-        <pc:picChg chg="add del mod">
-          <ac:chgData name="Shamshika Reddy" userId="64b02f5a8dec7662" providerId="LiveId" clId="{62653A95-EF0A-4CE7-9970-1B8A4274BCBF}" dt="2026-10-07T15:25:53.036" v="346" actId="21"/>
-          <ac:picMkLst>
-            <pc:docMk/>
-            <pc:sldMk cId="4290253312" sldId="263"/>
-            <ac:picMk id="3" creationId="{2AF3BFA0-FBF0-8523-82C8-01B01F154162}"/>
-          </ac:picMkLst>
-        </pc:picChg>
-        <pc:picChg chg="add mod">
-          <ac:chgData name="Shamshika Reddy" userId="64b02f5a8dec7662" providerId="LiveId" clId="{62653A95-EF0A-4CE7-9970-1B8A4274BCBF}" dt="2026-10-07T15:26:08.036" v="349" actId="14100"/>
-          <ac:picMkLst>
-            <pc:docMk/>
-            <pc:sldMk cId="4290253312" sldId="263"/>
-            <ac:picMk id="5" creationId="{C400F1C4-1D56-5BAD-4FE9-5EC5F68398B4}"/>
+            <pc:sldMk cId="3881232960" sldId="264"/>
+            <ac:picMk id="3" creationId="{62FA549C-6E28-6CD9-A925-2FC35C4502C4}"/>
           </ac:picMkLst>
         </pc:picChg>
       </pc:sldChg>
       <pc:sldChg chg="addSp modSp new mod">
-        <pc:chgData name="Shamshika Reddy" userId="64b02f5a8dec7662" providerId="LiveId" clId="{62653A95-EF0A-4CE7-9970-1B8A4274BCBF}" dt="2026-10-07T15:28:44.260" v="401" actId="20577"/>
+        <pc:chgData name="Shamshika Reddy" userId="64b02f5a8dec7662" providerId="LiveId" clId="{62653A95-EF0A-4CE7-9970-1B8A4274BCBF}" dt="2026-10-14T13:22:45.398" v="450" actId="14100"/>
         <pc:sldMkLst>
           <pc:docMk/>
-          <pc:sldMk cId="3583637246" sldId="264"/>
+          <pc:sldMk cId="1616049124" sldId="265"/>
         </pc:sldMkLst>
-        <pc:spChg chg="add mod">
-          <ac:chgData name="Shamshika Reddy" userId="64b02f5a8dec7662" providerId="LiveId" clId="{62653A95-EF0A-4CE7-9970-1B8A4274BCBF}" dt="2026-10-07T15:27:33.100" v="384" actId="20577"/>
-          <ac:spMkLst>
-            <pc:docMk/>
-            <pc:sldMk cId="3583637246" sldId="264"/>
-            <ac:spMk id="4" creationId="{02FD27F2-72C0-5EB0-F93D-B05FD75394FE}"/>
-          </ac:spMkLst>
-        </pc:spChg>
-        <pc:spChg chg="add mod">
-          <ac:chgData name="Shamshika Reddy" userId="64b02f5a8dec7662" providerId="LiveId" clId="{62653A95-EF0A-4CE7-9970-1B8A4274BCBF}" dt="2026-10-07T15:28:44.260" v="401" actId="20577"/>
-          <ac:spMkLst>
-            <pc:docMk/>
-            <pc:sldMk cId="3583637246" sldId="264"/>
-            <ac:spMk id="5" creationId="{4DEFAC61-3D20-609C-6156-1828A681AD11}"/>
-          </ac:spMkLst>
-        </pc:spChg>
         <pc:picChg chg="add mod">
-          <ac:chgData name="Shamshika Reddy" userId="64b02f5a8dec7662" providerId="LiveId" clId="{62653A95-EF0A-4CE7-9970-1B8A4274BCBF}" dt="2026-10-07T15:26:57.240" v="355" actId="14100"/>
+          <ac:chgData name="Shamshika Reddy" userId="64b02f5a8dec7662" providerId="LiveId" clId="{62653A95-EF0A-4CE7-9970-1B8A4274BCBF}" dt="2026-10-14T13:22:21.997" v="445" actId="14100"/>
           <ac:picMkLst>
             <pc:docMk/>
-            <pc:sldMk cId="3583637246" sldId="264"/>
-            <ac:picMk id="3" creationId="{8AE54293-276F-45D0-7753-14018B7F433A}"/>
+            <pc:sldMk cId="1616049124" sldId="265"/>
+            <ac:picMk id="3" creationId="{0AEB3750-8051-E1B5-A508-F0617D409BA0}"/>
+          </ac:picMkLst>
+        </pc:picChg>
+        <pc:picChg chg="add mod">
+          <ac:chgData name="Shamshika Reddy" userId="64b02f5a8dec7662" providerId="LiveId" clId="{62653A95-EF0A-4CE7-9970-1B8A4274BCBF}" dt="2026-10-14T13:22:45.398" v="450" actId="14100"/>
+          <ac:picMkLst>
+            <pc:docMk/>
+            <pc:sldMk cId="1616049124" sldId="265"/>
+            <ac:picMk id="5" creationId="{755F0BBE-2B80-8F4A-DEC3-625CFC9C40F7}"/>
           </ac:picMkLst>
         </pc:picChg>
       </pc:sldChg>
-      <pc:sldChg chg="addSp delSp modSp new mod">
-        <pc:chgData name="Shamshika Reddy" userId="64b02f5a8dec7662" providerId="LiveId" clId="{62653A95-EF0A-4CE7-9970-1B8A4274BCBF}" dt="2026-10-07T15:30:30.456" v="410" actId="14100"/>
+      <pc:sldChg chg="addSp modSp new mod modClrScheme chgLayout">
+        <pc:chgData name="Shamshika Reddy" userId="64b02f5a8dec7662" providerId="LiveId" clId="{62653A95-EF0A-4CE7-9970-1B8A4274BCBF}" dt="2026-10-14T13:25:18.472" v="498" actId="20577"/>
         <pc:sldMkLst>
           <pc:docMk/>
-          <pc:sldMk cId="4109337820" sldId="265"/>
+          <pc:sldMk cId="1563859033" sldId="266"/>
         </pc:sldMkLst>
-        <pc:picChg chg="add del mod">
-          <ac:chgData name="Shamshika Reddy" userId="64b02f5a8dec7662" providerId="LiveId" clId="{62653A95-EF0A-4CE7-9970-1B8A4274BCBF}" dt="2026-10-07T15:30:02.554" v="404" actId="21"/>
+        <pc:spChg chg="add mod ord">
+          <ac:chgData name="Shamshika Reddy" userId="64b02f5a8dec7662" providerId="LiveId" clId="{62653A95-EF0A-4CE7-9970-1B8A4274BCBF}" dt="2026-10-14T13:24:05.630" v="472" actId="20577"/>
+          <ac:spMkLst>
+            <pc:docMk/>
+            <pc:sldMk cId="1563859033" sldId="266"/>
+            <ac:spMk id="4" creationId="{D1CB794B-64EE-3200-487E-93D9290F5C24}"/>
+          </ac:spMkLst>
+        </pc:spChg>
+        <pc:spChg chg="add mod ord">
+          <ac:chgData name="Shamshika Reddy" userId="64b02f5a8dec7662" providerId="LiveId" clId="{62653A95-EF0A-4CE7-9970-1B8A4274BCBF}" dt="2026-10-14T13:25:18.472" v="498" actId="20577"/>
+          <ac:spMkLst>
+            <pc:docMk/>
+            <pc:sldMk cId="1563859033" sldId="266"/>
+            <ac:spMk id="5" creationId="{7DCA0CEE-374D-E508-C980-0F49F3473C03}"/>
+          </ac:spMkLst>
+        </pc:spChg>
+        <pc:picChg chg="add">
+          <ac:chgData name="Shamshika Reddy" userId="64b02f5a8dec7662" providerId="LiveId" clId="{62653A95-EF0A-4CE7-9970-1B8A4274BCBF}" dt="2026-10-14T12:56:49.327" v="75" actId="22"/>
           <ac:picMkLst>
             <pc:docMk/>
-            <pc:sldMk cId="4109337820" sldId="265"/>
-            <ac:picMk id="3" creationId="{6E1A72C2-E2A1-A307-77F8-A69D54953979}"/>
-          </ac:picMkLst>
-        </pc:picChg>
-        <pc:picChg chg="add mod">
-          <ac:chgData name="Shamshika Reddy" userId="64b02f5a8dec7662" providerId="LiveId" clId="{62653A95-EF0A-4CE7-9970-1B8A4274BCBF}" dt="2026-10-07T15:30:30.456" v="410" actId="14100"/>
-          <ac:picMkLst>
-            <pc:docMk/>
-            <pc:sldMk cId="4109337820" sldId="265"/>
-            <ac:picMk id="5" creationId="{4D07FF64-A421-5F2E-7383-6D7779585775}"/>
+            <pc:sldMk cId="1563859033" sldId="266"/>
+            <ac:picMk id="3" creationId="{712A89F9-B988-4F56-EDC6-C8A10822EC5E}"/>
           </ac:picMkLst>
         </pc:picChg>
       </pc:sldChg>
-      <pc:sldChg chg="addSp modSp new mod">
-        <pc:chgData name="Shamshika Reddy" userId="64b02f5a8dec7662" providerId="LiveId" clId="{62653A95-EF0A-4CE7-9970-1B8A4274BCBF}" dt="2026-10-07T16:08:35.414" v="461" actId="20577"/>
+      <pc:sldChg chg="new">
+        <pc:chgData name="Shamshika Reddy" userId="64b02f5a8dec7662" providerId="LiveId" clId="{62653A95-EF0A-4CE7-9970-1B8A4274BCBF}" dt="2026-10-14T12:55:30.594" v="58" actId="680"/>
         <pc:sldMkLst>
           <pc:docMk/>
-          <pc:sldMk cId="1673344606" sldId="266"/>
+          <pc:sldMk cId="1595496826" sldId="267"/>
         </pc:sldMkLst>
-        <pc:spChg chg="add mod">
-          <ac:chgData name="Shamshika Reddy" userId="64b02f5a8dec7662" providerId="LiveId" clId="{62653A95-EF0A-4CE7-9970-1B8A4274BCBF}" dt="2026-10-07T16:05:52.262" v="426" actId="1076"/>
-          <ac:spMkLst>
-            <pc:docMk/>
-            <pc:sldMk cId="1673344606" sldId="266"/>
-            <ac:spMk id="4" creationId="{E7B53100-CA2D-112E-DF61-87DF357E37AD}"/>
-          </ac:spMkLst>
-        </pc:spChg>
-        <pc:spChg chg="add mod">
-          <ac:chgData name="Shamshika Reddy" userId="64b02f5a8dec7662" providerId="LiveId" clId="{62653A95-EF0A-4CE7-9970-1B8A4274BCBF}" dt="2026-10-07T16:08:35.414" v="461" actId="20577"/>
-          <ac:spMkLst>
-            <pc:docMk/>
-            <pc:sldMk cId="1673344606" sldId="266"/>
-            <ac:spMk id="5" creationId="{21D90F35-EF0D-DBFF-86C5-2826C0868705}"/>
-          </ac:spMkLst>
-        </pc:spChg>
-        <pc:picChg chg="add mod">
-          <ac:chgData name="Shamshika Reddy" userId="64b02f5a8dec7662" providerId="LiveId" clId="{62653A95-EF0A-4CE7-9970-1B8A4274BCBF}" dt="2026-10-07T15:59:44.206" v="417" actId="14100"/>
+      </pc:sldChg>
+      <pc:sldChg chg="addSp new mod">
+        <pc:chgData name="Shamshika Reddy" userId="64b02f5a8dec7662" providerId="LiveId" clId="{62653A95-EF0A-4CE7-9970-1B8A4274BCBF}" dt="2026-10-14T12:56:53.198" v="76" actId="22"/>
+        <pc:sldMkLst>
+          <pc:docMk/>
+          <pc:sldMk cId="2497659484" sldId="268"/>
+        </pc:sldMkLst>
+        <pc:picChg chg="add">
+          <ac:chgData name="Shamshika Reddy" userId="64b02f5a8dec7662" providerId="LiveId" clId="{62653A95-EF0A-4CE7-9970-1B8A4274BCBF}" dt="2026-10-14T12:56:53.198" v="76" actId="22"/>
           <ac:picMkLst>
             <pc:docMk/>
-            <pc:sldMk cId="1673344606" sldId="266"/>
-            <ac:picMk id="3" creationId="{A7EB9C37-C408-9C59-C244-7CB10892806E}"/>
+            <pc:sldMk cId="2497659484" sldId="268"/>
+            <ac:picMk id="3" creationId="{C4FC731F-1DC6-7378-6A1E-44E4285A09FE}"/>
           </ac:picMkLst>
         </pc:picChg>
       </pc:sldChg>
-      <pc:sldChg chg="addSp delSp modSp new mod">
-        <pc:chgData name="Shamshika Reddy" userId="64b02f5a8dec7662" providerId="LiveId" clId="{62653A95-EF0A-4CE7-9970-1B8A4274BCBF}" dt="2026-10-07T16:16:05.381" v="575" actId="20577"/>
+      <pc:sldChg chg="new">
+        <pc:chgData name="Shamshika Reddy" userId="64b02f5a8dec7662" providerId="LiveId" clId="{62653A95-EF0A-4CE7-9970-1B8A4274BCBF}" dt="2026-10-14T12:55:37.282" v="60" actId="680"/>
         <pc:sldMkLst>
           <pc:docMk/>
-          <pc:sldMk cId="1717427898" sldId="267"/>
+          <pc:sldMk cId="1107338421" sldId="269"/>
         </pc:sldMkLst>
-        <pc:spChg chg="add mod">
-          <ac:chgData name="Shamshika Reddy" userId="64b02f5a8dec7662" providerId="LiveId" clId="{62653A95-EF0A-4CE7-9970-1B8A4274BCBF}" dt="2026-10-07T16:12:00.431" v="513" actId="20577"/>
-          <ac:spMkLst>
-            <pc:docMk/>
-            <pc:sldMk cId="1717427898" sldId="267"/>
-            <ac:spMk id="4" creationId="{6ABF67CB-E79D-92D4-F7FE-43F0421632A0}"/>
-          </ac:spMkLst>
-        </pc:spChg>
-        <pc:spChg chg="add del mod">
-          <ac:chgData name="Shamshika Reddy" userId="64b02f5a8dec7662" providerId="LiveId" clId="{62653A95-EF0A-4CE7-9970-1B8A4274BCBF}" dt="2026-10-07T16:12:22.775" v="515" actId="21"/>
-          <ac:spMkLst>
-            <pc:docMk/>
-            <pc:sldMk cId="1717427898" sldId="267"/>
-            <ac:spMk id="5" creationId="{3BBA0F88-7FD9-F6E3-1DCF-6DBF72BF625A}"/>
-          </ac:spMkLst>
-        </pc:spChg>
-        <pc:spChg chg="add mod">
-          <ac:chgData name="Shamshika Reddy" userId="64b02f5a8dec7662" providerId="LiveId" clId="{62653A95-EF0A-4CE7-9970-1B8A4274BCBF}" dt="2026-10-07T16:16:05.381" v="575" actId="20577"/>
-          <ac:spMkLst>
-            <pc:docMk/>
-            <pc:sldMk cId="1717427898" sldId="267"/>
-            <ac:spMk id="6" creationId="{E27DE6AE-D091-B5D6-02DD-FED23402AA8F}"/>
-          </ac:spMkLst>
-        </pc:spChg>
-        <pc:picChg chg="add mod">
-          <ac:chgData name="Shamshika Reddy" userId="64b02f5a8dec7662" providerId="LiveId" clId="{62653A95-EF0A-4CE7-9970-1B8A4274BCBF}" dt="2026-10-07T16:10:33.655" v="468" actId="14100"/>
-          <ac:picMkLst>
-            <pc:docMk/>
-            <pc:sldMk cId="1717427898" sldId="267"/>
-            <ac:picMk id="3" creationId="{B58891D2-6C5D-F782-06D3-00EF24060668}"/>
-          </ac:picMkLst>
-        </pc:picChg>
-      </pc:sldChg>
-      <pc:sldChg chg="addSp delSp modSp new mod ord">
-        <pc:chgData name="Shamshika Reddy" userId="64b02f5a8dec7662" providerId="LiveId" clId="{62653A95-EF0A-4CE7-9970-1B8A4274BCBF}" dt="2026-10-07T16:24:18.431" v="587" actId="14100"/>
-        <pc:sldMkLst>
-          <pc:docMk/>
-          <pc:sldMk cId="221785218" sldId="268"/>
-        </pc:sldMkLst>
-        <pc:picChg chg="add del mod">
-          <ac:chgData name="Shamshika Reddy" userId="64b02f5a8dec7662" providerId="LiveId" clId="{62653A95-EF0A-4CE7-9970-1B8A4274BCBF}" dt="2026-10-07T16:17:34.393" v="580" actId="21"/>
-          <ac:picMkLst>
-            <pc:docMk/>
-            <pc:sldMk cId="221785218" sldId="268"/>
-            <ac:picMk id="3" creationId="{1E350D40-5D9D-D73C-309E-056310DEFF49}"/>
-          </ac:picMkLst>
-        </pc:picChg>
-        <pc:picChg chg="add del mod">
-          <ac:chgData name="Shamshika Reddy" userId="64b02f5a8dec7662" providerId="LiveId" clId="{62653A95-EF0A-4CE7-9970-1B8A4274BCBF}" dt="2026-10-07T16:23:50.753" v="582" actId="21"/>
-          <ac:picMkLst>
-            <pc:docMk/>
-            <pc:sldMk cId="221785218" sldId="268"/>
-            <ac:picMk id="5" creationId="{417DC987-2993-D9C1-7A06-97FDF03DBB37}"/>
-          </ac:picMkLst>
-        </pc:picChg>
-        <pc:picChg chg="add mod">
-          <ac:chgData name="Shamshika Reddy" userId="64b02f5a8dec7662" providerId="LiveId" clId="{62653A95-EF0A-4CE7-9970-1B8A4274BCBF}" dt="2026-10-07T16:24:18.431" v="587" actId="14100"/>
-          <ac:picMkLst>
-            <pc:docMk/>
-            <pc:sldMk cId="221785218" sldId="268"/>
-            <ac:picMk id="7" creationId="{D6E6E228-D43D-2C57-B56B-757AFC5339BF}"/>
-          </ac:picMkLst>
-        </pc:picChg>
-      </pc:sldChg>
-      <pc:sldChg chg="addSp delSp modSp new mod">
-        <pc:chgData name="Shamshika Reddy" userId="64b02f5a8dec7662" providerId="LiveId" clId="{62653A95-EF0A-4CE7-9970-1B8A4274BCBF}" dt="2026-10-07T16:35:48.802" v="657" actId="14100"/>
-        <pc:sldMkLst>
-          <pc:docMk/>
-          <pc:sldMk cId="2561722538" sldId="269"/>
-        </pc:sldMkLst>
-        <pc:spChg chg="add del mod">
-          <ac:chgData name="Shamshika Reddy" userId="64b02f5a8dec7662" providerId="LiveId" clId="{62653A95-EF0A-4CE7-9970-1B8A4274BCBF}" dt="2026-10-07T16:29:24.662" v="639"/>
-          <ac:spMkLst>
-            <pc:docMk/>
-            <pc:sldMk cId="2561722538" sldId="269"/>
-            <ac:spMk id="4" creationId="{0F0EF0CD-96E5-C6D0-C9C2-0970A0A14944}"/>
-          </ac:spMkLst>
-        </pc:spChg>
-        <pc:spChg chg="add del mod">
-          <ac:chgData name="Shamshika Reddy" userId="64b02f5a8dec7662" providerId="LiveId" clId="{62653A95-EF0A-4CE7-9970-1B8A4274BCBF}" dt="2026-10-07T16:28:58.273" v="620" actId="21"/>
-          <ac:spMkLst>
-            <pc:docMk/>
-            <pc:sldMk cId="2561722538" sldId="269"/>
-            <ac:spMk id="5" creationId="{01FCF53A-FA03-5394-6E6E-A022EC72DB71}"/>
-          </ac:spMkLst>
-        </pc:spChg>
-        <pc:picChg chg="add del mod">
-          <ac:chgData name="Shamshika Reddy" userId="64b02f5a8dec7662" providerId="LiveId" clId="{62653A95-EF0A-4CE7-9970-1B8A4274BCBF}" dt="2026-10-07T16:29:04.816" v="621" actId="21"/>
-          <ac:picMkLst>
-            <pc:docMk/>
-            <pc:sldMk cId="2561722538" sldId="269"/>
-            <ac:picMk id="3" creationId="{27E42707-2FC8-FB30-0CB7-291E30A04663}"/>
-          </ac:picMkLst>
-        </pc:picChg>
-        <pc:picChg chg="add del mod">
-          <ac:chgData name="Shamshika Reddy" userId="64b02f5a8dec7662" providerId="LiveId" clId="{62653A95-EF0A-4CE7-9970-1B8A4274BCBF}" dt="2026-10-07T16:30:26.540" v="651" actId="21"/>
-          <ac:picMkLst>
-            <pc:docMk/>
-            <pc:sldMk cId="2561722538" sldId="269"/>
-            <ac:picMk id="7" creationId="{2B6736FD-3262-1940-E325-ADC47DD41214}"/>
-          </ac:picMkLst>
-        </pc:picChg>
-        <pc:picChg chg="add del mod">
-          <ac:chgData name="Shamshika Reddy" userId="64b02f5a8dec7662" providerId="LiveId" clId="{62653A95-EF0A-4CE7-9970-1B8A4274BCBF}" dt="2026-10-07T16:31:45.926" v="654" actId="21"/>
-          <ac:picMkLst>
-            <pc:docMk/>
-            <pc:sldMk cId="2561722538" sldId="269"/>
-            <ac:picMk id="9" creationId="{A318C94E-2C0D-9851-7557-F964CEF311A4}"/>
-          </ac:picMkLst>
-        </pc:picChg>
-        <pc:picChg chg="add mod">
-          <ac:chgData name="Shamshika Reddy" userId="64b02f5a8dec7662" providerId="LiveId" clId="{62653A95-EF0A-4CE7-9970-1B8A4274BCBF}" dt="2026-10-07T16:35:48.802" v="657" actId="14100"/>
-          <ac:picMkLst>
-            <pc:docMk/>
-            <pc:sldMk cId="2561722538" sldId="269"/>
-            <ac:picMk id="11" creationId="{9DBB58D4-3A6F-EA92-ABED-CCA22B8252AD}"/>
-          </ac:picMkLst>
-        </pc:picChg>
-      </pc:sldChg>
-      <pc:sldChg chg="addSp delSp modSp new mod">
-        <pc:chgData name="Shamshika Reddy" userId="64b02f5a8dec7662" providerId="LiveId" clId="{62653A95-EF0A-4CE7-9970-1B8A4274BCBF}" dt="2026-10-07T16:44:24.263" v="899" actId="20577"/>
-        <pc:sldMkLst>
-          <pc:docMk/>
-          <pc:sldMk cId="1939471116" sldId="270"/>
-        </pc:sldMkLst>
-        <pc:spChg chg="add del mod">
-          <ac:chgData name="Shamshika Reddy" userId="64b02f5a8dec7662" providerId="LiveId" clId="{62653A95-EF0A-4CE7-9970-1B8A4274BCBF}" dt="2026-10-07T16:39:08.824" v="684"/>
-          <ac:spMkLst>
-            <pc:docMk/>
-            <pc:sldMk cId="1939471116" sldId="270"/>
-            <ac:spMk id="4" creationId="{35D123A1-944F-412A-EBB4-C7F37CB45B4C}"/>
-          </ac:spMkLst>
-        </pc:spChg>
-        <pc:spChg chg="add mod">
-          <ac:chgData name="Shamshika Reddy" userId="64b02f5a8dec7662" providerId="LiveId" clId="{62653A95-EF0A-4CE7-9970-1B8A4274BCBF}" dt="2026-10-07T16:39:06.420" v="682" actId="1076"/>
-          <ac:spMkLst>
-            <pc:docMk/>
-            <pc:sldMk cId="1939471116" sldId="270"/>
-            <ac:spMk id="5" creationId="{5122E4D9-E807-E540-B8B6-299555737E7A}"/>
-          </ac:spMkLst>
-        </pc:spChg>
-        <pc:spChg chg="add mod">
-          <ac:chgData name="Shamshika Reddy" userId="64b02f5a8dec7662" providerId="LiveId" clId="{62653A95-EF0A-4CE7-9970-1B8A4274BCBF}" dt="2026-10-07T16:44:24.263" v="899" actId="20577"/>
-          <ac:spMkLst>
-            <pc:docMk/>
-            <pc:sldMk cId="1939471116" sldId="270"/>
-            <ac:spMk id="6" creationId="{E35E22EE-BF4C-56A2-1273-2D169B751AEF}"/>
-          </ac:spMkLst>
-        </pc:spChg>
-        <pc:picChg chg="add mod">
-          <ac:chgData name="Shamshika Reddy" userId="64b02f5a8dec7662" providerId="LiveId" clId="{62653A95-EF0A-4CE7-9970-1B8A4274BCBF}" dt="2026-10-07T16:37:18.404" v="668" actId="14100"/>
-          <ac:picMkLst>
-            <pc:docMk/>
-            <pc:sldMk cId="1939471116" sldId="270"/>
-            <ac:picMk id="3" creationId="{D5EFD7E1-6960-BF2A-A172-7C14C924A05F}"/>
-          </ac:picMkLst>
-        </pc:picChg>
-      </pc:sldChg>
-      <pc:sldChg chg="addSp modSp new mod">
-        <pc:chgData name="Shamshika Reddy" userId="64b02f5a8dec7662" providerId="LiveId" clId="{62653A95-EF0A-4CE7-9970-1B8A4274BCBF}" dt="2026-10-07T16:50:01.775" v="904" actId="14100"/>
-        <pc:sldMkLst>
-          <pc:docMk/>
-          <pc:sldMk cId="1243839237" sldId="271"/>
-        </pc:sldMkLst>
-        <pc:picChg chg="add mod">
-          <ac:chgData name="Shamshika Reddy" userId="64b02f5a8dec7662" providerId="LiveId" clId="{62653A95-EF0A-4CE7-9970-1B8A4274BCBF}" dt="2026-10-07T16:50:01.775" v="904" actId="14100"/>
-          <ac:picMkLst>
-            <pc:docMk/>
-            <pc:sldMk cId="1243839237" sldId="271"/>
-            <ac:picMk id="3" creationId="{13AC4856-3CC4-3FD1-21E2-49C9B125D088}"/>
-          </ac:picMkLst>
-        </pc:picChg>
       </pc:sldChg>
     </pc:docChg>
   </pc:docChgLst>
@@ -613,7 +459,7 @@
           <p:cNvPr id="2" name="Title 1">
             <a:extLst>
               <a:ext uri="{FF2B5EF4-FFF2-40B4-BE49-F238E27FC236}">
-                <a16:creationId xmlns:a16="http://schemas.microsoft.com/office/drawing/2014/main" id="{C930C35A-DF0D-92FC-7FD1-FE7534A5E408}"/>
+                <a16:creationId xmlns:a16="http://schemas.microsoft.com/office/drawing/2014/main" id="{3825E078-3115-EC7F-702C-64F4161ED505}"/>
               </a:ext>
             </a:extLst>
           </p:cNvPr>
@@ -651,7 +497,7 @@
           <p:cNvPr id="3" name="Subtitle 2">
             <a:extLst>
               <a:ext uri="{FF2B5EF4-FFF2-40B4-BE49-F238E27FC236}">
-                <a16:creationId xmlns:a16="http://schemas.microsoft.com/office/drawing/2014/main" id="{C18CC4B3-D967-1883-19B8-C0249081371A}"/>
+                <a16:creationId xmlns:a16="http://schemas.microsoft.com/office/drawing/2014/main" id="{BB57A939-AC77-03BD-761D-BE21DCFCA055}"/>
               </a:ext>
             </a:extLst>
           </p:cNvPr>
@@ -722,7 +568,7 @@
           <p:cNvPr id="4" name="Date Placeholder 3">
             <a:extLst>
               <a:ext uri="{FF2B5EF4-FFF2-40B4-BE49-F238E27FC236}">
-                <a16:creationId xmlns:a16="http://schemas.microsoft.com/office/drawing/2014/main" id="{48C08F51-107B-9F97-EEB2-BFC3A5CAB488}"/>
+                <a16:creationId xmlns:a16="http://schemas.microsoft.com/office/drawing/2014/main" id="{53C0F5F2-1C7D-8596-7A83-2DAC0DA5DC02}"/>
               </a:ext>
             </a:extLst>
           </p:cNvPr>
@@ -738,9 +584,9 @@
           <a:bodyPr/>
           <a:lstStyle/>
           <a:p>
-            <a:fld id="{57C38401-29E1-4003-8869-D5E649D7A3F0}" type="datetimeFigureOut">
+            <a:fld id="{C20BC2F4-CB67-49A1-A59D-A63C4327440D}" type="datetimeFigureOut">
               <a:rPr lang="en-IN" smtClean="0"/>
-              <a:t>07-10-2026</a:t>
+              <a:t>14-10-2026</a:t>
             </a:fld>
             <a:endParaRPr lang="en-IN"/>
           </a:p>
@@ -751,7 +597,7 @@
           <p:cNvPr id="5" name="Footer Placeholder 4">
             <a:extLst>
               <a:ext uri="{FF2B5EF4-FFF2-40B4-BE49-F238E27FC236}">
-                <a16:creationId xmlns:a16="http://schemas.microsoft.com/office/drawing/2014/main" id="{AAD7CEE3-0B40-D2D5-0EB9-989F9434D3EB}"/>
+                <a16:creationId xmlns:a16="http://schemas.microsoft.com/office/drawing/2014/main" id="{A5725E19-D999-0EB2-FF6C-B228FBF4B8AD}"/>
               </a:ext>
             </a:extLst>
           </p:cNvPr>
@@ -776,7 +622,7 @@
           <p:cNvPr id="6" name="Slide Number Placeholder 5">
             <a:extLst>
               <a:ext uri="{FF2B5EF4-FFF2-40B4-BE49-F238E27FC236}">
-                <a16:creationId xmlns:a16="http://schemas.microsoft.com/office/drawing/2014/main" id="{28212B2A-2852-A17F-0BBD-7C509B860F2E}"/>
+                <a16:creationId xmlns:a16="http://schemas.microsoft.com/office/drawing/2014/main" id="{2B042784-45D3-A8AB-E4B0-7D848F883700}"/>
               </a:ext>
             </a:extLst>
           </p:cNvPr>
@@ -792,7 +638,7 @@
           <a:bodyPr/>
           <a:lstStyle/>
           <a:p>
-            <a:fld id="{67F7BFF0-27F5-4BA0-A2A6-35D7A0F8B102}" type="slidenum">
+            <a:fld id="{854B815E-B356-4580-AC5D-7179791238EE}" type="slidenum">
               <a:rPr lang="en-IN" smtClean="0"/>
               <a:t>‹#›</a:t>
             </a:fld>
@@ -803,7 +649,7 @@
     </p:spTree>
     <p:extLst>
       <p:ext uri="{BB962C8B-B14F-4D97-AF65-F5344CB8AC3E}">
-        <p14:creationId xmlns:p14="http://schemas.microsoft.com/office/powerpoint/2010/main" val="1808778584"/>
+        <p14:creationId xmlns:p14="http://schemas.microsoft.com/office/powerpoint/2010/main" val="2994615815"/>
       </p:ext>
     </p:extLst>
   </p:cSld>
@@ -835,7 +681,7 @@
           <p:cNvPr id="2" name="Title 1">
             <a:extLst>
               <a:ext uri="{FF2B5EF4-FFF2-40B4-BE49-F238E27FC236}">
-                <a16:creationId xmlns:a16="http://schemas.microsoft.com/office/drawing/2014/main" id="{6CADB735-A8F9-F72A-4B3D-E6F2A141B159}"/>
+                <a16:creationId xmlns:a16="http://schemas.microsoft.com/office/drawing/2014/main" id="{DD433C37-155A-9439-5FA8-77D061A9B5F8}"/>
               </a:ext>
             </a:extLst>
           </p:cNvPr>
@@ -864,7 +710,7 @@
           <p:cNvPr id="3" name="Vertical Text Placeholder 2">
             <a:extLst>
               <a:ext uri="{FF2B5EF4-FFF2-40B4-BE49-F238E27FC236}">
-                <a16:creationId xmlns:a16="http://schemas.microsoft.com/office/drawing/2014/main" id="{E710EC5E-61C5-9589-8109-E37FC5E23566}"/>
+                <a16:creationId xmlns:a16="http://schemas.microsoft.com/office/drawing/2014/main" id="{CE0D6F15-8612-E9CC-D1F2-DE528721DAA3}"/>
               </a:ext>
             </a:extLst>
           </p:cNvPr>
@@ -922,7 +768,7 @@
           <p:cNvPr id="4" name="Date Placeholder 3">
             <a:extLst>
               <a:ext uri="{FF2B5EF4-FFF2-40B4-BE49-F238E27FC236}">
-                <a16:creationId xmlns:a16="http://schemas.microsoft.com/office/drawing/2014/main" id="{F2C3CB08-3A10-A4F5-469E-E07D1935E265}"/>
+                <a16:creationId xmlns:a16="http://schemas.microsoft.com/office/drawing/2014/main" id="{28089B75-B6E9-7A82-758A-59A3D7094AD7}"/>
               </a:ext>
             </a:extLst>
           </p:cNvPr>
@@ -938,9 +784,9 @@
           <a:bodyPr/>
           <a:lstStyle/>
           <a:p>
-            <a:fld id="{57C38401-29E1-4003-8869-D5E649D7A3F0}" type="datetimeFigureOut">
+            <a:fld id="{C20BC2F4-CB67-49A1-A59D-A63C4327440D}" type="datetimeFigureOut">
               <a:rPr lang="en-IN" smtClean="0"/>
-              <a:t>07-10-2026</a:t>
+              <a:t>14-10-2026</a:t>
             </a:fld>
             <a:endParaRPr lang="en-IN"/>
           </a:p>
@@ -951,7 +797,7 @@
           <p:cNvPr id="5" name="Footer Placeholder 4">
             <a:extLst>
               <a:ext uri="{FF2B5EF4-FFF2-40B4-BE49-F238E27FC236}">
-                <a16:creationId xmlns:a16="http://schemas.microsoft.com/office/drawing/2014/main" id="{0DEA2726-E05D-5645-DBF6-E8D263D7E4A7}"/>
+                <a16:creationId xmlns:a16="http://schemas.microsoft.com/office/drawing/2014/main" id="{3741F81D-EE5A-F0C0-EF3D-F09E582F3628}"/>
               </a:ext>
             </a:extLst>
           </p:cNvPr>
@@ -976,7 +822,7 @@
           <p:cNvPr id="6" name="Slide Number Placeholder 5">
             <a:extLst>
               <a:ext uri="{FF2B5EF4-FFF2-40B4-BE49-F238E27FC236}">
-                <a16:creationId xmlns:a16="http://schemas.microsoft.com/office/drawing/2014/main" id="{3EFEC8EB-1EAC-0D5E-F93C-44B8B840E297}"/>
+                <a16:creationId xmlns:a16="http://schemas.microsoft.com/office/drawing/2014/main" id="{694A2319-D5EF-8399-C5A2-6CD1BCDAF5FE}"/>
               </a:ext>
             </a:extLst>
           </p:cNvPr>
@@ -992,7 +838,7 @@
           <a:bodyPr/>
           <a:lstStyle/>
           <a:p>
-            <a:fld id="{67F7BFF0-27F5-4BA0-A2A6-35D7A0F8B102}" type="slidenum">
+            <a:fld id="{854B815E-B356-4580-AC5D-7179791238EE}" type="slidenum">
               <a:rPr lang="en-IN" smtClean="0"/>
               <a:t>‹#›</a:t>
             </a:fld>
@@ -1003,7 +849,7 @@
     </p:spTree>
     <p:extLst>
       <p:ext uri="{BB962C8B-B14F-4D97-AF65-F5344CB8AC3E}">
-        <p14:creationId xmlns:p14="http://schemas.microsoft.com/office/powerpoint/2010/main" val="1557270755"/>
+        <p14:creationId xmlns:p14="http://schemas.microsoft.com/office/powerpoint/2010/main" val="2630996733"/>
       </p:ext>
     </p:extLst>
   </p:cSld>
@@ -1035,7 +881,7 @@
           <p:cNvPr id="2" name="Vertical Title 1">
             <a:extLst>
               <a:ext uri="{FF2B5EF4-FFF2-40B4-BE49-F238E27FC236}">
-                <a16:creationId xmlns:a16="http://schemas.microsoft.com/office/drawing/2014/main" id="{1F904752-0AB2-93B2-CD0F-FDB1B2A50421}"/>
+                <a16:creationId xmlns:a16="http://schemas.microsoft.com/office/drawing/2014/main" id="{B22AAEE6-1F01-7D40-D3D4-FCECE2A6282B}"/>
               </a:ext>
             </a:extLst>
           </p:cNvPr>
@@ -1069,7 +915,7 @@
           <p:cNvPr id="3" name="Vertical Text Placeholder 2">
             <a:extLst>
               <a:ext uri="{FF2B5EF4-FFF2-40B4-BE49-F238E27FC236}">
-                <a16:creationId xmlns:a16="http://schemas.microsoft.com/office/drawing/2014/main" id="{7218B242-C0A8-2C1A-6089-B2EF1D4D6D78}"/>
+                <a16:creationId xmlns:a16="http://schemas.microsoft.com/office/drawing/2014/main" id="{97056EBA-89D1-FBDD-3D9D-01E2ADC3DE9B}"/>
               </a:ext>
             </a:extLst>
           </p:cNvPr>
@@ -1132,7 +978,7 @@
           <p:cNvPr id="4" name="Date Placeholder 3">
             <a:extLst>
               <a:ext uri="{FF2B5EF4-FFF2-40B4-BE49-F238E27FC236}">
-                <a16:creationId xmlns:a16="http://schemas.microsoft.com/office/drawing/2014/main" id="{F6B6D120-9D8B-7A2F-8C1C-6E269A19A0BA}"/>
+                <a16:creationId xmlns:a16="http://schemas.microsoft.com/office/drawing/2014/main" id="{3AB472AB-0EE0-3670-F0EE-6F8898012D52}"/>
               </a:ext>
             </a:extLst>
           </p:cNvPr>
@@ -1148,9 +994,9 @@
           <a:bodyPr/>
           <a:lstStyle/>
           <a:p>
-            <a:fld id="{57C38401-29E1-4003-8869-D5E649D7A3F0}" type="datetimeFigureOut">
+            <a:fld id="{C20BC2F4-CB67-49A1-A59D-A63C4327440D}" type="datetimeFigureOut">
               <a:rPr lang="en-IN" smtClean="0"/>
-              <a:t>07-10-2026</a:t>
+              <a:t>14-10-2026</a:t>
             </a:fld>
             <a:endParaRPr lang="en-IN"/>
           </a:p>
@@ -1161,7 +1007,7 @@
           <p:cNvPr id="5" name="Footer Placeholder 4">
             <a:extLst>
               <a:ext uri="{FF2B5EF4-FFF2-40B4-BE49-F238E27FC236}">
-                <a16:creationId xmlns:a16="http://schemas.microsoft.com/office/drawing/2014/main" id="{84F3C711-3017-F36D-9727-E36C7BD582D0}"/>
+                <a16:creationId xmlns:a16="http://schemas.microsoft.com/office/drawing/2014/main" id="{E64B94A3-1EF2-77C5-3274-4822C58AE790}"/>
               </a:ext>
             </a:extLst>
           </p:cNvPr>
@@ -1186,7 +1032,7 @@
           <p:cNvPr id="6" name="Slide Number Placeholder 5">
             <a:extLst>
               <a:ext uri="{FF2B5EF4-FFF2-40B4-BE49-F238E27FC236}">
-                <a16:creationId xmlns:a16="http://schemas.microsoft.com/office/drawing/2014/main" id="{2EE029A6-10FD-9178-8197-65E7B79782AD}"/>
+                <a16:creationId xmlns:a16="http://schemas.microsoft.com/office/drawing/2014/main" id="{4AA83BCE-3A81-DAA8-D5CA-BE3F800CA36F}"/>
               </a:ext>
             </a:extLst>
           </p:cNvPr>
@@ -1202,7 +1048,7 @@
           <a:bodyPr/>
           <a:lstStyle/>
           <a:p>
-            <a:fld id="{67F7BFF0-27F5-4BA0-A2A6-35D7A0F8B102}" type="slidenum">
+            <a:fld id="{854B815E-B356-4580-AC5D-7179791238EE}" type="slidenum">
               <a:rPr lang="en-IN" smtClean="0"/>
               <a:t>‹#›</a:t>
             </a:fld>
@@ -1213,7 +1059,7 @@
     </p:spTree>
     <p:extLst>
       <p:ext uri="{BB962C8B-B14F-4D97-AF65-F5344CB8AC3E}">
-        <p14:creationId xmlns:p14="http://schemas.microsoft.com/office/powerpoint/2010/main" val="2474520040"/>
+        <p14:creationId xmlns:p14="http://schemas.microsoft.com/office/powerpoint/2010/main" val="3489898591"/>
       </p:ext>
     </p:extLst>
   </p:cSld>
@@ -1245,7 +1091,7 @@
           <p:cNvPr id="2" name="Title 1">
             <a:extLst>
               <a:ext uri="{FF2B5EF4-FFF2-40B4-BE49-F238E27FC236}">
-                <a16:creationId xmlns:a16="http://schemas.microsoft.com/office/drawing/2014/main" id="{5BB37160-E396-E9CA-E8A9-FABEB32E3722}"/>
+                <a16:creationId xmlns:a16="http://schemas.microsoft.com/office/drawing/2014/main" id="{442FBDAF-8085-46FB-A0D3-DB81E9846FF2}"/>
               </a:ext>
             </a:extLst>
           </p:cNvPr>
@@ -1274,7 +1120,7 @@
           <p:cNvPr id="3" name="Content Placeholder 2">
             <a:extLst>
               <a:ext uri="{FF2B5EF4-FFF2-40B4-BE49-F238E27FC236}">
-                <a16:creationId xmlns:a16="http://schemas.microsoft.com/office/drawing/2014/main" id="{AEFB97A6-0DC4-2024-571C-23791CC23841}"/>
+                <a16:creationId xmlns:a16="http://schemas.microsoft.com/office/drawing/2014/main" id="{65C60BA6-AD1C-80E3-14E5-7438FB93557E}"/>
               </a:ext>
             </a:extLst>
           </p:cNvPr>
@@ -1332,7 +1178,7 @@
           <p:cNvPr id="4" name="Date Placeholder 3">
             <a:extLst>
               <a:ext uri="{FF2B5EF4-FFF2-40B4-BE49-F238E27FC236}">
-                <a16:creationId xmlns:a16="http://schemas.microsoft.com/office/drawing/2014/main" id="{56B9DE85-9A1B-A6BE-BAA6-A5810EA94124}"/>
+                <a16:creationId xmlns:a16="http://schemas.microsoft.com/office/drawing/2014/main" id="{D9084955-02B9-289B-E0FC-83DF72BF01EA}"/>
               </a:ext>
             </a:extLst>
           </p:cNvPr>
@@ -1348,9 +1194,9 @@
           <a:bodyPr/>
           <a:lstStyle/>
           <a:p>
-            <a:fld id="{57C38401-29E1-4003-8869-D5E649D7A3F0}" type="datetimeFigureOut">
+            <a:fld id="{C20BC2F4-CB67-49A1-A59D-A63C4327440D}" type="datetimeFigureOut">
               <a:rPr lang="en-IN" smtClean="0"/>
-              <a:t>07-10-2026</a:t>
+              <a:t>14-10-2026</a:t>
             </a:fld>
             <a:endParaRPr lang="en-IN"/>
           </a:p>
@@ -1361,7 +1207,7 @@
           <p:cNvPr id="5" name="Footer Placeholder 4">
             <a:extLst>
               <a:ext uri="{FF2B5EF4-FFF2-40B4-BE49-F238E27FC236}">
-                <a16:creationId xmlns:a16="http://schemas.microsoft.com/office/drawing/2014/main" id="{1038B0A2-1A0A-64A8-87D6-6BC67FFA164F}"/>
+                <a16:creationId xmlns:a16="http://schemas.microsoft.com/office/drawing/2014/main" id="{57890829-F323-A49D-B651-6C02A2B782EA}"/>
               </a:ext>
             </a:extLst>
           </p:cNvPr>
@@ -1386,7 +1232,7 @@
           <p:cNvPr id="6" name="Slide Number Placeholder 5">
             <a:extLst>
               <a:ext uri="{FF2B5EF4-FFF2-40B4-BE49-F238E27FC236}">
-                <a16:creationId xmlns:a16="http://schemas.microsoft.com/office/drawing/2014/main" id="{6632875E-B1AC-EAF8-3378-33BAB09FE663}"/>
+                <a16:creationId xmlns:a16="http://schemas.microsoft.com/office/drawing/2014/main" id="{AA67FF48-3F95-CC3F-27C8-5C754A186935}"/>
               </a:ext>
             </a:extLst>
           </p:cNvPr>
@@ -1402,7 +1248,7 @@
           <a:bodyPr/>
           <a:lstStyle/>
           <a:p>
-            <a:fld id="{67F7BFF0-27F5-4BA0-A2A6-35D7A0F8B102}" type="slidenum">
+            <a:fld id="{854B815E-B356-4580-AC5D-7179791238EE}" type="slidenum">
               <a:rPr lang="en-IN" smtClean="0"/>
               <a:t>‹#›</a:t>
             </a:fld>
@@ -1413,7 +1259,7 @@
     </p:spTree>
     <p:extLst>
       <p:ext uri="{BB962C8B-B14F-4D97-AF65-F5344CB8AC3E}">
-        <p14:creationId xmlns:p14="http://schemas.microsoft.com/office/powerpoint/2010/main" val="2825804939"/>
+        <p14:creationId xmlns:p14="http://schemas.microsoft.com/office/powerpoint/2010/main" val="737926919"/>
       </p:ext>
     </p:extLst>
   </p:cSld>
@@ -1445,7 +1291,7 @@
           <p:cNvPr id="2" name="Title 1">
             <a:extLst>
               <a:ext uri="{FF2B5EF4-FFF2-40B4-BE49-F238E27FC236}">
-                <a16:creationId xmlns:a16="http://schemas.microsoft.com/office/drawing/2014/main" id="{24978783-0CBD-65D5-B6CB-B946321DACC7}"/>
+                <a16:creationId xmlns:a16="http://schemas.microsoft.com/office/drawing/2014/main" id="{8E70A925-B2EA-B51E-79F0-0C4BE28C0520}"/>
               </a:ext>
             </a:extLst>
           </p:cNvPr>
@@ -1483,7 +1329,7 @@
           <p:cNvPr id="3" name="Text Placeholder 2">
             <a:extLst>
               <a:ext uri="{FF2B5EF4-FFF2-40B4-BE49-F238E27FC236}">
-                <a16:creationId xmlns:a16="http://schemas.microsoft.com/office/drawing/2014/main" id="{7C8196CC-4CE4-E405-0318-AB919BB8F3AD}"/>
+                <a16:creationId xmlns:a16="http://schemas.microsoft.com/office/drawing/2014/main" id="{C573566D-2BE3-D101-6F6A-B1F4A1904B2C}"/>
               </a:ext>
             </a:extLst>
           </p:cNvPr>
@@ -1608,7 +1454,7 @@
           <p:cNvPr id="4" name="Date Placeholder 3">
             <a:extLst>
               <a:ext uri="{FF2B5EF4-FFF2-40B4-BE49-F238E27FC236}">
-                <a16:creationId xmlns:a16="http://schemas.microsoft.com/office/drawing/2014/main" id="{8097AADD-322A-6904-4B5E-0C2FBADCD692}"/>
+                <a16:creationId xmlns:a16="http://schemas.microsoft.com/office/drawing/2014/main" id="{C1F4CA5C-572C-7805-C4AB-4FC2E4756F0E}"/>
               </a:ext>
             </a:extLst>
           </p:cNvPr>
@@ -1624,9 +1470,9 @@
           <a:bodyPr/>
           <a:lstStyle/>
           <a:p>
-            <a:fld id="{57C38401-29E1-4003-8869-D5E649D7A3F0}" type="datetimeFigureOut">
+            <a:fld id="{C20BC2F4-CB67-49A1-A59D-A63C4327440D}" type="datetimeFigureOut">
               <a:rPr lang="en-IN" smtClean="0"/>
-              <a:t>07-10-2026</a:t>
+              <a:t>14-10-2026</a:t>
             </a:fld>
             <a:endParaRPr lang="en-IN"/>
           </a:p>
@@ -1637,7 +1483,7 @@
           <p:cNvPr id="5" name="Footer Placeholder 4">
             <a:extLst>
               <a:ext uri="{FF2B5EF4-FFF2-40B4-BE49-F238E27FC236}">
-                <a16:creationId xmlns:a16="http://schemas.microsoft.com/office/drawing/2014/main" id="{E20D689C-6A48-B586-5165-D7513F004494}"/>
+                <a16:creationId xmlns:a16="http://schemas.microsoft.com/office/drawing/2014/main" id="{C932B55B-0FA0-0276-8305-19218460ECF0}"/>
               </a:ext>
             </a:extLst>
           </p:cNvPr>
@@ -1662,7 +1508,7 @@
           <p:cNvPr id="6" name="Slide Number Placeholder 5">
             <a:extLst>
               <a:ext uri="{FF2B5EF4-FFF2-40B4-BE49-F238E27FC236}">
-                <a16:creationId xmlns:a16="http://schemas.microsoft.com/office/drawing/2014/main" id="{BF154857-93AD-BAB9-F8FA-CFB06C073C33}"/>
+                <a16:creationId xmlns:a16="http://schemas.microsoft.com/office/drawing/2014/main" id="{1980CB70-0239-7A9B-B450-673F509370F7}"/>
               </a:ext>
             </a:extLst>
           </p:cNvPr>
@@ -1678,7 +1524,7 @@
           <a:bodyPr/>
           <a:lstStyle/>
           <a:p>
-            <a:fld id="{67F7BFF0-27F5-4BA0-A2A6-35D7A0F8B102}" type="slidenum">
+            <a:fld id="{854B815E-B356-4580-AC5D-7179791238EE}" type="slidenum">
               <a:rPr lang="en-IN" smtClean="0"/>
               <a:t>‹#›</a:t>
             </a:fld>
@@ -1689,7 +1535,7 @@
     </p:spTree>
     <p:extLst>
       <p:ext uri="{BB962C8B-B14F-4D97-AF65-F5344CB8AC3E}">
-        <p14:creationId xmlns:p14="http://schemas.microsoft.com/office/powerpoint/2010/main" val="2393578965"/>
+        <p14:creationId xmlns:p14="http://schemas.microsoft.com/office/powerpoint/2010/main" val="2879535048"/>
       </p:ext>
     </p:extLst>
   </p:cSld>
@@ -1721,7 +1567,7 @@
           <p:cNvPr id="2" name="Title 1">
             <a:extLst>
               <a:ext uri="{FF2B5EF4-FFF2-40B4-BE49-F238E27FC236}">
-                <a16:creationId xmlns:a16="http://schemas.microsoft.com/office/drawing/2014/main" id="{89511A8C-0764-D8E0-6189-F1B712E6027B}"/>
+                <a16:creationId xmlns:a16="http://schemas.microsoft.com/office/drawing/2014/main" id="{EFDF1603-9F57-B0E8-A08F-B0BA9000286F}"/>
               </a:ext>
             </a:extLst>
           </p:cNvPr>
@@ -1750,7 +1596,7 @@
           <p:cNvPr id="3" name="Content Placeholder 2">
             <a:extLst>
               <a:ext uri="{FF2B5EF4-FFF2-40B4-BE49-F238E27FC236}">
-                <a16:creationId xmlns:a16="http://schemas.microsoft.com/office/drawing/2014/main" id="{323C269D-D1E7-DF0E-35D6-66CF108ECBE0}"/>
+                <a16:creationId xmlns:a16="http://schemas.microsoft.com/office/drawing/2014/main" id="{B6AE81B3-A694-A760-527A-AA4DFBAFE54D}"/>
               </a:ext>
             </a:extLst>
           </p:cNvPr>
@@ -1813,7 +1659,7 @@
           <p:cNvPr id="4" name="Content Placeholder 3">
             <a:extLst>
               <a:ext uri="{FF2B5EF4-FFF2-40B4-BE49-F238E27FC236}">
-                <a16:creationId xmlns:a16="http://schemas.microsoft.com/office/drawing/2014/main" id="{0EE4FBB3-1E8A-AC95-4478-1823CDD812A1}"/>
+                <a16:creationId xmlns:a16="http://schemas.microsoft.com/office/drawing/2014/main" id="{5767A10A-AB35-E630-8D33-6953ED1B2C6D}"/>
               </a:ext>
             </a:extLst>
           </p:cNvPr>
@@ -1876,7 +1722,7 @@
           <p:cNvPr id="5" name="Date Placeholder 4">
             <a:extLst>
               <a:ext uri="{FF2B5EF4-FFF2-40B4-BE49-F238E27FC236}">
-                <a16:creationId xmlns:a16="http://schemas.microsoft.com/office/drawing/2014/main" id="{62925D70-82D6-8FF3-A716-FC67D4CBCAF7}"/>
+                <a16:creationId xmlns:a16="http://schemas.microsoft.com/office/drawing/2014/main" id="{32977559-6669-1DD3-34FD-58D4B174C92F}"/>
               </a:ext>
             </a:extLst>
           </p:cNvPr>
@@ -1892,9 +1738,9 @@
           <a:bodyPr/>
           <a:lstStyle/>
           <a:p>
-            <a:fld id="{57C38401-29E1-4003-8869-D5E649D7A3F0}" type="datetimeFigureOut">
+            <a:fld id="{C20BC2F4-CB67-49A1-A59D-A63C4327440D}" type="datetimeFigureOut">
               <a:rPr lang="en-IN" smtClean="0"/>
-              <a:t>07-10-2026</a:t>
+              <a:t>14-10-2026</a:t>
             </a:fld>
             <a:endParaRPr lang="en-IN"/>
           </a:p>
@@ -1905,7 +1751,7 @@
           <p:cNvPr id="6" name="Footer Placeholder 5">
             <a:extLst>
               <a:ext uri="{FF2B5EF4-FFF2-40B4-BE49-F238E27FC236}">
-                <a16:creationId xmlns:a16="http://schemas.microsoft.com/office/drawing/2014/main" id="{B4049EAD-D891-4785-A715-06B41A73D302}"/>
+                <a16:creationId xmlns:a16="http://schemas.microsoft.com/office/drawing/2014/main" id="{BFB35D54-B3AF-50AD-802E-C5C904EEBE1A}"/>
               </a:ext>
             </a:extLst>
           </p:cNvPr>
@@ -1930,7 +1776,7 @@
           <p:cNvPr id="7" name="Slide Number Placeholder 6">
             <a:extLst>
               <a:ext uri="{FF2B5EF4-FFF2-40B4-BE49-F238E27FC236}">
-                <a16:creationId xmlns:a16="http://schemas.microsoft.com/office/drawing/2014/main" id="{129C2EA7-A6C2-9602-4BF9-692B8A6548C3}"/>
+                <a16:creationId xmlns:a16="http://schemas.microsoft.com/office/drawing/2014/main" id="{A0667157-5E8F-5FE3-BE36-F59E0818B3A0}"/>
               </a:ext>
             </a:extLst>
           </p:cNvPr>
@@ -1946,7 +1792,7 @@
           <a:bodyPr/>
           <a:lstStyle/>
           <a:p>
-            <a:fld id="{67F7BFF0-27F5-4BA0-A2A6-35D7A0F8B102}" type="slidenum">
+            <a:fld id="{854B815E-B356-4580-AC5D-7179791238EE}" type="slidenum">
               <a:rPr lang="en-IN" smtClean="0"/>
               <a:t>‹#›</a:t>
             </a:fld>
@@ -1957,7 +1803,7 @@
     </p:spTree>
     <p:extLst>
       <p:ext uri="{BB962C8B-B14F-4D97-AF65-F5344CB8AC3E}">
-        <p14:creationId xmlns:p14="http://schemas.microsoft.com/office/powerpoint/2010/main" val="587132208"/>
+        <p14:creationId xmlns:p14="http://schemas.microsoft.com/office/powerpoint/2010/main" val="553388946"/>
       </p:ext>
     </p:extLst>
   </p:cSld>
@@ -1989,7 +1835,7 @@
           <p:cNvPr id="2" name="Title 1">
             <a:extLst>
               <a:ext uri="{FF2B5EF4-FFF2-40B4-BE49-F238E27FC236}">
-                <a16:creationId xmlns:a16="http://schemas.microsoft.com/office/drawing/2014/main" id="{AA442A5F-B045-6DB9-26AA-2A4DFB0E250E}"/>
+                <a16:creationId xmlns:a16="http://schemas.microsoft.com/office/drawing/2014/main" id="{469986A4-6E2E-E249-F868-DB7637AA4721}"/>
               </a:ext>
             </a:extLst>
           </p:cNvPr>
@@ -2023,7 +1869,7 @@
           <p:cNvPr id="3" name="Text Placeholder 2">
             <a:extLst>
               <a:ext uri="{FF2B5EF4-FFF2-40B4-BE49-F238E27FC236}">
-                <a16:creationId xmlns:a16="http://schemas.microsoft.com/office/drawing/2014/main" id="{29FCCD66-65E6-3C14-60F5-C91451BC9479}"/>
+                <a16:creationId xmlns:a16="http://schemas.microsoft.com/office/drawing/2014/main" id="{17E9AA22-1934-0D6B-92AC-0BB2A0165BE6}"/>
               </a:ext>
             </a:extLst>
           </p:cNvPr>
@@ -2094,7 +1940,7 @@
           <p:cNvPr id="4" name="Content Placeholder 3">
             <a:extLst>
               <a:ext uri="{FF2B5EF4-FFF2-40B4-BE49-F238E27FC236}">
-                <a16:creationId xmlns:a16="http://schemas.microsoft.com/office/drawing/2014/main" id="{42FD7F8C-B6D4-9CAE-1613-26C96948E380}"/>
+                <a16:creationId xmlns:a16="http://schemas.microsoft.com/office/drawing/2014/main" id="{01D1E4E9-EBB4-60CE-5B3A-0E03D7F1C3FA}"/>
               </a:ext>
             </a:extLst>
           </p:cNvPr>
@@ -2157,7 +2003,7 @@
           <p:cNvPr id="5" name="Text Placeholder 4">
             <a:extLst>
               <a:ext uri="{FF2B5EF4-FFF2-40B4-BE49-F238E27FC236}">
-                <a16:creationId xmlns:a16="http://schemas.microsoft.com/office/drawing/2014/main" id="{C63A5A53-5397-AEAB-7C33-1B30DDC4D6A5}"/>
+                <a16:creationId xmlns:a16="http://schemas.microsoft.com/office/drawing/2014/main" id="{A847448F-EB66-7385-31DE-636A8EE4274C}"/>
               </a:ext>
             </a:extLst>
           </p:cNvPr>
@@ -2228,7 +2074,7 @@
           <p:cNvPr id="6" name="Content Placeholder 5">
             <a:extLst>
               <a:ext uri="{FF2B5EF4-FFF2-40B4-BE49-F238E27FC236}">
-                <a16:creationId xmlns:a16="http://schemas.microsoft.com/office/drawing/2014/main" id="{490B77A7-BCBD-758B-2856-566AD51CC75C}"/>
+                <a16:creationId xmlns:a16="http://schemas.microsoft.com/office/drawing/2014/main" id="{06F08EAA-1CA5-D8E1-EE94-EB2EBB7083AB}"/>
               </a:ext>
             </a:extLst>
           </p:cNvPr>
@@ -2291,7 +2137,7 @@
           <p:cNvPr id="7" name="Date Placeholder 6">
             <a:extLst>
               <a:ext uri="{FF2B5EF4-FFF2-40B4-BE49-F238E27FC236}">
-                <a16:creationId xmlns:a16="http://schemas.microsoft.com/office/drawing/2014/main" id="{FB834234-127C-05DC-F754-EC9690386CBF}"/>
+                <a16:creationId xmlns:a16="http://schemas.microsoft.com/office/drawing/2014/main" id="{ABB436B3-D7E0-4D6C-C470-5CB2AE7D0871}"/>
               </a:ext>
             </a:extLst>
           </p:cNvPr>
@@ -2307,9 +2153,9 @@
           <a:bodyPr/>
           <a:lstStyle/>
           <a:p>
-            <a:fld id="{57C38401-29E1-4003-8869-D5E649D7A3F0}" type="datetimeFigureOut">
+            <a:fld id="{C20BC2F4-CB67-49A1-A59D-A63C4327440D}" type="datetimeFigureOut">
               <a:rPr lang="en-IN" smtClean="0"/>
-              <a:t>07-10-2026</a:t>
+              <a:t>14-10-2026</a:t>
             </a:fld>
             <a:endParaRPr lang="en-IN"/>
           </a:p>
@@ -2320,7 +2166,7 @@
           <p:cNvPr id="8" name="Footer Placeholder 7">
             <a:extLst>
               <a:ext uri="{FF2B5EF4-FFF2-40B4-BE49-F238E27FC236}">
-                <a16:creationId xmlns:a16="http://schemas.microsoft.com/office/drawing/2014/main" id="{05F309D6-CEF6-D376-41E0-0BA41EF0C03B}"/>
+                <a16:creationId xmlns:a16="http://schemas.microsoft.com/office/drawing/2014/main" id="{8679D9A7-659B-4CB6-205C-73C228A0A3E6}"/>
               </a:ext>
             </a:extLst>
           </p:cNvPr>
@@ -2345,7 +2191,7 @@
           <p:cNvPr id="9" name="Slide Number Placeholder 8">
             <a:extLst>
               <a:ext uri="{FF2B5EF4-FFF2-40B4-BE49-F238E27FC236}">
-                <a16:creationId xmlns:a16="http://schemas.microsoft.com/office/drawing/2014/main" id="{29757371-3208-79AD-290A-D72C912F88DF}"/>
+                <a16:creationId xmlns:a16="http://schemas.microsoft.com/office/drawing/2014/main" id="{1D207A18-6280-8EE0-A934-CFC59058A229}"/>
               </a:ext>
             </a:extLst>
           </p:cNvPr>
@@ -2361,7 +2207,7 @@
           <a:bodyPr/>
           <a:lstStyle/>
           <a:p>
-            <a:fld id="{67F7BFF0-27F5-4BA0-A2A6-35D7A0F8B102}" type="slidenum">
+            <a:fld id="{854B815E-B356-4580-AC5D-7179791238EE}" type="slidenum">
               <a:rPr lang="en-IN" smtClean="0"/>
               <a:t>‹#›</a:t>
             </a:fld>
@@ -2372,7 +2218,7 @@
     </p:spTree>
     <p:extLst>
       <p:ext uri="{BB962C8B-B14F-4D97-AF65-F5344CB8AC3E}">
-        <p14:creationId xmlns:p14="http://schemas.microsoft.com/office/powerpoint/2010/main" val="3815336577"/>
+        <p14:creationId xmlns:p14="http://schemas.microsoft.com/office/powerpoint/2010/main" val="2827326689"/>
       </p:ext>
     </p:extLst>
   </p:cSld>
@@ -2404,7 +2250,7 @@
           <p:cNvPr id="2" name="Title 1">
             <a:extLst>
               <a:ext uri="{FF2B5EF4-FFF2-40B4-BE49-F238E27FC236}">
-                <a16:creationId xmlns:a16="http://schemas.microsoft.com/office/drawing/2014/main" id="{7ACF12AB-7BD7-CE17-A6B2-9CF34D52DC27}"/>
+                <a16:creationId xmlns:a16="http://schemas.microsoft.com/office/drawing/2014/main" id="{1387D3EF-D497-A81D-44FD-53AA5D55784E}"/>
               </a:ext>
             </a:extLst>
           </p:cNvPr>
@@ -2433,7 +2279,7 @@
           <p:cNvPr id="3" name="Date Placeholder 2">
             <a:extLst>
               <a:ext uri="{FF2B5EF4-FFF2-40B4-BE49-F238E27FC236}">
-                <a16:creationId xmlns:a16="http://schemas.microsoft.com/office/drawing/2014/main" id="{6C46F63C-0C6F-FAAD-799F-C9760CD1AC92}"/>
+                <a16:creationId xmlns:a16="http://schemas.microsoft.com/office/drawing/2014/main" id="{F1B510B9-E196-03FA-0AF2-61F8970691E8}"/>
               </a:ext>
             </a:extLst>
           </p:cNvPr>
@@ -2449,9 +2295,9 @@
           <a:bodyPr/>
           <a:lstStyle/>
           <a:p>
-            <a:fld id="{57C38401-29E1-4003-8869-D5E649D7A3F0}" type="datetimeFigureOut">
+            <a:fld id="{C20BC2F4-CB67-49A1-A59D-A63C4327440D}" type="datetimeFigureOut">
               <a:rPr lang="en-IN" smtClean="0"/>
-              <a:t>07-10-2026</a:t>
+              <a:t>14-10-2026</a:t>
             </a:fld>
             <a:endParaRPr lang="en-IN"/>
           </a:p>
@@ -2462,7 +2308,7 @@
           <p:cNvPr id="4" name="Footer Placeholder 3">
             <a:extLst>
               <a:ext uri="{FF2B5EF4-FFF2-40B4-BE49-F238E27FC236}">
-                <a16:creationId xmlns:a16="http://schemas.microsoft.com/office/drawing/2014/main" id="{2F5F1387-71BA-68F2-0FB6-D2822EE3BFA1}"/>
+                <a16:creationId xmlns:a16="http://schemas.microsoft.com/office/drawing/2014/main" id="{C6CA54FC-37BC-6972-66FC-52ACE03ACC3B}"/>
               </a:ext>
             </a:extLst>
           </p:cNvPr>
@@ -2487,7 +2333,7 @@
           <p:cNvPr id="5" name="Slide Number Placeholder 4">
             <a:extLst>
               <a:ext uri="{FF2B5EF4-FFF2-40B4-BE49-F238E27FC236}">
-                <a16:creationId xmlns:a16="http://schemas.microsoft.com/office/drawing/2014/main" id="{A6B4A47F-584A-DA7A-B400-3AF0D3011B89}"/>
+                <a16:creationId xmlns:a16="http://schemas.microsoft.com/office/drawing/2014/main" id="{31E257F2-ADB0-A680-FB62-7BE635FA9685}"/>
               </a:ext>
             </a:extLst>
           </p:cNvPr>
@@ -2503,7 +2349,7 @@
           <a:bodyPr/>
           <a:lstStyle/>
           <a:p>
-            <a:fld id="{67F7BFF0-27F5-4BA0-A2A6-35D7A0F8B102}" type="slidenum">
+            <a:fld id="{854B815E-B356-4580-AC5D-7179791238EE}" type="slidenum">
               <a:rPr lang="en-IN" smtClean="0"/>
               <a:t>‹#›</a:t>
             </a:fld>
@@ -2514,7 +2360,7 @@
     </p:spTree>
     <p:extLst>
       <p:ext uri="{BB962C8B-B14F-4D97-AF65-F5344CB8AC3E}">
-        <p14:creationId xmlns:p14="http://schemas.microsoft.com/office/powerpoint/2010/main" val="826668783"/>
+        <p14:creationId xmlns:p14="http://schemas.microsoft.com/office/powerpoint/2010/main" val="4223045725"/>
       </p:ext>
     </p:extLst>
   </p:cSld>
@@ -2546,7 +2392,7 @@
           <p:cNvPr id="2" name="Date Placeholder 1">
             <a:extLst>
               <a:ext uri="{FF2B5EF4-FFF2-40B4-BE49-F238E27FC236}">
-                <a16:creationId xmlns:a16="http://schemas.microsoft.com/office/drawing/2014/main" id="{6EAD75FB-548A-320C-37BB-A44F40A59337}"/>
+                <a16:creationId xmlns:a16="http://schemas.microsoft.com/office/drawing/2014/main" id="{65BDC6C9-354E-4A89-ECBC-96A52EB9D6E8}"/>
               </a:ext>
             </a:extLst>
           </p:cNvPr>
@@ -2562,9 +2408,9 @@
           <a:bodyPr/>
           <a:lstStyle/>
           <a:p>
-            <a:fld id="{57C38401-29E1-4003-8869-D5E649D7A3F0}" type="datetimeFigureOut">
+            <a:fld id="{C20BC2F4-CB67-49A1-A59D-A63C4327440D}" type="datetimeFigureOut">
               <a:rPr lang="en-IN" smtClean="0"/>
-              <a:t>07-10-2026</a:t>
+              <a:t>14-10-2026</a:t>
             </a:fld>
             <a:endParaRPr lang="en-IN"/>
           </a:p>
@@ -2575,7 +2421,7 @@
           <p:cNvPr id="3" name="Footer Placeholder 2">
             <a:extLst>
               <a:ext uri="{FF2B5EF4-FFF2-40B4-BE49-F238E27FC236}">
-                <a16:creationId xmlns:a16="http://schemas.microsoft.com/office/drawing/2014/main" id="{0D2AFF73-45DF-AC7E-BF8C-AF1B138C60E8}"/>
+                <a16:creationId xmlns:a16="http://schemas.microsoft.com/office/drawing/2014/main" id="{3D9AEDD3-3B39-6824-9E32-78473C5F631C}"/>
               </a:ext>
             </a:extLst>
           </p:cNvPr>
@@ -2600,7 +2446,7 @@
           <p:cNvPr id="4" name="Slide Number Placeholder 3">
             <a:extLst>
               <a:ext uri="{FF2B5EF4-FFF2-40B4-BE49-F238E27FC236}">
-                <a16:creationId xmlns:a16="http://schemas.microsoft.com/office/drawing/2014/main" id="{3B454E83-EE09-25EE-0361-0F64436ED34F}"/>
+                <a16:creationId xmlns:a16="http://schemas.microsoft.com/office/drawing/2014/main" id="{827AFEE4-B1F6-1567-DA8E-749DF21BBEE7}"/>
               </a:ext>
             </a:extLst>
           </p:cNvPr>
@@ -2616,7 +2462,7 @@
           <a:bodyPr/>
           <a:lstStyle/>
           <a:p>
-            <a:fld id="{67F7BFF0-27F5-4BA0-A2A6-35D7A0F8B102}" type="slidenum">
+            <a:fld id="{854B815E-B356-4580-AC5D-7179791238EE}" type="slidenum">
               <a:rPr lang="en-IN" smtClean="0"/>
               <a:t>‹#›</a:t>
             </a:fld>
@@ -2627,7 +2473,7 @@
     </p:spTree>
     <p:extLst>
       <p:ext uri="{BB962C8B-B14F-4D97-AF65-F5344CB8AC3E}">
-        <p14:creationId xmlns:p14="http://schemas.microsoft.com/office/powerpoint/2010/main" val="999589974"/>
+        <p14:creationId xmlns:p14="http://schemas.microsoft.com/office/powerpoint/2010/main" val="1002812380"/>
       </p:ext>
     </p:extLst>
   </p:cSld>
@@ -2659,7 +2505,7 @@
           <p:cNvPr id="2" name="Title 1">
             <a:extLst>
               <a:ext uri="{FF2B5EF4-FFF2-40B4-BE49-F238E27FC236}">
-                <a16:creationId xmlns:a16="http://schemas.microsoft.com/office/drawing/2014/main" id="{C514D71E-BD66-FA3C-62AE-717A99CED440}"/>
+                <a16:creationId xmlns:a16="http://schemas.microsoft.com/office/drawing/2014/main" id="{B323A095-4FC4-DA3E-6742-E4336566EE81}"/>
               </a:ext>
             </a:extLst>
           </p:cNvPr>
@@ -2697,7 +2543,7 @@
           <p:cNvPr id="3" name="Content Placeholder 2">
             <a:extLst>
               <a:ext uri="{FF2B5EF4-FFF2-40B4-BE49-F238E27FC236}">
-                <a16:creationId xmlns:a16="http://schemas.microsoft.com/office/drawing/2014/main" id="{2C1561EB-3AE3-E590-CD26-378A0AF7B938}"/>
+                <a16:creationId xmlns:a16="http://schemas.microsoft.com/office/drawing/2014/main" id="{A55C8082-D0D6-0120-67AC-BAF7FC1641D9}"/>
               </a:ext>
             </a:extLst>
           </p:cNvPr>
@@ -2788,7 +2634,7 @@
           <p:cNvPr id="4" name="Text Placeholder 3">
             <a:extLst>
               <a:ext uri="{FF2B5EF4-FFF2-40B4-BE49-F238E27FC236}">
-                <a16:creationId xmlns:a16="http://schemas.microsoft.com/office/drawing/2014/main" id="{43785EAF-C47F-85B1-AC2B-44CCDD81F8D2}"/>
+                <a16:creationId xmlns:a16="http://schemas.microsoft.com/office/drawing/2014/main" id="{0A3CEFBA-8A17-1D4E-E3A8-F8592AD62D96}"/>
               </a:ext>
             </a:extLst>
           </p:cNvPr>
@@ -2859,7 +2705,7 @@
           <p:cNvPr id="5" name="Date Placeholder 4">
             <a:extLst>
               <a:ext uri="{FF2B5EF4-FFF2-40B4-BE49-F238E27FC236}">
-                <a16:creationId xmlns:a16="http://schemas.microsoft.com/office/drawing/2014/main" id="{3C1D7B5E-EBC8-AE19-F3A8-D10EA983BBC5}"/>
+                <a16:creationId xmlns:a16="http://schemas.microsoft.com/office/drawing/2014/main" id="{6BBCD222-F43F-4CE8-BBAA-918FE2279483}"/>
               </a:ext>
             </a:extLst>
           </p:cNvPr>
@@ -2875,9 +2721,9 @@
           <a:bodyPr/>
           <a:lstStyle/>
           <a:p>
-            <a:fld id="{57C38401-29E1-4003-8869-D5E649D7A3F0}" type="datetimeFigureOut">
+            <a:fld id="{C20BC2F4-CB67-49A1-A59D-A63C4327440D}" type="datetimeFigureOut">
               <a:rPr lang="en-IN" smtClean="0"/>
-              <a:t>07-10-2026</a:t>
+              <a:t>14-10-2026</a:t>
             </a:fld>
             <a:endParaRPr lang="en-IN"/>
           </a:p>
@@ -2888,7 +2734,7 @@
           <p:cNvPr id="6" name="Footer Placeholder 5">
             <a:extLst>
               <a:ext uri="{FF2B5EF4-FFF2-40B4-BE49-F238E27FC236}">
-                <a16:creationId xmlns:a16="http://schemas.microsoft.com/office/drawing/2014/main" id="{481E4C61-77A8-4D68-F986-D3548B566B38}"/>
+                <a16:creationId xmlns:a16="http://schemas.microsoft.com/office/drawing/2014/main" id="{B51B0D92-F261-3039-E513-55CB36A6DA7F}"/>
               </a:ext>
             </a:extLst>
           </p:cNvPr>
@@ -2913,7 +2759,7 @@
           <p:cNvPr id="7" name="Slide Number Placeholder 6">
             <a:extLst>
               <a:ext uri="{FF2B5EF4-FFF2-40B4-BE49-F238E27FC236}">
-                <a16:creationId xmlns:a16="http://schemas.microsoft.com/office/drawing/2014/main" id="{EB3AD1B4-A8E0-9633-9F0A-1F2504CBFF1F}"/>
+                <a16:creationId xmlns:a16="http://schemas.microsoft.com/office/drawing/2014/main" id="{D8F0D673-6E9A-E6CA-8372-BC2B578E3612}"/>
               </a:ext>
             </a:extLst>
           </p:cNvPr>
@@ -2929,7 +2775,7 @@
           <a:bodyPr/>
           <a:lstStyle/>
           <a:p>
-            <a:fld id="{67F7BFF0-27F5-4BA0-A2A6-35D7A0F8B102}" type="slidenum">
+            <a:fld id="{854B815E-B356-4580-AC5D-7179791238EE}" type="slidenum">
               <a:rPr lang="en-IN" smtClean="0"/>
               <a:t>‹#›</a:t>
             </a:fld>
@@ -2940,7 +2786,7 @@
     </p:spTree>
     <p:extLst>
       <p:ext uri="{BB962C8B-B14F-4D97-AF65-F5344CB8AC3E}">
-        <p14:creationId xmlns:p14="http://schemas.microsoft.com/office/powerpoint/2010/main" val="1694970901"/>
+        <p14:creationId xmlns:p14="http://schemas.microsoft.com/office/powerpoint/2010/main" val="3898040442"/>
       </p:ext>
     </p:extLst>
   </p:cSld>
@@ -2972,7 +2818,7 @@
           <p:cNvPr id="2" name="Title 1">
             <a:extLst>
               <a:ext uri="{FF2B5EF4-FFF2-40B4-BE49-F238E27FC236}">
-                <a16:creationId xmlns:a16="http://schemas.microsoft.com/office/drawing/2014/main" id="{9F02219E-8F83-0760-16BC-7F92163EC801}"/>
+                <a16:creationId xmlns:a16="http://schemas.microsoft.com/office/drawing/2014/main" id="{BE36590C-A2EA-B9F3-8839-98A2A4EFD944}"/>
               </a:ext>
             </a:extLst>
           </p:cNvPr>
@@ -3010,7 +2856,7 @@
           <p:cNvPr id="3" name="Picture Placeholder 2">
             <a:extLst>
               <a:ext uri="{FF2B5EF4-FFF2-40B4-BE49-F238E27FC236}">
-                <a16:creationId xmlns:a16="http://schemas.microsoft.com/office/drawing/2014/main" id="{E35A20DC-065C-E627-7C77-F0E404E61D35}"/>
+                <a16:creationId xmlns:a16="http://schemas.microsoft.com/office/drawing/2014/main" id="{59D79118-1754-F49D-54C5-A5AD9E99A29B}"/>
               </a:ext>
             </a:extLst>
           </p:cNvPr>
@@ -3077,7 +2923,7 @@
           <p:cNvPr id="4" name="Text Placeholder 3">
             <a:extLst>
               <a:ext uri="{FF2B5EF4-FFF2-40B4-BE49-F238E27FC236}">
-                <a16:creationId xmlns:a16="http://schemas.microsoft.com/office/drawing/2014/main" id="{8DC2C69E-25B5-EA84-324A-FF25A2C447CE}"/>
+                <a16:creationId xmlns:a16="http://schemas.microsoft.com/office/drawing/2014/main" id="{5A49B39F-AC72-F20B-4413-CE515C701C13}"/>
               </a:ext>
             </a:extLst>
           </p:cNvPr>
@@ -3148,7 +2994,7 @@
           <p:cNvPr id="5" name="Date Placeholder 4">
             <a:extLst>
               <a:ext uri="{FF2B5EF4-FFF2-40B4-BE49-F238E27FC236}">
-                <a16:creationId xmlns:a16="http://schemas.microsoft.com/office/drawing/2014/main" id="{48F23497-4898-1D01-E870-4AA8AA37006A}"/>
+                <a16:creationId xmlns:a16="http://schemas.microsoft.com/office/drawing/2014/main" id="{336BB534-37AB-7FF8-C983-8D6A5D6097A2}"/>
               </a:ext>
             </a:extLst>
           </p:cNvPr>
@@ -3164,9 +3010,9 @@
           <a:bodyPr/>
           <a:lstStyle/>
           <a:p>
-            <a:fld id="{57C38401-29E1-4003-8869-D5E649D7A3F0}" type="datetimeFigureOut">
+            <a:fld id="{C20BC2F4-CB67-49A1-A59D-A63C4327440D}" type="datetimeFigureOut">
               <a:rPr lang="en-IN" smtClean="0"/>
-              <a:t>07-10-2026</a:t>
+              <a:t>14-10-2026</a:t>
             </a:fld>
             <a:endParaRPr lang="en-IN"/>
           </a:p>
@@ -3177,7 +3023,7 @@
           <p:cNvPr id="6" name="Footer Placeholder 5">
             <a:extLst>
               <a:ext uri="{FF2B5EF4-FFF2-40B4-BE49-F238E27FC236}">
-                <a16:creationId xmlns:a16="http://schemas.microsoft.com/office/drawing/2014/main" id="{4597D087-C21D-5922-7231-5E966CF4D68D}"/>
+                <a16:creationId xmlns:a16="http://schemas.microsoft.com/office/drawing/2014/main" id="{80CC5E19-31F7-668F-5FE3-68FC2D8CD875}"/>
               </a:ext>
             </a:extLst>
           </p:cNvPr>
@@ -3202,7 +3048,7 @@
           <p:cNvPr id="7" name="Slide Number Placeholder 6">
             <a:extLst>
               <a:ext uri="{FF2B5EF4-FFF2-40B4-BE49-F238E27FC236}">
-                <a16:creationId xmlns:a16="http://schemas.microsoft.com/office/drawing/2014/main" id="{338D3049-2B9C-6450-A972-CD22793CEE26}"/>
+                <a16:creationId xmlns:a16="http://schemas.microsoft.com/office/drawing/2014/main" id="{EBB864A3-A9CC-D915-23C4-3BE133A3C45A}"/>
               </a:ext>
             </a:extLst>
           </p:cNvPr>
@@ -3218,7 +3064,7 @@
           <a:bodyPr/>
           <a:lstStyle/>
           <a:p>
-            <a:fld id="{67F7BFF0-27F5-4BA0-A2A6-35D7A0F8B102}" type="slidenum">
+            <a:fld id="{854B815E-B356-4580-AC5D-7179791238EE}" type="slidenum">
               <a:rPr lang="en-IN" smtClean="0"/>
               <a:t>‹#›</a:t>
             </a:fld>
@@ -3229,7 +3075,7 @@
     </p:spTree>
     <p:extLst>
       <p:ext uri="{BB962C8B-B14F-4D97-AF65-F5344CB8AC3E}">
-        <p14:creationId xmlns:p14="http://schemas.microsoft.com/office/powerpoint/2010/main" val="1159143135"/>
+        <p14:creationId xmlns:p14="http://schemas.microsoft.com/office/powerpoint/2010/main" val="1552797029"/>
       </p:ext>
     </p:extLst>
   </p:cSld>
@@ -3266,7 +3112,7 @@
           <p:cNvPr id="2" name="Title Placeholder 1">
             <a:extLst>
               <a:ext uri="{FF2B5EF4-FFF2-40B4-BE49-F238E27FC236}">
-                <a16:creationId xmlns:a16="http://schemas.microsoft.com/office/drawing/2014/main" id="{1A8CD0F7-9095-B0B6-E858-A3A69F36C70C}"/>
+                <a16:creationId xmlns:a16="http://schemas.microsoft.com/office/drawing/2014/main" id="{71BB89BA-2115-7242-0970-917907CCE4BF}"/>
               </a:ext>
             </a:extLst>
           </p:cNvPr>
@@ -3305,7 +3151,7 @@
           <p:cNvPr id="3" name="Text Placeholder 2">
             <a:extLst>
               <a:ext uri="{FF2B5EF4-FFF2-40B4-BE49-F238E27FC236}">
-                <a16:creationId xmlns:a16="http://schemas.microsoft.com/office/drawing/2014/main" id="{4DD5BEE1-4880-F28D-10EB-A57F7ACE7528}"/>
+                <a16:creationId xmlns:a16="http://schemas.microsoft.com/office/drawing/2014/main" id="{A26DB2D6-4133-917D-E536-EB03ED5B315B}"/>
               </a:ext>
             </a:extLst>
           </p:cNvPr>
@@ -3373,7 +3219,7 @@
           <p:cNvPr id="4" name="Date Placeholder 3">
             <a:extLst>
               <a:ext uri="{FF2B5EF4-FFF2-40B4-BE49-F238E27FC236}">
-                <a16:creationId xmlns:a16="http://schemas.microsoft.com/office/drawing/2014/main" id="{07093F49-80B7-950C-6E27-3AB32D46354C}"/>
+                <a16:creationId xmlns:a16="http://schemas.microsoft.com/office/drawing/2014/main" id="{A4A9C8F3-2D92-9AD6-7CD6-70028AE96410}"/>
               </a:ext>
             </a:extLst>
           </p:cNvPr>
@@ -3407,9 +3253,9 @@
             </a:lvl1pPr>
           </a:lstStyle>
           <a:p>
-            <a:fld id="{57C38401-29E1-4003-8869-D5E649D7A3F0}" type="datetimeFigureOut">
+            <a:fld id="{C20BC2F4-CB67-49A1-A59D-A63C4327440D}" type="datetimeFigureOut">
               <a:rPr lang="en-IN" smtClean="0"/>
-              <a:t>07-10-2026</a:t>
+              <a:t>14-10-2026</a:t>
             </a:fld>
             <a:endParaRPr lang="en-IN"/>
           </a:p>
@@ -3420,7 +3266,7 @@
           <p:cNvPr id="5" name="Footer Placeholder 4">
             <a:extLst>
               <a:ext uri="{FF2B5EF4-FFF2-40B4-BE49-F238E27FC236}">
-                <a16:creationId xmlns:a16="http://schemas.microsoft.com/office/drawing/2014/main" id="{4093E0BB-1AEE-1665-F472-DE2E51531588}"/>
+                <a16:creationId xmlns:a16="http://schemas.microsoft.com/office/drawing/2014/main" id="{472063BD-034D-8DD1-4B6F-63D349CCB167}"/>
               </a:ext>
             </a:extLst>
           </p:cNvPr>
@@ -3463,7 +3309,7 @@
           <p:cNvPr id="6" name="Slide Number Placeholder 5">
             <a:extLst>
               <a:ext uri="{FF2B5EF4-FFF2-40B4-BE49-F238E27FC236}">
-                <a16:creationId xmlns:a16="http://schemas.microsoft.com/office/drawing/2014/main" id="{464F1209-55ED-9D7F-EB51-6DCBAE2538A2}"/>
+                <a16:creationId xmlns:a16="http://schemas.microsoft.com/office/drawing/2014/main" id="{C127A54F-DEC0-C685-73D3-59F303839507}"/>
               </a:ext>
             </a:extLst>
           </p:cNvPr>
@@ -3497,7 +3343,7 @@
             </a:lvl1pPr>
           </a:lstStyle>
           <a:p>
-            <a:fld id="{67F7BFF0-27F5-4BA0-A2A6-35D7A0F8B102}" type="slidenum">
+            <a:fld id="{854B815E-B356-4580-AC5D-7179791238EE}" type="slidenum">
               <a:rPr lang="en-IN" smtClean="0"/>
               <a:t>‹#›</a:t>
             </a:fld>
@@ -3508,7 +3354,7 @@
     </p:spTree>
     <p:extLst>
       <p:ext uri="{BB962C8B-B14F-4D97-AF65-F5344CB8AC3E}">
-        <p14:creationId xmlns:p14="http://schemas.microsoft.com/office/powerpoint/2010/main" val="1938604398"/>
+        <p14:creationId xmlns:p14="http://schemas.microsoft.com/office/powerpoint/2010/main" val="4183926549"/>
       </p:ext>
     </p:extLst>
   </p:cSld>
@@ -3826,62 +3672,12 @@
           <a:chExt cx="0" cy="0"/>
         </a:xfrm>
       </p:grpSpPr>
-      <p:sp>
-        <p:nvSpPr>
-          <p:cNvPr id="2" name="Title 1">
-            <a:extLst>
-              <a:ext uri="{FF2B5EF4-FFF2-40B4-BE49-F238E27FC236}">
-                <a16:creationId xmlns:a16="http://schemas.microsoft.com/office/drawing/2014/main" id="{9BECE6CF-4A9E-8A00-4A64-906BD6566220}"/>
-              </a:ext>
-            </a:extLst>
-          </p:cNvPr>
-          <p:cNvSpPr>
-            <a:spLocks noGrp="1"/>
-          </p:cNvSpPr>
-          <p:nvPr>
-            <p:ph type="ctrTitle"/>
-          </p:nvPr>
-        </p:nvSpPr>
-        <p:spPr/>
-        <p:txBody>
-          <a:bodyPr/>
-          <a:lstStyle/>
-          <a:p>
-            <a:endParaRPr lang="en-IN"/>
-          </a:p>
-        </p:txBody>
-      </p:sp>
-      <p:sp>
-        <p:nvSpPr>
-          <p:cNvPr id="3" name="Subtitle 2">
-            <a:extLst>
-              <a:ext uri="{FF2B5EF4-FFF2-40B4-BE49-F238E27FC236}">
-                <a16:creationId xmlns:a16="http://schemas.microsoft.com/office/drawing/2014/main" id="{4EB6DA3A-4B85-2997-8003-8BB4669CD08E}"/>
-              </a:ext>
-            </a:extLst>
-          </p:cNvPr>
-          <p:cNvSpPr>
-            <a:spLocks noGrp="1"/>
-          </p:cNvSpPr>
-          <p:nvPr>
-            <p:ph type="subTitle" idx="1"/>
-          </p:nvPr>
-        </p:nvSpPr>
-        <p:spPr/>
-        <p:txBody>
-          <a:bodyPr/>
-          <a:lstStyle/>
-          <a:p>
-            <a:endParaRPr lang="en-IN"/>
-          </a:p>
-        </p:txBody>
-      </p:sp>
       <p:pic>
         <p:nvPicPr>
-          <p:cNvPr id="5" name="Picture 4">
-            <a:extLst>
-              <a:ext uri="{FF2B5EF4-FFF2-40B4-BE49-F238E27FC236}">
-                <a16:creationId xmlns:a16="http://schemas.microsoft.com/office/drawing/2014/main" id="{81572374-9930-673D-BACA-C9ABDB4CD87E}"/>
+          <p:cNvPr id="3" name="Picture 2">
+            <a:extLst>
+              <a:ext uri="{FF2B5EF4-FFF2-40B4-BE49-F238E27FC236}">
+                <a16:creationId xmlns:a16="http://schemas.microsoft.com/office/drawing/2014/main" id="{0C0A3D1E-F37E-5D9E-C4A4-A4B98BC89BB8}"/>
               </a:ext>
             </a:extLst>
           </p:cNvPr>
@@ -3914,76 +3710,67 @@
       </p:pic>
       <p:sp>
         <p:nvSpPr>
-          <p:cNvPr id="6" name="TextBox 5">
-            <a:extLst>
-              <a:ext uri="{FF2B5EF4-FFF2-40B4-BE49-F238E27FC236}">
-                <a16:creationId xmlns:a16="http://schemas.microsoft.com/office/drawing/2014/main" id="{4835C76D-BB15-2F14-2176-DDD7D2A743F9}"/>
-              </a:ext>
-            </a:extLst>
-          </p:cNvPr>
-          <p:cNvSpPr txBox="1"/>
-          <p:nvPr/>
+          <p:cNvPr id="4" name="Title 3">
+            <a:extLst>
+              <a:ext uri="{FF2B5EF4-FFF2-40B4-BE49-F238E27FC236}">
+                <a16:creationId xmlns:a16="http://schemas.microsoft.com/office/drawing/2014/main" id="{6DCF877B-4FF8-0AEA-17E0-9C4348B69B0E}"/>
+              </a:ext>
+            </a:extLst>
+          </p:cNvPr>
+          <p:cNvSpPr>
+            <a:spLocks noGrp="1"/>
+          </p:cNvSpPr>
+          <p:nvPr>
+            <p:ph type="ctrTitle"/>
+          </p:nvPr>
         </p:nvSpPr>
         <p:spPr>
           <a:xfrm>
-            <a:off x="3755571" y="2628900"/>
-            <a:ext cx="5229317" cy="1077218"/>
+            <a:off x="1812470" y="1122363"/>
+            <a:ext cx="8458201" cy="2387600"/>
           </a:xfrm>
-          <a:prstGeom prst="rect">
-            <a:avLst/>
-          </a:prstGeom>
-          <a:noFill/>
         </p:spPr>
         <p:txBody>
-          <a:bodyPr wrap="none" rtlCol="0">
-            <a:spAutoFit/>
+          <a:bodyPr>
+            <a:normAutofit fontScale="90000"/>
           </a:bodyPr>
           <a:lstStyle/>
           <a:p>
             <a:r>
-              <a:rPr lang="en-IN" sz="3200" dirty="0"/>
-              <a:t>BOOK MY SHOW/LIVE EVENTS</a:t>
-            </a:r>
-          </a:p>
-          <a:p>
-            <a:r>
-              <a:rPr lang="en-IN" sz="3200" dirty="0"/>
-              <a:t>DYNAMIC PRICING STUDY</a:t>
-            </a:r>
-          </a:p>
-        </p:txBody>
-      </p:sp>
-      <p:sp>
-        <p:nvSpPr>
-          <p:cNvPr id="7" name="TextBox 6">
-            <a:extLst>
-              <a:ext uri="{FF2B5EF4-FFF2-40B4-BE49-F238E27FC236}">
-                <a16:creationId xmlns:a16="http://schemas.microsoft.com/office/drawing/2014/main" id="{9D2B61BD-DD91-0344-34B2-D075D903E828}"/>
-              </a:ext>
-            </a:extLst>
-          </p:cNvPr>
-          <p:cNvSpPr txBox="1"/>
-          <p:nvPr/>
-        </p:nvSpPr>
-        <p:spPr>
-          <a:xfrm>
-            <a:off x="3892260" y="4429919"/>
-            <a:ext cx="4407480" cy="400110"/>
-          </a:xfrm>
-          <a:prstGeom prst="rect">
-            <a:avLst/>
-          </a:prstGeom>
-          <a:noFill/>
-        </p:spPr>
-        <p:txBody>
-          <a:bodyPr wrap="square" rtlCol="0">
-            <a:spAutoFit/>
-          </a:bodyPr>
-          <a:lstStyle/>
-          <a:p>
-            <a:r>
-              <a:rPr lang="en-IN" sz="2000" dirty="0"/>
-              <a:t>BY-SHAMSHIKA,SPOORTHI,UDAY SRI</a:t>
+              <a:rPr lang="en-IN" dirty="0">
+                <a:latin typeface="Gill Sans Ultra Bold Condensed" panose="020B0A06020104020203" pitchFamily="34" charset="0"/>
+              </a:rPr>
+              <a:t>BOOKMYSHOW/LIVE EVENTS DYANAMIC PRICING STUDY</a:t>
+            </a:r>
+          </a:p>
+        </p:txBody>
+      </p:sp>
+      <p:sp>
+        <p:nvSpPr>
+          <p:cNvPr id="5" name="Subtitle 4">
+            <a:extLst>
+              <a:ext uri="{FF2B5EF4-FFF2-40B4-BE49-F238E27FC236}">
+                <a16:creationId xmlns:a16="http://schemas.microsoft.com/office/drawing/2014/main" id="{E148AF18-B6CE-D5B5-DA99-421607E04E1A}"/>
+              </a:ext>
+            </a:extLst>
+          </p:cNvPr>
+          <p:cNvSpPr>
+            <a:spLocks noGrp="1"/>
+          </p:cNvSpPr>
+          <p:nvPr>
+            <p:ph type="subTitle" idx="1"/>
+          </p:nvPr>
+        </p:nvSpPr>
+        <p:spPr/>
+        <p:txBody>
+          <a:bodyPr/>
+          <a:lstStyle/>
+          <a:p>
+            <a:r>
+              <a:rPr lang="en-IN" dirty="0">
+                <a:latin typeface="Arial Rounded MT Bold" panose="020F0704030504030204" pitchFamily="34" charset="0"/>
+              </a:rPr>
+              <a:t>By Shamshika, Spoorthi,  Uday Sri</a:t>
             </a:r>
           </a:p>
         </p:txBody>
@@ -3991,7 +3778,7 @@
     </p:spTree>
     <p:extLst>
       <p:ext uri="{BB962C8B-B14F-4D97-AF65-F5344CB8AC3E}">
-        <p14:creationId xmlns:p14="http://schemas.microsoft.com/office/powerpoint/2010/main" val="3978717827"/>
+        <p14:creationId xmlns:p14="http://schemas.microsoft.com/office/powerpoint/2010/main" val="1012033153"/>
       </p:ext>
     </p:extLst>
   </p:cSld>
@@ -4018,46 +3805,10 @@
           <a:chExt cx="0" cy="0"/>
         </a:xfrm>
       </p:grpSpPr>
-      <p:pic>
-        <p:nvPicPr>
-          <p:cNvPr id="5" name="Picture 4">
-            <a:extLst>
-              <a:ext uri="{FF2B5EF4-FFF2-40B4-BE49-F238E27FC236}">
-                <a16:creationId xmlns:a16="http://schemas.microsoft.com/office/drawing/2014/main" id="{4D07FF64-A421-5F2E-7383-6D7779585775}"/>
-              </a:ext>
-            </a:extLst>
-          </p:cNvPr>
-          <p:cNvPicPr>
-            <a:picLocks noChangeAspect="1"/>
-          </p:cNvPicPr>
-          <p:nvPr/>
-        </p:nvPicPr>
-        <p:blipFill>
-          <a:blip r:embed="rId2">
-            <a:extLst>
-              <a:ext uri="{28A0092B-C50C-407E-A947-70E740481C1C}">
-                <a14:useLocalDpi xmlns:a14="http://schemas.microsoft.com/office/drawing/2010/main" val="0"/>
-              </a:ext>
-            </a:extLst>
-          </a:blip>
-          <a:stretch>
-            <a:fillRect/>
-          </a:stretch>
-        </p:blipFill>
-        <p:spPr>
-          <a:xfrm>
-            <a:off x="0" y="0"/>
-            <a:ext cx="12192000" cy="6858000"/>
-          </a:xfrm>
-          <a:prstGeom prst="rect">
-            <a:avLst/>
-          </a:prstGeom>
-        </p:spPr>
-      </p:pic>
     </p:spTree>
     <p:extLst>
       <p:ext uri="{BB962C8B-B14F-4D97-AF65-F5344CB8AC3E}">
-        <p14:creationId xmlns:p14="http://schemas.microsoft.com/office/powerpoint/2010/main" val="4109337820"/>
+        <p14:creationId xmlns:p14="http://schemas.microsoft.com/office/powerpoint/2010/main" val="1595496826"/>
       </p:ext>
     </p:extLst>
   </p:cSld>
@@ -4089,7 +3840,7 @@
           <p:cNvPr id="3" name="Picture 2">
             <a:extLst>
               <a:ext uri="{FF2B5EF4-FFF2-40B4-BE49-F238E27FC236}">
-                <a16:creationId xmlns:a16="http://schemas.microsoft.com/office/drawing/2014/main" id="{A7EB9C37-C408-9C59-C244-7CB10892806E}"/>
+                <a16:creationId xmlns:a16="http://schemas.microsoft.com/office/drawing/2014/main" id="{C4FC731F-1DC6-7378-6A1E-44E4285A09FE}"/>
               </a:ext>
             </a:extLst>
           </p:cNvPr>
@@ -4113,191 +3864,17 @@
         <p:spPr>
           <a:xfrm>
             <a:off x="0" y="0"/>
-            <a:ext cx="12192000" cy="6858000"/>
+            <a:ext cx="12192000" cy="6857999"/>
           </a:xfrm>
           <a:prstGeom prst="rect">
             <a:avLst/>
           </a:prstGeom>
         </p:spPr>
       </p:pic>
-      <p:sp>
-        <p:nvSpPr>
-          <p:cNvPr id="4" name="TextBox 3">
-            <a:extLst>
-              <a:ext uri="{FF2B5EF4-FFF2-40B4-BE49-F238E27FC236}">
-                <a16:creationId xmlns:a16="http://schemas.microsoft.com/office/drawing/2014/main" id="{E7B53100-CA2D-112E-DF61-87DF357E37AD}"/>
-              </a:ext>
-            </a:extLst>
-          </p:cNvPr>
-          <p:cNvSpPr txBox="1"/>
-          <p:nvPr/>
-        </p:nvSpPr>
-        <p:spPr>
-          <a:xfrm>
-            <a:off x="4545875" y="435429"/>
-            <a:ext cx="2113271" cy="769441"/>
-          </a:xfrm>
-          <a:prstGeom prst="rect">
-            <a:avLst/>
-          </a:prstGeom>
-          <a:noFill/>
-        </p:spPr>
-        <p:txBody>
-          <a:bodyPr wrap="none" rtlCol="0">
-            <a:spAutoFit/>
-          </a:bodyPr>
-          <a:lstStyle/>
-          <a:p>
-            <a:r>
-              <a:rPr lang="en-IN" sz="4400" dirty="0"/>
-              <a:t>PYTHON</a:t>
-            </a:r>
-          </a:p>
-        </p:txBody>
-      </p:sp>
-      <p:sp>
-        <p:nvSpPr>
-          <p:cNvPr id="5" name="TextBox 4">
-            <a:extLst>
-              <a:ext uri="{FF2B5EF4-FFF2-40B4-BE49-F238E27FC236}">
-                <a16:creationId xmlns:a16="http://schemas.microsoft.com/office/drawing/2014/main" id="{21D90F35-EF0D-DBFF-86C5-2826C0868705}"/>
-              </a:ext>
-            </a:extLst>
-          </p:cNvPr>
-          <p:cNvSpPr txBox="1"/>
-          <p:nvPr/>
-        </p:nvSpPr>
-        <p:spPr>
-          <a:xfrm>
-            <a:off x="1995871" y="1306285"/>
-            <a:ext cx="8200258" cy="5262979"/>
-          </a:xfrm>
-          <a:prstGeom prst="rect">
-            <a:avLst/>
-          </a:prstGeom>
-          <a:noFill/>
-        </p:spPr>
-        <p:txBody>
-          <a:bodyPr wrap="none" rtlCol="0">
-            <a:spAutoFit/>
-          </a:bodyPr>
-          <a:lstStyle/>
-          <a:p>
-            <a:r>
-              <a:rPr lang="en-IN" sz="2400" b="1" dirty="0"/>
-              <a:t>Topic:</a:t>
-            </a:r>
-            <a:r>
-              <a:rPr lang="en-IN" sz="2400" dirty="0"/>
-              <a:t> Matplotlib &amp; </a:t>
-            </a:r>
-            <a:r>
-              <a:rPr lang="en-IN" sz="2400" dirty="0" err="1"/>
-              <a:t>Plotly</a:t>
-            </a:r>
-            <a:r>
-              <a:rPr lang="en-IN" sz="2400" dirty="0"/>
-              <a:t> Visualizations.</a:t>
-            </a:r>
-          </a:p>
-          <a:p>
-            <a:endParaRPr lang="en-IN" sz="2400" dirty="0"/>
-          </a:p>
-          <a:p>
-            <a:r>
-              <a:rPr lang="en-IN" sz="2400" dirty="0"/>
-              <a:t> </a:t>
-            </a:r>
-            <a:r>
-              <a:rPr lang="en-IN" sz="2400" b="1" dirty="0"/>
-              <a:t>Application:</a:t>
-            </a:r>
-            <a:endParaRPr lang="en-IN" sz="2400" dirty="0"/>
-          </a:p>
-          <a:p>
-            <a:pPr marL="342900" lvl="0" indent="-342900">
-              <a:buFont typeface="Arial" panose="020B0604020202020204" pitchFamily="34" charset="0"/>
-              <a:buChar char="•"/>
-            </a:pPr>
-            <a:r>
-              <a:rPr lang="en-IN" sz="2400" dirty="0"/>
-              <a:t>Create dashboards showing ticket demand vs. time, venue </a:t>
-            </a:r>
-          </a:p>
-          <a:p>
-            <a:pPr lvl="0"/>
-            <a:r>
-              <a:rPr lang="en-IN" sz="2400" dirty="0"/>
-              <a:t>capacity, and surge pricing.</a:t>
-            </a:r>
-          </a:p>
-          <a:p>
-            <a:pPr lvl="0"/>
-            <a:endParaRPr lang="en-IN" sz="2400" dirty="0"/>
-          </a:p>
-          <a:p>
-            <a:pPr marL="342900" lvl="0" indent="-342900">
-              <a:buFont typeface="Arial" panose="020B0604020202020204" pitchFamily="34" charset="0"/>
-              <a:buChar char="•"/>
-            </a:pPr>
-            <a:r>
-              <a:rPr lang="en-IN" sz="2400" dirty="0"/>
-              <a:t>Interactive charts for yield management and marginal cost </a:t>
-            </a:r>
-          </a:p>
-          <a:p>
-            <a:pPr lvl="0"/>
-            <a:r>
-              <a:rPr lang="en-IN" sz="2400" dirty="0"/>
-              <a:t>analysis. </a:t>
-            </a:r>
-          </a:p>
-          <a:p>
-            <a:pPr lvl="0"/>
-            <a:endParaRPr lang="en-IN" sz="2400" dirty="0"/>
-          </a:p>
-          <a:p>
-            <a:pPr lvl="0"/>
-            <a:r>
-              <a:rPr lang="en-IN" sz="2400" b="1" dirty="0"/>
-              <a:t>Justification:</a:t>
-            </a:r>
-            <a:r>
-              <a:rPr lang="en-IN" sz="2400" dirty="0"/>
-              <a:t> Enables data-driven decision-making and real-time</a:t>
-            </a:r>
-          </a:p>
-          <a:p>
-            <a:pPr lvl="0"/>
-            <a:r>
-              <a:rPr lang="en-IN" sz="2400" dirty="0"/>
-              <a:t> insights.</a:t>
-            </a:r>
-          </a:p>
-          <a:p>
-            <a:pPr lvl="0"/>
-            <a:endParaRPr lang="en-IN" sz="2400" dirty="0"/>
-          </a:p>
-          <a:p>
-            <a:pPr lvl="0"/>
-            <a:r>
-              <a:rPr lang="en-IN" sz="2400" b="1" dirty="0"/>
-              <a:t>Visual:</a:t>
-            </a:r>
-            <a:r>
-              <a:rPr lang="en-IN" sz="2400" dirty="0"/>
-              <a:t> </a:t>
-            </a:r>
-          </a:p>
-          <a:p>
-            <a:endParaRPr lang="en-IN" sz="2400" dirty="0"/>
-          </a:p>
-        </p:txBody>
-      </p:sp>
     </p:spTree>
     <p:extLst>
       <p:ext uri="{BB962C8B-B14F-4D97-AF65-F5344CB8AC3E}">
-        <p14:creationId xmlns:p14="http://schemas.microsoft.com/office/powerpoint/2010/main" val="1673344606"/>
+        <p14:creationId xmlns:p14="http://schemas.microsoft.com/office/powerpoint/2010/main" val="2497659484"/>
       </p:ext>
     </p:extLst>
   </p:cSld>
@@ -4324,638 +3901,10 @@
           <a:chExt cx="0" cy="0"/>
         </a:xfrm>
       </p:grpSpPr>
-      <p:pic>
-        <p:nvPicPr>
-          <p:cNvPr id="7" name="Picture 6">
-            <a:extLst>
-              <a:ext uri="{FF2B5EF4-FFF2-40B4-BE49-F238E27FC236}">
-                <a16:creationId xmlns:a16="http://schemas.microsoft.com/office/drawing/2014/main" id="{D6E6E228-D43D-2C57-B56B-757AFC5339BF}"/>
-              </a:ext>
-            </a:extLst>
-          </p:cNvPr>
-          <p:cNvPicPr>
-            <a:picLocks noChangeAspect="1"/>
-          </p:cNvPicPr>
-          <p:nvPr/>
-        </p:nvPicPr>
-        <p:blipFill>
-          <a:blip r:embed="rId2">
-            <a:extLst>
-              <a:ext uri="{28A0092B-C50C-407E-A947-70E740481C1C}">
-                <a14:useLocalDpi xmlns:a14="http://schemas.microsoft.com/office/drawing/2010/main" val="0"/>
-              </a:ext>
-            </a:extLst>
-          </a:blip>
-          <a:stretch>
-            <a:fillRect/>
-          </a:stretch>
-        </p:blipFill>
-        <p:spPr>
-          <a:xfrm>
-            <a:off x="0" y="0"/>
-            <a:ext cx="12192000" cy="6858000"/>
-          </a:xfrm>
-          <a:prstGeom prst="rect">
-            <a:avLst/>
-          </a:prstGeom>
-        </p:spPr>
-      </p:pic>
     </p:spTree>
     <p:extLst>
       <p:ext uri="{BB962C8B-B14F-4D97-AF65-F5344CB8AC3E}">
-        <p14:creationId xmlns:p14="http://schemas.microsoft.com/office/powerpoint/2010/main" val="221785218"/>
-      </p:ext>
-    </p:extLst>
-  </p:cSld>
-  <p:clrMapOvr>
-    <a:masterClrMapping/>
-  </p:clrMapOvr>
-</p:sld>
-</file>
-
-<file path=ppt/slides/slide13.xml><?xml version="1.0" encoding="utf-8"?>
-<p:sld xmlns:a="http://schemas.openxmlformats.org/drawingml/2006/main" xmlns:r="http://schemas.openxmlformats.org/officeDocument/2006/relationships" xmlns:p="http://schemas.openxmlformats.org/presentationml/2006/main">
-  <p:cSld>
-    <p:spTree>
-      <p:nvGrpSpPr>
-        <p:cNvPr id="1" name=""/>
-        <p:cNvGrpSpPr/>
-        <p:nvPr/>
-      </p:nvGrpSpPr>
-      <p:grpSpPr>
-        <a:xfrm>
-          <a:off x="0" y="0"/>
-          <a:ext cx="0" cy="0"/>
-          <a:chOff x="0" y="0"/>
-          <a:chExt cx="0" cy="0"/>
-        </a:xfrm>
-      </p:grpSpPr>
-      <p:pic>
-        <p:nvPicPr>
-          <p:cNvPr id="3" name="Picture 2">
-            <a:extLst>
-              <a:ext uri="{FF2B5EF4-FFF2-40B4-BE49-F238E27FC236}">
-                <a16:creationId xmlns:a16="http://schemas.microsoft.com/office/drawing/2014/main" id="{B58891D2-6C5D-F782-06D3-00EF24060668}"/>
-              </a:ext>
-            </a:extLst>
-          </p:cNvPr>
-          <p:cNvPicPr>
-            <a:picLocks noChangeAspect="1"/>
-          </p:cNvPicPr>
-          <p:nvPr/>
-        </p:nvPicPr>
-        <p:blipFill>
-          <a:blip r:embed="rId2">
-            <a:extLst>
-              <a:ext uri="{28A0092B-C50C-407E-A947-70E740481C1C}">
-                <a14:useLocalDpi xmlns:a14="http://schemas.microsoft.com/office/drawing/2010/main" val="0"/>
-              </a:ext>
-            </a:extLst>
-          </a:blip>
-          <a:stretch>
-            <a:fillRect/>
-          </a:stretch>
-        </p:blipFill>
-        <p:spPr>
-          <a:xfrm>
-            <a:off x="0" y="0"/>
-            <a:ext cx="12192000" cy="6858000"/>
-          </a:xfrm>
-          <a:prstGeom prst="rect">
-            <a:avLst/>
-          </a:prstGeom>
-        </p:spPr>
-      </p:pic>
-      <p:sp>
-        <p:nvSpPr>
-          <p:cNvPr id="4" name="TextBox 3">
-            <a:extLst>
-              <a:ext uri="{FF2B5EF4-FFF2-40B4-BE49-F238E27FC236}">
-                <a16:creationId xmlns:a16="http://schemas.microsoft.com/office/drawing/2014/main" id="{6ABF67CB-E79D-92D4-F7FE-43F0421632A0}"/>
-              </a:ext>
-            </a:extLst>
-          </p:cNvPr>
-          <p:cNvSpPr txBox="1"/>
-          <p:nvPr/>
-        </p:nvSpPr>
-        <p:spPr>
-          <a:xfrm>
-            <a:off x="1619794" y="687977"/>
-            <a:ext cx="8769531" cy="769441"/>
-          </a:xfrm>
-          <a:prstGeom prst="rect">
-            <a:avLst/>
-          </a:prstGeom>
-          <a:noFill/>
-        </p:spPr>
-        <p:txBody>
-          <a:bodyPr wrap="square" rtlCol="0">
-            <a:spAutoFit/>
-          </a:bodyPr>
-          <a:lstStyle/>
-          <a:p>
-            <a:r>
-              <a:rPr lang="en-IN" sz="4400" dirty="0"/>
-              <a:t>PROJECT APPROACH/METHODOLOGY</a:t>
-            </a:r>
-          </a:p>
-        </p:txBody>
-      </p:sp>
-      <p:sp>
-        <p:nvSpPr>
-          <p:cNvPr id="6" name="TextBox 5">
-            <a:extLst>
-              <a:ext uri="{FF2B5EF4-FFF2-40B4-BE49-F238E27FC236}">
-                <a16:creationId xmlns:a16="http://schemas.microsoft.com/office/drawing/2014/main" id="{E27DE6AE-D091-B5D6-02DD-FED23402AA8F}"/>
-              </a:ext>
-            </a:extLst>
-          </p:cNvPr>
-          <p:cNvSpPr txBox="1"/>
-          <p:nvPr/>
-        </p:nvSpPr>
-        <p:spPr>
-          <a:xfrm>
-            <a:off x="2046514" y="1733006"/>
-            <a:ext cx="8319585" cy="4893647"/>
-          </a:xfrm>
-          <a:prstGeom prst="rect">
-            <a:avLst/>
-          </a:prstGeom>
-          <a:noFill/>
-        </p:spPr>
-        <p:txBody>
-          <a:bodyPr wrap="none" rtlCol="0">
-            <a:spAutoFit/>
-          </a:bodyPr>
-          <a:lstStyle/>
-          <a:p>
-            <a:r>
-              <a:rPr lang="en-IN" sz="2400" b="1" dirty="0"/>
-              <a:t>Steps:</a:t>
-            </a:r>
-            <a:endParaRPr lang="en-IN" sz="2400" dirty="0"/>
-          </a:p>
-          <a:p>
-            <a:pPr marL="457200" lvl="0" indent="-457200">
-              <a:buFont typeface="+mj-lt"/>
-              <a:buAutoNum type="arabicPeriod"/>
-            </a:pPr>
-            <a:r>
-              <a:rPr lang="en-IN" sz="2400" b="1" dirty="0"/>
-              <a:t>Data Collection:</a:t>
-            </a:r>
-            <a:r>
-              <a:rPr lang="en-IN" sz="2400" dirty="0"/>
-              <a:t> Ticket sales, show timings, venue capacity.</a:t>
-            </a:r>
-          </a:p>
-          <a:p>
-            <a:pPr marL="457200" lvl="0" indent="-457200">
-              <a:buFont typeface="+mj-lt"/>
-              <a:buAutoNum type="arabicPeriod"/>
-            </a:pPr>
-            <a:endParaRPr lang="en-IN" sz="2400" b="1" dirty="0"/>
-          </a:p>
-          <a:p>
-            <a:pPr marL="457200" lvl="0" indent="-457200">
-              <a:buFont typeface="+mj-lt"/>
-              <a:buAutoNum type="arabicPeriod"/>
-            </a:pPr>
-            <a:r>
-              <a:rPr lang="en-IN" sz="2400" b="1" dirty="0"/>
-              <a:t>Data Cleaning:</a:t>
-            </a:r>
-            <a:r>
-              <a:rPr lang="en-IN" sz="2400" dirty="0"/>
-              <a:t> Remove duplicates, handle missing values.</a:t>
-            </a:r>
-          </a:p>
-          <a:p>
-            <a:pPr marL="457200" lvl="0" indent="-457200">
-              <a:buFont typeface="+mj-lt"/>
-              <a:buAutoNum type="arabicPeriod"/>
-            </a:pPr>
-            <a:endParaRPr lang="en-IN" sz="2400" b="1" dirty="0"/>
-          </a:p>
-          <a:p>
-            <a:pPr marL="457200" lvl="0" indent="-457200">
-              <a:buFont typeface="+mj-lt"/>
-              <a:buAutoNum type="arabicPeriod"/>
-            </a:pPr>
-            <a:r>
-              <a:rPr lang="en-IN" sz="2400" b="1" dirty="0"/>
-              <a:t>Data Analysis:</a:t>
-            </a:r>
-            <a:r>
-              <a:rPr lang="en-IN" sz="2400" dirty="0"/>
-              <a:t> Elasticity, competitive forces, surge pricing.</a:t>
-            </a:r>
-          </a:p>
-          <a:p>
-            <a:pPr marL="457200" lvl="0" indent="-457200">
-              <a:buFont typeface="+mj-lt"/>
-              <a:buAutoNum type="arabicPeriod"/>
-            </a:pPr>
-            <a:endParaRPr lang="en-IN" sz="2400" b="1" dirty="0"/>
-          </a:p>
-          <a:p>
-            <a:pPr marL="457200" lvl="0" indent="-457200">
-              <a:buFont typeface="+mj-lt"/>
-              <a:buAutoNum type="arabicPeriod"/>
-            </a:pPr>
-            <a:r>
-              <a:rPr lang="en-IN" sz="2400" b="1" dirty="0"/>
-              <a:t>Visualization:</a:t>
-            </a:r>
-            <a:r>
-              <a:rPr lang="en-IN" sz="2400" dirty="0"/>
-              <a:t> Interactive dashboards using Python.</a:t>
-            </a:r>
-          </a:p>
-          <a:p>
-            <a:pPr marL="457200" lvl="0" indent="-457200">
-              <a:buFont typeface="+mj-lt"/>
-              <a:buAutoNum type="arabicPeriod"/>
-            </a:pPr>
-            <a:endParaRPr lang="en-IN" sz="2400" b="1" dirty="0"/>
-          </a:p>
-          <a:p>
-            <a:pPr marL="457200" lvl="0" indent="-457200">
-              <a:buFont typeface="+mj-lt"/>
-              <a:buAutoNum type="arabicPeriod"/>
-            </a:pPr>
-            <a:r>
-              <a:rPr lang="en-IN" sz="2400" b="1" dirty="0"/>
-              <a:t>Findings &amp; Report:</a:t>
-            </a:r>
-            <a:r>
-              <a:rPr lang="en-IN" sz="2400" dirty="0"/>
-              <a:t> Insights on dynamic pricing and consumer</a:t>
-            </a:r>
-          </a:p>
-          <a:p>
-            <a:pPr lvl="0"/>
-            <a:r>
-              <a:rPr lang="en-IN" sz="2400" dirty="0"/>
-              <a:t>        </a:t>
-            </a:r>
-            <a:r>
-              <a:rPr lang="en-IN" sz="2400" dirty="0" err="1"/>
-              <a:t>behavior</a:t>
-            </a:r>
-            <a:r>
-              <a:rPr lang="en-IN" sz="2400" dirty="0"/>
-              <a:t>. </a:t>
-            </a:r>
-          </a:p>
-          <a:p>
-            <a:pPr lvl="0"/>
-            <a:r>
-              <a:rPr lang="en-IN" sz="2400" b="1" dirty="0"/>
-              <a:t>Visual:</a:t>
-            </a:r>
-            <a:r>
-              <a:rPr lang="en-IN" sz="2400" dirty="0"/>
-              <a:t> </a:t>
-            </a:r>
-          </a:p>
-          <a:p>
-            <a:endParaRPr lang="en-IN" sz="2400" dirty="0"/>
-          </a:p>
-        </p:txBody>
-      </p:sp>
-    </p:spTree>
-    <p:extLst>
-      <p:ext uri="{BB962C8B-B14F-4D97-AF65-F5344CB8AC3E}">
-        <p14:creationId xmlns:p14="http://schemas.microsoft.com/office/powerpoint/2010/main" val="1717427898"/>
-      </p:ext>
-    </p:extLst>
-  </p:cSld>
-  <p:clrMapOvr>
-    <a:masterClrMapping/>
-  </p:clrMapOvr>
-</p:sld>
-</file>
-
-<file path=ppt/slides/slide14.xml><?xml version="1.0" encoding="utf-8"?>
-<p:sld xmlns:a="http://schemas.openxmlformats.org/drawingml/2006/main" xmlns:r="http://schemas.openxmlformats.org/officeDocument/2006/relationships" xmlns:p="http://schemas.openxmlformats.org/presentationml/2006/main">
-  <p:cSld>
-    <p:spTree>
-      <p:nvGrpSpPr>
-        <p:cNvPr id="1" name=""/>
-        <p:cNvGrpSpPr/>
-        <p:nvPr/>
-      </p:nvGrpSpPr>
-      <p:grpSpPr>
-        <a:xfrm>
-          <a:off x="0" y="0"/>
-          <a:ext cx="0" cy="0"/>
-          <a:chOff x="0" y="0"/>
-          <a:chExt cx="0" cy="0"/>
-        </a:xfrm>
-      </p:grpSpPr>
-      <p:pic>
-        <p:nvPicPr>
-          <p:cNvPr id="11" name="Picture 10">
-            <a:extLst>
-              <a:ext uri="{FF2B5EF4-FFF2-40B4-BE49-F238E27FC236}">
-                <a16:creationId xmlns:a16="http://schemas.microsoft.com/office/drawing/2014/main" id="{9DBB58D4-3A6F-EA92-ABED-CCA22B8252AD}"/>
-              </a:ext>
-            </a:extLst>
-          </p:cNvPr>
-          <p:cNvPicPr>
-            <a:picLocks noChangeAspect="1"/>
-          </p:cNvPicPr>
-          <p:nvPr/>
-        </p:nvPicPr>
-        <p:blipFill>
-          <a:blip r:embed="rId2">
-            <a:extLst>
-              <a:ext uri="{28A0092B-C50C-407E-A947-70E740481C1C}">
-                <a14:useLocalDpi xmlns:a14="http://schemas.microsoft.com/office/drawing/2010/main" val="0"/>
-              </a:ext>
-            </a:extLst>
-          </a:blip>
-          <a:stretch>
-            <a:fillRect/>
-          </a:stretch>
-        </p:blipFill>
-        <p:spPr>
-          <a:xfrm>
-            <a:off x="0" y="0"/>
-            <a:ext cx="12191999" cy="6858000"/>
-          </a:xfrm>
-          <a:prstGeom prst="rect">
-            <a:avLst/>
-          </a:prstGeom>
-        </p:spPr>
-      </p:pic>
-    </p:spTree>
-    <p:extLst>
-      <p:ext uri="{BB962C8B-B14F-4D97-AF65-F5344CB8AC3E}">
-        <p14:creationId xmlns:p14="http://schemas.microsoft.com/office/powerpoint/2010/main" val="2561722538"/>
-      </p:ext>
-    </p:extLst>
-  </p:cSld>
-  <p:clrMapOvr>
-    <a:masterClrMapping/>
-  </p:clrMapOvr>
-</p:sld>
-</file>
-
-<file path=ppt/slides/slide15.xml><?xml version="1.0" encoding="utf-8"?>
-<p:sld xmlns:a="http://schemas.openxmlformats.org/drawingml/2006/main" xmlns:r="http://schemas.openxmlformats.org/officeDocument/2006/relationships" xmlns:p="http://schemas.openxmlformats.org/presentationml/2006/main">
-  <p:cSld>
-    <p:spTree>
-      <p:nvGrpSpPr>
-        <p:cNvPr id="1" name=""/>
-        <p:cNvGrpSpPr/>
-        <p:nvPr/>
-      </p:nvGrpSpPr>
-      <p:grpSpPr>
-        <a:xfrm>
-          <a:off x="0" y="0"/>
-          <a:ext cx="0" cy="0"/>
-          <a:chOff x="0" y="0"/>
-          <a:chExt cx="0" cy="0"/>
-        </a:xfrm>
-      </p:grpSpPr>
-      <p:pic>
-        <p:nvPicPr>
-          <p:cNvPr id="3" name="Picture 2">
-            <a:extLst>
-              <a:ext uri="{FF2B5EF4-FFF2-40B4-BE49-F238E27FC236}">
-                <a16:creationId xmlns:a16="http://schemas.microsoft.com/office/drawing/2014/main" id="{D5EFD7E1-6960-BF2A-A172-7C14C924A05F}"/>
-              </a:ext>
-            </a:extLst>
-          </p:cNvPr>
-          <p:cNvPicPr>
-            <a:picLocks noChangeAspect="1"/>
-          </p:cNvPicPr>
-          <p:nvPr/>
-        </p:nvPicPr>
-        <p:blipFill>
-          <a:blip r:embed="rId2">
-            <a:extLst>
-              <a:ext uri="{28A0092B-C50C-407E-A947-70E740481C1C}">
-                <a14:useLocalDpi xmlns:a14="http://schemas.microsoft.com/office/drawing/2010/main" val="0"/>
-              </a:ext>
-            </a:extLst>
-          </a:blip>
-          <a:stretch>
-            <a:fillRect/>
-          </a:stretch>
-        </p:blipFill>
-        <p:spPr>
-          <a:xfrm>
-            <a:off x="0" y="0"/>
-            <a:ext cx="12192000" cy="6858000"/>
-          </a:xfrm>
-          <a:prstGeom prst="rect">
-            <a:avLst/>
-          </a:prstGeom>
-        </p:spPr>
-      </p:pic>
-      <p:sp>
-        <p:nvSpPr>
-          <p:cNvPr id="5" name="TextBox 4">
-            <a:extLst>
-              <a:ext uri="{FF2B5EF4-FFF2-40B4-BE49-F238E27FC236}">
-                <a16:creationId xmlns:a16="http://schemas.microsoft.com/office/drawing/2014/main" id="{5122E4D9-E807-E540-B8B6-299555737E7A}"/>
-              </a:ext>
-            </a:extLst>
-          </p:cNvPr>
-          <p:cNvSpPr txBox="1"/>
-          <p:nvPr/>
-        </p:nvSpPr>
-        <p:spPr>
-          <a:xfrm>
-            <a:off x="4302034" y="426962"/>
-            <a:ext cx="3246979" cy="769441"/>
-          </a:xfrm>
-          <a:prstGeom prst="rect">
-            <a:avLst/>
-          </a:prstGeom>
-          <a:noFill/>
-        </p:spPr>
-        <p:txBody>
-          <a:bodyPr wrap="none" rtlCol="0">
-            <a:spAutoFit/>
-          </a:bodyPr>
-          <a:lstStyle/>
-          <a:p>
-            <a:r>
-              <a:rPr lang="en-IN" sz="4400" dirty="0"/>
-              <a:t>CONCLUSION</a:t>
-            </a:r>
-          </a:p>
-        </p:txBody>
-      </p:sp>
-      <p:sp>
-        <p:nvSpPr>
-          <p:cNvPr id="6" name="TextBox 5">
-            <a:extLst>
-              <a:ext uri="{FF2B5EF4-FFF2-40B4-BE49-F238E27FC236}">
-                <a16:creationId xmlns:a16="http://schemas.microsoft.com/office/drawing/2014/main" id="{E35E22EE-BF4C-56A2-1273-2D169B751AEF}"/>
-              </a:ext>
-            </a:extLst>
-          </p:cNvPr>
-          <p:cNvSpPr txBox="1"/>
-          <p:nvPr/>
-        </p:nvSpPr>
-        <p:spPr>
-          <a:xfrm>
-            <a:off x="2151017" y="1741714"/>
-            <a:ext cx="8145178" cy="3785652"/>
-          </a:xfrm>
-          <a:prstGeom prst="rect">
-            <a:avLst/>
-          </a:prstGeom>
-          <a:noFill/>
-        </p:spPr>
-        <p:txBody>
-          <a:bodyPr wrap="none" rtlCol="0">
-            <a:spAutoFit/>
-          </a:bodyPr>
-          <a:lstStyle/>
-          <a:p>
-            <a:r>
-              <a:rPr lang="en-IN" sz="2400" dirty="0"/>
-              <a:t>Dynamic pricing in live events, as seen in </a:t>
-            </a:r>
-            <a:r>
-              <a:rPr lang="en-IN" sz="2400" dirty="0" err="1"/>
-              <a:t>BookMyShow</a:t>
-            </a:r>
-            <a:r>
-              <a:rPr lang="en-IN" sz="2400" dirty="0"/>
-              <a:t>,</a:t>
-            </a:r>
-          </a:p>
-          <a:p>
-            <a:r>
-              <a:rPr lang="en-IN" sz="2400" dirty="0"/>
-              <a:t>demonstrates how economics, Business Strategy, and</a:t>
-            </a:r>
-            <a:endParaRPr lang="en-IN" sz="2400" b="1" dirty="0"/>
-          </a:p>
-          <a:p>
-            <a:r>
-              <a:rPr lang="en-IN" sz="2400" dirty="0"/>
-              <a:t>technology converge to optimize ticket sales.</a:t>
-            </a:r>
-          </a:p>
-          <a:p>
-            <a:r>
-              <a:rPr lang="en-IN" sz="2400" dirty="0"/>
-              <a:t> By applying Elasticity Analysis , Porter’s Five Force, </a:t>
-            </a:r>
-          </a:p>
-          <a:p>
-            <a:r>
-              <a:rPr lang="en-IN" sz="2400" dirty="0"/>
-              <a:t>And Python Visualization , this study shows how data‑driven</a:t>
-            </a:r>
-          </a:p>
-          <a:p>
-            <a:r>
-              <a:rPr lang="en-IN" sz="2400" dirty="0"/>
-              <a:t> insights can balance profitability with customer satisfaction.</a:t>
-            </a:r>
-          </a:p>
-          <a:p>
-            <a:r>
-              <a:rPr lang="en-IN" sz="2400" dirty="0"/>
-              <a:t> The project highlights the importance of integrated approaches</a:t>
-            </a:r>
-          </a:p>
-          <a:p>
-            <a:r>
-              <a:rPr lang="en-IN" sz="2400" dirty="0"/>
-              <a:t>in shaping smarter pricing models for India’s entertainment</a:t>
-            </a:r>
-          </a:p>
-          <a:p>
-            <a:r>
-              <a:rPr lang="en-IN" sz="2400" dirty="0"/>
-              <a:t> industry.</a:t>
-            </a:r>
-          </a:p>
-          <a:p>
-            <a:endParaRPr lang="en-IN" sz="2400" dirty="0"/>
-          </a:p>
-        </p:txBody>
-      </p:sp>
-    </p:spTree>
-    <p:extLst>
-      <p:ext uri="{BB962C8B-B14F-4D97-AF65-F5344CB8AC3E}">
-        <p14:creationId xmlns:p14="http://schemas.microsoft.com/office/powerpoint/2010/main" val="1939471116"/>
-      </p:ext>
-    </p:extLst>
-  </p:cSld>
-  <p:clrMapOvr>
-    <a:masterClrMapping/>
-  </p:clrMapOvr>
-</p:sld>
-</file>
-
-<file path=ppt/slides/slide16.xml><?xml version="1.0" encoding="utf-8"?>
-<p:sld xmlns:a="http://schemas.openxmlformats.org/drawingml/2006/main" xmlns:r="http://schemas.openxmlformats.org/officeDocument/2006/relationships" xmlns:p="http://schemas.openxmlformats.org/presentationml/2006/main">
-  <p:cSld>
-    <p:spTree>
-      <p:nvGrpSpPr>
-        <p:cNvPr id="1" name=""/>
-        <p:cNvGrpSpPr/>
-        <p:nvPr/>
-      </p:nvGrpSpPr>
-      <p:grpSpPr>
-        <a:xfrm>
-          <a:off x="0" y="0"/>
-          <a:ext cx="0" cy="0"/>
-          <a:chOff x="0" y="0"/>
-          <a:chExt cx="0" cy="0"/>
-        </a:xfrm>
-      </p:grpSpPr>
-      <p:pic>
-        <p:nvPicPr>
-          <p:cNvPr id="3" name="Picture 2">
-            <a:extLst>
-              <a:ext uri="{FF2B5EF4-FFF2-40B4-BE49-F238E27FC236}">
-                <a16:creationId xmlns:a16="http://schemas.microsoft.com/office/drawing/2014/main" id="{13AC4856-3CC4-3FD1-21E2-49C9B125D088}"/>
-              </a:ext>
-            </a:extLst>
-          </p:cNvPr>
-          <p:cNvPicPr>
-            <a:picLocks noChangeAspect="1"/>
-          </p:cNvPicPr>
-          <p:nvPr/>
-        </p:nvPicPr>
-        <p:blipFill>
-          <a:blip r:embed="rId2">
-            <a:extLst>
-              <a:ext uri="{28A0092B-C50C-407E-A947-70E740481C1C}">
-                <a14:useLocalDpi xmlns:a14="http://schemas.microsoft.com/office/drawing/2010/main" val="0"/>
-              </a:ext>
-            </a:extLst>
-          </a:blip>
-          <a:stretch>
-            <a:fillRect/>
-          </a:stretch>
-        </p:blipFill>
-        <p:spPr>
-          <a:xfrm>
-            <a:off x="0" y="0"/>
-            <a:ext cx="12191999" cy="6858000"/>
-          </a:xfrm>
-          <a:prstGeom prst="rect">
-            <a:avLst/>
-          </a:prstGeom>
-        </p:spPr>
-      </p:pic>
-    </p:spTree>
-    <p:extLst>
-      <p:ext uri="{BB962C8B-B14F-4D97-AF65-F5344CB8AC3E}">
-        <p14:creationId xmlns:p14="http://schemas.microsoft.com/office/powerpoint/2010/main" val="1243839237"/>
+        <p14:creationId xmlns:p14="http://schemas.microsoft.com/office/powerpoint/2010/main" val="1107338421"/>
       </p:ext>
     </p:extLst>
   </p:cSld>
@@ -4987,7 +3936,7 @@
           <p:cNvPr id="3" name="Picture 2">
             <a:extLst>
               <a:ext uri="{FF2B5EF4-FFF2-40B4-BE49-F238E27FC236}">
-                <a16:creationId xmlns:a16="http://schemas.microsoft.com/office/drawing/2014/main" id="{6C2BB6C4-4FC5-D373-904D-FC6442E9B937}"/>
+                <a16:creationId xmlns:a16="http://schemas.microsoft.com/office/drawing/2014/main" id="{E3478E49-3642-FDEF-A1B5-9CF46DC4F521}"/>
               </a:ext>
             </a:extLst>
           </p:cNvPr>
@@ -5011,7 +3960,7 @@
         <p:spPr>
           <a:xfrm>
             <a:off x="0" y="0"/>
-            <a:ext cx="12192000" cy="6858000"/>
+            <a:ext cx="12192000" cy="6857999"/>
           </a:xfrm>
           <a:prstGeom prst="rect">
             <a:avLst/>
@@ -5020,144 +3969,109 @@
       </p:pic>
       <p:sp>
         <p:nvSpPr>
-          <p:cNvPr id="5" name="TextBox 4">
-            <a:extLst>
-              <a:ext uri="{FF2B5EF4-FFF2-40B4-BE49-F238E27FC236}">
-                <a16:creationId xmlns:a16="http://schemas.microsoft.com/office/drawing/2014/main" id="{301468AF-4576-755D-F755-D989F088F69D}"/>
-              </a:ext>
-            </a:extLst>
-          </p:cNvPr>
-          <p:cNvSpPr txBox="1"/>
-          <p:nvPr/>
+          <p:cNvPr id="4" name="Title 3">
+            <a:extLst>
+              <a:ext uri="{FF2B5EF4-FFF2-40B4-BE49-F238E27FC236}">
+                <a16:creationId xmlns:a16="http://schemas.microsoft.com/office/drawing/2014/main" id="{75F75530-7D0D-3CCD-BA57-A96F1B041082}"/>
+              </a:ext>
+            </a:extLst>
+          </p:cNvPr>
+          <p:cNvSpPr>
+            <a:spLocks noGrp="1"/>
+          </p:cNvSpPr>
+          <p:nvPr>
+            <p:ph type="title"/>
+          </p:nvPr>
         </p:nvSpPr>
         <p:spPr>
           <a:xfrm>
-            <a:off x="3706586" y="783771"/>
-            <a:ext cx="4137864" cy="830997"/>
+            <a:off x="1714500" y="1224643"/>
+            <a:ext cx="8817429" cy="1147082"/>
           </a:xfrm>
-          <a:prstGeom prst="rect">
-            <a:avLst/>
-          </a:prstGeom>
-          <a:noFill/>
         </p:spPr>
         <p:txBody>
-          <a:bodyPr wrap="none" rtlCol="0">
-            <a:spAutoFit/>
-          </a:bodyPr>
-          <a:lstStyle/>
-          <a:p>
-            <a:r>
-              <a:rPr lang="en-IN" sz="4800" dirty="0"/>
-              <a:t>INTRODUCTION</a:t>
-            </a:r>
-          </a:p>
-        </p:txBody>
-      </p:sp>
-      <p:sp>
-        <p:nvSpPr>
-          <p:cNvPr id="6" name="TextBox 5">
-            <a:extLst>
-              <a:ext uri="{FF2B5EF4-FFF2-40B4-BE49-F238E27FC236}">
-                <a16:creationId xmlns:a16="http://schemas.microsoft.com/office/drawing/2014/main" id="{C5F4A4E7-236D-318A-C7F4-178C9E751D57}"/>
-              </a:ext>
-            </a:extLst>
-          </p:cNvPr>
-          <p:cNvSpPr txBox="1"/>
-          <p:nvPr/>
+          <a:bodyPr/>
+          <a:lstStyle/>
+          <a:p>
+            <a:r>
+              <a:rPr lang="en-IN" dirty="0">
+                <a:latin typeface="Algerian" panose="04020705040A02060702" pitchFamily="82" charset="0"/>
+              </a:rPr>
+              <a:t>introduction</a:t>
+            </a:r>
+          </a:p>
+        </p:txBody>
+      </p:sp>
+      <p:sp>
+        <p:nvSpPr>
+          <p:cNvPr id="5" name="Content Placeholder 4">
+            <a:extLst>
+              <a:ext uri="{FF2B5EF4-FFF2-40B4-BE49-F238E27FC236}">
+                <a16:creationId xmlns:a16="http://schemas.microsoft.com/office/drawing/2014/main" id="{39F012B9-3EBD-A2CE-EB42-3007CF8E4DA9}"/>
+              </a:ext>
+            </a:extLst>
+          </p:cNvPr>
+          <p:cNvSpPr>
+            <a:spLocks noGrp="1"/>
+          </p:cNvSpPr>
+          <p:nvPr>
+            <p:ph idx="1"/>
+          </p:nvPr>
         </p:nvSpPr>
         <p:spPr>
           <a:xfrm>
-            <a:off x="2302329" y="2253343"/>
-            <a:ext cx="8104783" cy="3046988"/>
+            <a:off x="1714500" y="2371725"/>
+            <a:ext cx="8817429" cy="3805238"/>
           </a:xfrm>
-          <a:prstGeom prst="rect">
-            <a:avLst/>
-          </a:prstGeom>
-          <a:noFill/>
         </p:spPr>
         <p:txBody>
-          <a:bodyPr wrap="none" rtlCol="0">
-            <a:spAutoFit/>
-          </a:bodyPr>
-          <a:lstStyle/>
-          <a:p>
-            <a:r>
-              <a:rPr lang="en-IN" sz="2400" dirty="0">
-                <a:effectLst/>
+          <a:bodyPr/>
+          <a:lstStyle/>
+          <a:p>
+            <a:pPr lvl="0"/>
+            <a:r>
+              <a:rPr lang="en-IN" dirty="0">
+                <a:latin typeface="Tw Cen MT Condensed Extra Bold" panose="020B0803020202020204" pitchFamily="34" charset="0"/>
               </a:rPr>
-              <a:t>Dynamic pricing in live events is a modern strategy where ticket</a:t>
-            </a:r>
-          </a:p>
-          <a:p>
-            <a:r>
-              <a:rPr lang="en-IN" sz="2400" dirty="0">
-                <a:effectLst/>
+              <a:t>Book My Show is a digital platform for booking entertainment and live-event tickets. </a:t>
+            </a:r>
+          </a:p>
+          <a:p>
+            <a:pPr lvl="0"/>
+            <a:r>
+              <a:rPr lang="en-IN" dirty="0">
+                <a:latin typeface="Tw Cen MT Condensed Extra Bold" panose="020B0803020202020204" pitchFamily="34" charset="0"/>
               </a:rPr>
-              <a:t> prices change based on demand, timing, and availability.</a:t>
-            </a:r>
-          </a:p>
-          <a:p>
-            <a:r>
-              <a:rPr lang="en-IN" sz="2400" dirty="0">
-                <a:effectLst/>
+              <a:t>It offers concerts, comedy shows, sports, festivals, and other events. </a:t>
+            </a:r>
+          </a:p>
+          <a:p>
+            <a:pPr lvl="0"/>
+            <a:r>
+              <a:rPr lang="en-IN" dirty="0">
+                <a:latin typeface="Tw Cen MT Condensed Extra Bold" panose="020B0803020202020204" pitchFamily="34" charset="0"/>
               </a:rPr>
-              <a:t> Platforms like </a:t>
-            </a:r>
-            <a:r>
-              <a:rPr lang="en-IN" sz="2400" dirty="0" err="1">
-                <a:effectLst/>
+              <a:t>Dynamic pricing refers to prices changing based on demand, availability, timing, and event popularity. </a:t>
+            </a:r>
+          </a:p>
+          <a:p>
+            <a:pPr lvl="0"/>
+            <a:r>
+              <a:rPr lang="en-IN" dirty="0">
+                <a:latin typeface="Tw Cen MT Condensed Extra Bold" panose="020B0803020202020204" pitchFamily="34" charset="0"/>
               </a:rPr>
-              <a:t>BookMyShow</a:t>
-            </a:r>
-            <a:r>
-              <a:rPr lang="en-IN" sz="2400" dirty="0">
-                <a:effectLst/>
-              </a:rPr>
-              <a:t> use data analytics and market </a:t>
-            </a:r>
-          </a:p>
-          <a:p>
-            <a:r>
-              <a:rPr lang="en-IN" sz="2400" dirty="0">
-                <a:effectLst/>
-              </a:rPr>
-              <a:t>insights to optimize revenue and customer satisfaction. </a:t>
-            </a:r>
-          </a:p>
-          <a:p>
-            <a:r>
-              <a:rPr lang="en-IN" sz="2400" dirty="0">
-                <a:effectLst/>
-              </a:rPr>
-              <a:t>This study connects Economics, Business Environment, and </a:t>
-            </a:r>
-          </a:p>
-          <a:p>
-            <a:r>
-              <a:rPr lang="en-IN" sz="2400" dirty="0">
-                <a:effectLst/>
-              </a:rPr>
-              <a:t>Python to explore how technology drives smarter pricing </a:t>
-            </a:r>
-          </a:p>
-          <a:p>
-            <a:r>
-              <a:rPr lang="en-IN" sz="2400" dirty="0">
-                <a:effectLst/>
-              </a:rPr>
-              <a:t>decisions in the Indian entertainment industry.</a:t>
-            </a:r>
-            <a:endParaRPr lang="en-IN" sz="2400" dirty="0"/>
-          </a:p>
-          <a:p>
-            <a:endParaRPr lang="en-IN" sz="2400" dirty="0"/>
+              <a:t>This project studies how pricing affects ticket demand and sales. </a:t>
+            </a:r>
+          </a:p>
+          <a:p>
+            <a:endParaRPr lang="en-IN" dirty="0"/>
           </a:p>
         </p:txBody>
       </p:sp>
     </p:spTree>
     <p:extLst>
       <p:ext uri="{BB962C8B-B14F-4D97-AF65-F5344CB8AC3E}">
-        <p14:creationId xmlns:p14="http://schemas.microsoft.com/office/powerpoint/2010/main" val="252692721"/>
+        <p14:creationId xmlns:p14="http://schemas.microsoft.com/office/powerpoint/2010/main" val="683322872"/>
       </p:ext>
     </p:extLst>
   </p:cSld>
@@ -5184,12 +4098,63 @@
           <a:chExt cx="0" cy="0"/>
         </a:xfrm>
       </p:grpSpPr>
+      <p:sp>
+        <p:nvSpPr>
+          <p:cNvPr id="4" name="Title 3">
+            <a:extLst>
+              <a:ext uri="{FF2B5EF4-FFF2-40B4-BE49-F238E27FC236}">
+                <a16:creationId xmlns:a16="http://schemas.microsoft.com/office/drawing/2014/main" id="{2A163018-7A65-31DB-881C-FA3022ECD4D4}"/>
+              </a:ext>
+            </a:extLst>
+          </p:cNvPr>
+          <p:cNvSpPr txBox="1">
+            <a:spLocks/>
+          </p:cNvSpPr>
+          <p:nvPr/>
+        </p:nvSpPr>
+        <p:spPr>
+          <a:xfrm>
+            <a:off x="1714500" y="1224643"/>
+            <a:ext cx="8817429" cy="1147082"/>
+          </a:xfrm>
+          <a:prstGeom prst="rect">
+            <a:avLst/>
+          </a:prstGeom>
+        </p:spPr>
+        <p:txBody>
+          <a:bodyPr/>
+          <a:lstStyle>
+            <a:lvl1pPr algn="l" defTabSz="914400" rtl="0" eaLnBrk="1" latinLnBrk="0" hangingPunct="1">
+              <a:lnSpc>
+                <a:spcPct val="90000"/>
+              </a:lnSpc>
+              <a:spcBef>
+                <a:spcPct val="0"/>
+              </a:spcBef>
+              <a:buNone/>
+              <a:defRPr sz="4400" kern="1200">
+                <a:solidFill>
+                  <a:schemeClr val="tx1"/>
+                </a:solidFill>
+                <a:latin typeface="+mj-lt"/>
+                <a:ea typeface="+mj-ea"/>
+                <a:cs typeface="+mj-cs"/>
+              </a:defRPr>
+            </a:lvl1pPr>
+          </a:lstStyle>
+          <a:p>
+            <a:endParaRPr lang="en-IN" dirty="0">
+              <a:latin typeface="Algerian" panose="04020705040A02060702" pitchFamily="82" charset="0"/>
+            </a:endParaRPr>
+          </a:p>
+        </p:txBody>
+      </p:sp>
       <p:pic>
         <p:nvPicPr>
-          <p:cNvPr id="3" name="Picture 2">
-            <a:extLst>
-              <a:ext uri="{FF2B5EF4-FFF2-40B4-BE49-F238E27FC236}">
-                <a16:creationId xmlns:a16="http://schemas.microsoft.com/office/drawing/2014/main" id="{0690FCF4-9BEE-27F4-2E1B-68F09B6DCA90}"/>
+          <p:cNvPr id="6" name="Picture 5">
+            <a:extLst>
+              <a:ext uri="{FF2B5EF4-FFF2-40B4-BE49-F238E27FC236}">
+                <a16:creationId xmlns:a16="http://schemas.microsoft.com/office/drawing/2014/main" id="{2200BF1E-28F9-2AC0-2A04-D60FBD3CD951}"/>
               </a:ext>
             </a:extLst>
           </p:cNvPr>
@@ -5212,8 +4177,8 @@
         </p:blipFill>
         <p:spPr>
           <a:xfrm>
-            <a:off x="0" y="0"/>
-            <a:ext cx="12192000" cy="6858000"/>
+            <a:off x="-1" y="1"/>
+            <a:ext cx="12192001" cy="6857999"/>
           </a:xfrm>
           <a:prstGeom prst="rect">
             <a:avLst/>
@@ -5222,201 +4187,111 @@
       </p:pic>
       <p:sp>
         <p:nvSpPr>
-          <p:cNvPr id="4" name="TextBox 3">
-            <a:extLst>
-              <a:ext uri="{FF2B5EF4-FFF2-40B4-BE49-F238E27FC236}">
-                <a16:creationId xmlns:a16="http://schemas.microsoft.com/office/drawing/2014/main" id="{BDC4598F-EAC6-5305-4921-D7F847C745A4}"/>
-              </a:ext>
-            </a:extLst>
-          </p:cNvPr>
-          <p:cNvSpPr txBox="1"/>
-          <p:nvPr/>
+          <p:cNvPr id="7" name="Title 6">
+            <a:extLst>
+              <a:ext uri="{FF2B5EF4-FFF2-40B4-BE49-F238E27FC236}">
+                <a16:creationId xmlns:a16="http://schemas.microsoft.com/office/drawing/2014/main" id="{30733E25-33E7-4635-A8F1-3D0847E827B4}"/>
+              </a:ext>
+            </a:extLst>
+          </p:cNvPr>
+          <p:cNvSpPr>
+            <a:spLocks noGrp="1"/>
+          </p:cNvSpPr>
+          <p:nvPr>
+            <p:ph type="title"/>
+          </p:nvPr>
         </p:nvSpPr>
         <p:spPr>
           <a:xfrm>
-            <a:off x="4016829" y="571500"/>
-            <a:ext cx="3444661" cy="830997"/>
+            <a:off x="1714500" y="849086"/>
+            <a:ext cx="8817429" cy="1963511"/>
           </a:xfrm>
-          <a:prstGeom prst="rect">
-            <a:avLst/>
-          </a:prstGeom>
-          <a:noFill/>
         </p:spPr>
         <p:txBody>
-          <a:bodyPr wrap="none" rtlCol="0">
-            <a:spAutoFit/>
+          <a:bodyPr>
+            <a:normAutofit/>
           </a:bodyPr>
           <a:lstStyle/>
           <a:p>
             <a:r>
-              <a:rPr lang="en-IN" sz="4800" dirty="0"/>
-              <a:t>MOTIVATION</a:t>
-            </a:r>
-          </a:p>
-        </p:txBody>
-      </p:sp>
-      <p:sp>
-        <p:nvSpPr>
-          <p:cNvPr id="5" name="TextBox 4">
-            <a:extLst>
-              <a:ext uri="{FF2B5EF4-FFF2-40B4-BE49-F238E27FC236}">
-                <a16:creationId xmlns:a16="http://schemas.microsoft.com/office/drawing/2014/main" id="{5F6135B4-F1F0-7B46-85A5-10456A71CD15}"/>
-              </a:ext>
-            </a:extLst>
-          </p:cNvPr>
-          <p:cNvSpPr txBox="1"/>
-          <p:nvPr/>
+              <a:rPr lang="en-IN" dirty="0">
+                <a:latin typeface="Algerian" panose="04020705040A02060702" pitchFamily="82" charset="0"/>
+              </a:rPr>
+              <a:t>motivation</a:t>
+            </a:r>
+          </a:p>
+        </p:txBody>
+      </p:sp>
+      <p:sp>
+        <p:nvSpPr>
+          <p:cNvPr id="8" name="Content Placeholder 7">
+            <a:extLst>
+              <a:ext uri="{FF2B5EF4-FFF2-40B4-BE49-F238E27FC236}">
+                <a16:creationId xmlns:a16="http://schemas.microsoft.com/office/drawing/2014/main" id="{6B0E0B7E-6D6F-DD81-4E8E-CDEF7E15475B}"/>
+              </a:ext>
+            </a:extLst>
+          </p:cNvPr>
+          <p:cNvSpPr>
+            <a:spLocks noGrp="1"/>
+          </p:cNvSpPr>
+          <p:nvPr>
+            <p:ph idx="1"/>
+          </p:nvPr>
         </p:nvSpPr>
         <p:spPr>
           <a:xfrm>
-            <a:off x="1730830" y="2041071"/>
-            <a:ext cx="12005100" cy="4524315"/>
+            <a:off x="1534884" y="2371724"/>
+            <a:ext cx="8997045" cy="3805237"/>
           </a:xfrm>
-          <a:prstGeom prst="rect">
-            <a:avLst/>
-          </a:prstGeom>
-          <a:noFill/>
         </p:spPr>
         <p:txBody>
-          <a:bodyPr wrap="square" rtlCol="0">
-            <a:spAutoFit/>
-          </a:bodyPr>
-          <a:lstStyle/>
-          <a:p>
-            <a:r>
-              <a:rPr lang="en-IN" sz="2400" b="1" dirty="0">
-                <a:effectLst/>
+          <a:bodyPr/>
+          <a:lstStyle/>
+          <a:p>
+            <a:pPr lvl="0"/>
+            <a:r>
+              <a:rPr lang="en-IN" dirty="0">
+                <a:latin typeface="Tw Cen MT Condensed Extra Bold" panose="020B0803020202020204" pitchFamily="34" charset="0"/>
               </a:rPr>
-              <a:t>Why this project?</a:t>
-            </a:r>
-          </a:p>
-          <a:p>
-            <a:endParaRPr lang="en-IN" sz="2400" b="1" dirty="0"/>
-          </a:p>
-          <a:p>
-            <a:pPr marL="342900" indent="-342900">
-              <a:buFont typeface="Arial" panose="020B0604020202020204" pitchFamily="34" charset="0"/>
-              <a:buChar char="•"/>
-            </a:pPr>
-            <a:r>
-              <a:rPr lang="en-IN" sz="2400" dirty="0">
-                <a:effectLst/>
+              <a:t>Live-event ticket prices can change according to demand. </a:t>
+            </a:r>
+          </a:p>
+          <a:p>
+            <a:pPr lvl="0"/>
+            <a:r>
+              <a:rPr lang="en-IN" dirty="0">
+                <a:latin typeface="Tw Cen MT Condensed Extra Bold" panose="020B0803020202020204" pitchFamily="34" charset="0"/>
               </a:rPr>
-              <a:t>Ticket prices fluctuate dynamically — understanding elasticity helps</a:t>
+              <a:t>Popular events may have higher prices and limited availability. </a:t>
             </a:r>
           </a:p>
           <a:p>
             <a:pPr lvl="0"/>
             <a:r>
-              <a:rPr lang="en-IN" sz="2400" dirty="0">
-                <a:effectLst/>
+              <a:rPr lang="en-IN" dirty="0">
+                <a:latin typeface="Tw Cen MT Condensed Extra Bold" panose="020B0803020202020204" pitchFamily="34" charset="0"/>
               </a:rPr>
-              <a:t> predict demand.</a:t>
-            </a:r>
-          </a:p>
-          <a:p>
-            <a:pPr marL="342900" lvl="0" indent="-342900">
-              <a:buFont typeface="Arial" panose="020B0604020202020204" pitchFamily="34" charset="0"/>
-              <a:buChar char="•"/>
-            </a:pPr>
-            <a:r>
-              <a:rPr lang="en-IN" sz="2400" dirty="0">
-                <a:effectLst/>
+              <a:t>Customers may change their purchase decisions based on price. </a:t>
+            </a:r>
+          </a:p>
+          <a:p>
+            <a:pPr lvl="0"/>
+            <a:r>
+              <a:rPr lang="en-IN" dirty="0">
+                <a:latin typeface="Tw Cen MT Condensed Extra Bold" panose="020B0803020202020204" pitchFamily="34" charset="0"/>
               </a:rPr>
-              <a:t>Businesses use data analytics to optimize revenue and customer </a:t>
-            </a:r>
-          </a:p>
-          <a:p>
-            <a:pPr lvl="0"/>
-            <a:r>
-              <a:rPr lang="en-IN" sz="2400" dirty="0"/>
-              <a:t>   </a:t>
-            </a:r>
-            <a:r>
-              <a:rPr lang="en-IN" sz="2400" dirty="0">
-                <a:effectLst/>
-              </a:rPr>
-              <a:t>   satisfaction.</a:t>
-            </a:r>
-          </a:p>
-          <a:p>
-            <a:pPr marL="342900" lvl="0" indent="-342900">
-              <a:buFont typeface="Arial" panose="020B0604020202020204" pitchFamily="34" charset="0"/>
-              <a:buChar char="•"/>
-            </a:pPr>
-            <a:r>
-              <a:rPr lang="en-IN" sz="2400" dirty="0" err="1">
-                <a:effectLst/>
-              </a:rPr>
-              <a:t>BookMyShow’s</a:t>
-            </a:r>
-            <a:r>
-              <a:rPr lang="en-IN" sz="2400" dirty="0">
-                <a:effectLst/>
-              </a:rPr>
-              <a:t> model reflects modern market </a:t>
-            </a:r>
-            <a:r>
-              <a:rPr lang="en-IN" sz="2400" dirty="0" err="1">
-                <a:effectLst/>
-              </a:rPr>
-              <a:t>behavior</a:t>
-            </a:r>
-            <a:r>
-              <a:rPr lang="en-IN" sz="2400" dirty="0">
-                <a:effectLst/>
-              </a:rPr>
-              <a:t> and digital </a:t>
-            </a:r>
-          </a:p>
-          <a:p>
-            <a:pPr lvl="0"/>
-            <a:r>
-              <a:rPr lang="en-IN" sz="2400" dirty="0"/>
-              <a:t>tr</a:t>
-            </a:r>
-            <a:r>
-              <a:rPr lang="en-IN" sz="2400" dirty="0">
-                <a:effectLst/>
-              </a:rPr>
-              <a:t>ansformation.</a:t>
-            </a:r>
-          </a:p>
-          <a:p>
-            <a:pPr lvl="0"/>
-            <a:endParaRPr lang="en-IN" sz="2400" dirty="0">
-              <a:effectLst/>
-            </a:endParaRPr>
-          </a:p>
-          <a:p>
-            <a:pPr lvl="0"/>
-            <a:r>
-              <a:rPr lang="en-IN" sz="2400" dirty="0">
-                <a:effectLst/>
-              </a:rPr>
-              <a:t> </a:t>
-            </a:r>
-            <a:r>
-              <a:rPr lang="en-IN" sz="2400" b="1" dirty="0">
-                <a:effectLst/>
-              </a:rPr>
-              <a:t>Visual:</a:t>
-            </a:r>
-            <a:endParaRPr lang="en-IN" sz="2400" dirty="0"/>
-          </a:p>
-          <a:p>
-            <a:pPr lvl="0"/>
-            <a:endParaRPr lang="en-IN" sz="2400" dirty="0"/>
-          </a:p>
-          <a:p>
-            <a:endParaRPr lang="en-IN" sz="2400" dirty="0"/>
+              <a:t>Studying dynamic pricing helps understand revenue generation and customer behaviour.</a:t>
+            </a:r>
+          </a:p>
+          <a:p>
+            <a:endParaRPr lang="en-IN" b="1" dirty="0"/>
           </a:p>
         </p:txBody>
       </p:sp>
     </p:spTree>
     <p:extLst>
       <p:ext uri="{BB962C8B-B14F-4D97-AF65-F5344CB8AC3E}">
-        <p14:creationId xmlns:p14="http://schemas.microsoft.com/office/powerpoint/2010/main" val="1834630955"/>
+        <p14:creationId xmlns:p14="http://schemas.microsoft.com/office/powerpoint/2010/main" val="4142402859"/>
       </p:ext>
     </p:extLst>
   </p:cSld>
@@ -5448,7 +4323,7 @@
           <p:cNvPr id="3" name="Picture 2">
             <a:extLst>
               <a:ext uri="{FF2B5EF4-FFF2-40B4-BE49-F238E27FC236}">
-                <a16:creationId xmlns:a16="http://schemas.microsoft.com/office/drawing/2014/main" id="{2E53B697-528C-A9B9-9394-DF33C52636DC}"/>
+                <a16:creationId xmlns:a16="http://schemas.microsoft.com/office/drawing/2014/main" id="{A88FE159-5802-936D-855F-3A17750D46E3}"/>
               </a:ext>
             </a:extLst>
           </p:cNvPr>
@@ -5472,7 +4347,7 @@
         <p:spPr>
           <a:xfrm>
             <a:off x="0" y="0"/>
-            <a:ext cx="12192000" cy="6858000"/>
+            <a:ext cx="12192000" cy="6857999"/>
           </a:xfrm>
           <a:prstGeom prst="rect">
             <a:avLst/>
@@ -5481,43 +4356,118 @@
       </p:pic>
       <p:sp>
         <p:nvSpPr>
-          <p:cNvPr id="5" name="TextBox 4">
-            <a:extLst>
-              <a:ext uri="{FF2B5EF4-FFF2-40B4-BE49-F238E27FC236}">
-                <a16:creationId xmlns:a16="http://schemas.microsoft.com/office/drawing/2014/main" id="{55C355AA-CC7C-08E0-0C2F-B2A7BB24C629}"/>
-              </a:ext>
-            </a:extLst>
-          </p:cNvPr>
-          <p:cNvSpPr txBox="1"/>
-          <p:nvPr/>
+          <p:cNvPr id="4" name="Title 3">
+            <a:extLst>
+              <a:ext uri="{FF2B5EF4-FFF2-40B4-BE49-F238E27FC236}">
+                <a16:creationId xmlns:a16="http://schemas.microsoft.com/office/drawing/2014/main" id="{F3479F74-92BE-FEFD-4096-CDA9EED88242}"/>
+              </a:ext>
+            </a:extLst>
+          </p:cNvPr>
+          <p:cNvSpPr>
+            <a:spLocks noGrp="1"/>
+          </p:cNvSpPr>
+          <p:nvPr>
+            <p:ph type="title"/>
+          </p:nvPr>
         </p:nvSpPr>
         <p:spPr>
           <a:xfrm>
-            <a:off x="4406537" y="130628"/>
-            <a:ext cx="2624308" cy="523220"/>
+            <a:off x="1779814" y="1371599"/>
+            <a:ext cx="9127672" cy="974045"/>
           </a:xfrm>
-          <a:prstGeom prst="rect">
-            <a:avLst/>
-          </a:prstGeom>
-          <a:noFill/>
         </p:spPr>
         <p:txBody>
-          <a:bodyPr wrap="square" rtlCol="0">
-            <a:spAutoFit/>
-          </a:bodyPr>
-          <a:lstStyle/>
-          <a:p>
-            <a:r>
-              <a:rPr lang="en-IN" sz="2800" dirty="0"/>
-              <a:t>CINEMA TICKETS</a:t>
-            </a:r>
+          <a:bodyPr/>
+          <a:lstStyle/>
+          <a:p>
+            <a:r>
+              <a:rPr lang="en-IN" dirty="0">
+                <a:latin typeface="Algerian" panose="04020705040A02060702" pitchFamily="82" charset="0"/>
+              </a:rPr>
+              <a:t>objection</a:t>
+            </a:r>
+          </a:p>
+        </p:txBody>
+      </p:sp>
+      <p:sp>
+        <p:nvSpPr>
+          <p:cNvPr id="5" name="Content Placeholder 4">
+            <a:extLst>
+              <a:ext uri="{FF2B5EF4-FFF2-40B4-BE49-F238E27FC236}">
+                <a16:creationId xmlns:a16="http://schemas.microsoft.com/office/drawing/2014/main" id="{C93D6FFB-7E49-3872-9D16-4B039E655E28}"/>
+              </a:ext>
+            </a:extLst>
+          </p:cNvPr>
+          <p:cNvSpPr>
+            <a:spLocks noGrp="1"/>
+          </p:cNvSpPr>
+          <p:nvPr>
+            <p:ph idx="1"/>
+          </p:nvPr>
+        </p:nvSpPr>
+        <p:spPr>
+          <a:xfrm>
+            <a:off x="1779814" y="2345644"/>
+            <a:ext cx="8632372" cy="3831319"/>
+          </a:xfrm>
+        </p:spPr>
+        <p:txBody>
+          <a:bodyPr/>
+          <a:lstStyle/>
+          <a:p>
+            <a:pPr lvl="0"/>
+            <a:r>
+              <a:rPr lang="en-IN" dirty="0">
+                <a:latin typeface="Tw Cen MT Condensed Extra Bold" panose="020B0803020202020204" pitchFamily="34" charset="0"/>
+              </a:rPr>
+              <a:t>Study live-event ticket pricing trends. </a:t>
+            </a:r>
+          </a:p>
+          <a:p>
+            <a:pPr lvl="0"/>
+            <a:r>
+              <a:rPr lang="en-IN" dirty="0">
+                <a:latin typeface="Tw Cen MT Condensed Extra Bold" panose="020B0803020202020204" pitchFamily="34" charset="0"/>
+              </a:rPr>
+              <a:t>Understand the relationship between price and demand. </a:t>
+            </a:r>
+          </a:p>
+          <a:p>
+            <a:pPr lvl="0"/>
+            <a:r>
+              <a:rPr lang="en-IN" dirty="0">
+                <a:latin typeface="Tw Cen MT Condensed Extra Bold" panose="020B0803020202020204" pitchFamily="34" charset="0"/>
+              </a:rPr>
+              <a:t>Identify factors affecting ticket prices. </a:t>
+            </a:r>
+          </a:p>
+          <a:p>
+            <a:pPr lvl="0"/>
+            <a:r>
+              <a:rPr lang="en-IN" dirty="0">
+                <a:latin typeface="Tw Cen MT Condensed Extra Bold" panose="020B0803020202020204" pitchFamily="34" charset="0"/>
+              </a:rPr>
+              <a:t>Analyse customer preferences and event popularity. </a:t>
+            </a:r>
+          </a:p>
+          <a:p>
+            <a:pPr lvl="0"/>
+            <a:r>
+              <a:rPr lang="en-IN" dirty="0">
+                <a:latin typeface="Tw Cen MT Condensed Extra Bold" panose="020B0803020202020204" pitchFamily="34" charset="0"/>
+              </a:rPr>
+              <a:t>Use Python to analyse and visualize the data.</a:t>
+            </a:r>
+          </a:p>
+          <a:p>
+            <a:endParaRPr lang="en-IN" dirty="0"/>
           </a:p>
         </p:txBody>
       </p:sp>
     </p:spTree>
     <p:extLst>
       <p:ext uri="{BB962C8B-B14F-4D97-AF65-F5344CB8AC3E}">
-        <p14:creationId xmlns:p14="http://schemas.microsoft.com/office/powerpoint/2010/main" val="1612075854"/>
+        <p14:creationId xmlns:p14="http://schemas.microsoft.com/office/powerpoint/2010/main" val="1491596604"/>
       </p:ext>
     </p:extLst>
   </p:cSld>
@@ -5549,7 +4499,7 @@
           <p:cNvPr id="3" name="Picture 2">
             <a:extLst>
               <a:ext uri="{FF2B5EF4-FFF2-40B4-BE49-F238E27FC236}">
-                <a16:creationId xmlns:a16="http://schemas.microsoft.com/office/drawing/2014/main" id="{EB8C0453-44B8-1A2C-1583-2A1D1F8B9B0E}"/>
+                <a16:creationId xmlns:a16="http://schemas.microsoft.com/office/drawing/2014/main" id="{62FA549C-6E28-6CD9-A925-2FC35C4502C4}"/>
               </a:ext>
             </a:extLst>
           </p:cNvPr>
@@ -5573,7 +4523,7 @@
         <p:spPr>
           <a:xfrm>
             <a:off x="0" y="0"/>
-            <a:ext cx="12192000" cy="6858000"/>
+            <a:ext cx="12192000" cy="6857999"/>
           </a:xfrm>
           <a:prstGeom prst="rect">
             <a:avLst/>
@@ -5582,183 +4532,147 @@
       </p:pic>
       <p:sp>
         <p:nvSpPr>
-          <p:cNvPr id="4" name="TextBox 3">
-            <a:extLst>
-              <a:ext uri="{FF2B5EF4-FFF2-40B4-BE49-F238E27FC236}">
-                <a16:creationId xmlns:a16="http://schemas.microsoft.com/office/drawing/2014/main" id="{EE3AFF41-4AC6-66D2-147C-FE2D0019B9DD}"/>
-              </a:ext>
-            </a:extLst>
-          </p:cNvPr>
-          <p:cNvSpPr txBox="1"/>
-          <p:nvPr/>
+          <p:cNvPr id="4" name="Title 3">
+            <a:extLst>
+              <a:ext uri="{FF2B5EF4-FFF2-40B4-BE49-F238E27FC236}">
+                <a16:creationId xmlns:a16="http://schemas.microsoft.com/office/drawing/2014/main" id="{84DC3642-6BDD-12E5-F4FA-AA6E809AD0B2}"/>
+              </a:ext>
+            </a:extLst>
+          </p:cNvPr>
+          <p:cNvSpPr>
+            <a:spLocks noGrp="1"/>
+          </p:cNvSpPr>
+          <p:nvPr>
+            <p:ph type="title"/>
+          </p:nvPr>
         </p:nvSpPr>
         <p:spPr>
           <a:xfrm>
-            <a:off x="4715933" y="550333"/>
-            <a:ext cx="2854243" cy="830997"/>
+            <a:off x="1681844" y="1453243"/>
+            <a:ext cx="8899070" cy="996043"/>
           </a:xfrm>
-          <a:prstGeom prst="rect">
-            <a:avLst/>
-          </a:prstGeom>
-          <a:noFill/>
         </p:spPr>
         <p:txBody>
-          <a:bodyPr wrap="none" rtlCol="0">
-            <a:spAutoFit/>
-          </a:bodyPr>
-          <a:lstStyle/>
-          <a:p>
-            <a:r>
-              <a:rPr lang="en-IN" sz="4800" dirty="0"/>
-              <a:t>OBJECTIVE</a:t>
-            </a:r>
-          </a:p>
-        </p:txBody>
-      </p:sp>
-      <p:sp>
-        <p:nvSpPr>
-          <p:cNvPr id="5" name="TextBox 4">
-            <a:extLst>
-              <a:ext uri="{FF2B5EF4-FFF2-40B4-BE49-F238E27FC236}">
-                <a16:creationId xmlns:a16="http://schemas.microsoft.com/office/drawing/2014/main" id="{AA5EF2A6-2EE3-900D-D1FE-BEB6C52F1733}"/>
-              </a:ext>
-            </a:extLst>
-          </p:cNvPr>
-          <p:cNvSpPr txBox="1"/>
-          <p:nvPr/>
+          <a:bodyPr/>
+          <a:lstStyle/>
+          <a:p>
+            <a:r>
+              <a:rPr lang="en-IN" dirty="0">
+                <a:latin typeface="Algerian" panose="04020705040A02060702" pitchFamily="82" charset="0"/>
+              </a:rPr>
+              <a:t>Economic(co1)</a:t>
+            </a:r>
+          </a:p>
+        </p:txBody>
+      </p:sp>
+      <p:sp>
+        <p:nvSpPr>
+          <p:cNvPr id="5" name="Content Placeholder 4">
+            <a:extLst>
+              <a:ext uri="{FF2B5EF4-FFF2-40B4-BE49-F238E27FC236}">
+                <a16:creationId xmlns:a16="http://schemas.microsoft.com/office/drawing/2014/main" id="{FC943066-45D4-3551-C696-328E513FABC2}"/>
+              </a:ext>
+            </a:extLst>
+          </p:cNvPr>
+          <p:cNvSpPr>
+            <a:spLocks noGrp="1"/>
+          </p:cNvSpPr>
+          <p:nvPr>
+            <p:ph idx="1"/>
+          </p:nvPr>
         </p:nvSpPr>
         <p:spPr>
           <a:xfrm>
-            <a:off x="2203268" y="1759131"/>
-            <a:ext cx="8560549" cy="3785652"/>
+            <a:off x="1681844" y="2449287"/>
+            <a:ext cx="8899070" cy="3727676"/>
           </a:xfrm>
-          <a:prstGeom prst="rect">
-            <a:avLst/>
-          </a:prstGeom>
-          <a:noFill/>
         </p:spPr>
         <p:txBody>
-          <a:bodyPr wrap="none" rtlCol="0">
-            <a:spAutoFit/>
+          <a:bodyPr>
+            <a:normAutofit lnSpcReduction="10000"/>
           </a:bodyPr>
           <a:lstStyle/>
           <a:p>
-            <a:pPr marL="342900" lvl="0" indent="-342900">
-              <a:buFont typeface="Arial" panose="020B0604020202020204" pitchFamily="34" charset="0"/>
-              <a:buChar char="•"/>
+            <a:pPr marL="0" indent="0">
+              <a:buNone/>
             </a:pPr>
             <a:r>
-              <a:rPr lang="en-IN" sz="2400" dirty="0"/>
-              <a:t>Apply </a:t>
-            </a:r>
-            <a:r>
-              <a:rPr lang="en-IN" sz="2400" b="1" dirty="0"/>
-              <a:t>demand &amp; supply analysis</a:t>
-            </a:r>
-            <a:r>
-              <a:rPr lang="en-IN" sz="2400" dirty="0"/>
-              <a:t> to ticket pricing.</a:t>
-            </a:r>
+              <a:rPr lang="en-IN" b="1" dirty="0">
+                <a:latin typeface="Tw Cen MT Condensed Extra Bold" panose="020B0803020202020204" pitchFamily="34" charset="0"/>
+              </a:rPr>
+              <a:t>Topic: Demand, Supply &amp; Elasticity Estimation</a:t>
+            </a:r>
+            <a:endParaRPr lang="en-IN" dirty="0">
+              <a:latin typeface="Tw Cen MT Condensed Extra Bold" panose="020B0803020202020204" pitchFamily="34" charset="0"/>
+            </a:endParaRPr>
           </a:p>
           <a:p>
             <a:pPr lvl="0"/>
-            <a:endParaRPr lang="en-IN" sz="2400" dirty="0"/>
-          </a:p>
-          <a:p>
-            <a:pPr marL="342900" lvl="0" indent="-342900">
-              <a:buFont typeface="Arial" panose="020B0604020202020204" pitchFamily="34" charset="0"/>
-              <a:buChar char="•"/>
+            <a:r>
+              <a:rPr lang="en-IN" dirty="0">
+                <a:latin typeface="Tw Cen MT Condensed Extra Bold" panose="020B0803020202020204" pitchFamily="34" charset="0"/>
+              </a:rPr>
+              <a:t>Analyse the relationship between ticket price and demand. </a:t>
+            </a:r>
+          </a:p>
+          <a:p>
+            <a:pPr lvl="0"/>
+            <a:r>
+              <a:rPr lang="en-IN" dirty="0">
+                <a:latin typeface="Tw Cen MT Condensed Extra Bold" panose="020B0803020202020204" pitchFamily="34" charset="0"/>
+              </a:rPr>
+              <a:t>Estimate Price Elasticity of Demand(PED).</a:t>
+            </a:r>
+          </a:p>
+          <a:p>
+            <a:pPr lvl="0"/>
+            <a:r>
+              <a:rPr lang="en-IN" dirty="0">
+                <a:latin typeface="Tw Cen MT Condensed Extra Bold" panose="020B0803020202020204" pitchFamily="34" charset="0"/>
+              </a:rPr>
+              <a:t>Study how changes in price affect ticket sales. </a:t>
+            </a:r>
+          </a:p>
+          <a:p>
+            <a:pPr lvl="0"/>
+            <a:r>
+              <a:rPr lang="en-IN" dirty="0">
+                <a:latin typeface="Tw Cen MT Condensed Extra Bold" panose="020B0803020202020204" pitchFamily="34" charset="0"/>
+              </a:rPr>
+              <a:t>Predict market outcomes under different pricing conditions. </a:t>
+            </a:r>
+          </a:p>
+          <a:p>
+            <a:pPr marL="0" indent="0">
+              <a:buNone/>
             </a:pPr>
             <a:r>
-              <a:rPr lang="en-IN" sz="2400" dirty="0"/>
-              <a:t>Use </a:t>
-            </a:r>
-            <a:r>
-              <a:rPr lang="en-IN" sz="2400" b="1" dirty="0"/>
-              <a:t>Porter’s Five Forces</a:t>
-            </a:r>
-            <a:r>
-              <a:rPr lang="en-IN" sz="2400" dirty="0"/>
-              <a:t> to study competitive positioning.</a:t>
-            </a:r>
-          </a:p>
-          <a:p>
-            <a:pPr lvl="0"/>
-            <a:endParaRPr lang="en-IN" sz="2400" dirty="0"/>
-          </a:p>
-          <a:p>
-            <a:pPr marL="342900" lvl="0" indent="-342900">
-              <a:buFont typeface="Arial" panose="020B0604020202020204" pitchFamily="34" charset="0"/>
-              <a:buChar char="•"/>
-            </a:pPr>
-            <a:r>
-              <a:rPr lang="en-IN" sz="2400" dirty="0"/>
-              <a:t>Employ </a:t>
-            </a:r>
-            <a:r>
-              <a:rPr lang="en-IN" sz="2400" b="1" dirty="0"/>
-              <a:t>Python (Matplotlib &amp; </a:t>
-            </a:r>
-            <a:r>
-              <a:rPr lang="en-IN" sz="2400" b="1" dirty="0" err="1"/>
-              <a:t>Plotly</a:t>
-            </a:r>
-            <a:r>
-              <a:rPr lang="en-IN" sz="2400" b="1" dirty="0"/>
-              <a:t>)</a:t>
-            </a:r>
-            <a:r>
-              <a:rPr lang="en-IN" sz="2400" dirty="0"/>
-              <a:t> for interactive dashboards.</a:t>
-            </a:r>
-          </a:p>
-          <a:p>
-            <a:pPr lvl="0"/>
-            <a:endParaRPr lang="en-IN" sz="2400" dirty="0"/>
-          </a:p>
-          <a:p>
-            <a:pPr marL="342900" lvl="0" indent="-342900">
-              <a:buFont typeface="Arial" panose="020B0604020202020204" pitchFamily="34" charset="0"/>
-              <a:buChar char="•"/>
-            </a:pPr>
-            <a:r>
-              <a:rPr lang="en-IN" sz="2400" dirty="0"/>
-              <a:t>Integrate insights into a </a:t>
-            </a:r>
-            <a:r>
-              <a:rPr lang="en-IN" sz="2400" b="1" dirty="0"/>
-              <a:t>yield-management model</a:t>
-            </a:r>
-            <a:r>
-              <a:rPr lang="en-IN" sz="2400" dirty="0"/>
-              <a:t>.</a:t>
-            </a:r>
-          </a:p>
-          <a:p>
-            <a:pPr lvl="0"/>
-            <a:endParaRPr lang="en-IN" sz="2400" dirty="0"/>
-          </a:p>
-          <a:p>
-            <a:pPr lvl="0"/>
-            <a:r>
-              <a:rPr lang="en-IN" sz="2400" dirty="0"/>
-              <a:t> </a:t>
-            </a:r>
-            <a:r>
-              <a:rPr lang="en-IN" sz="2400" b="1" dirty="0"/>
-              <a:t>Visual:</a:t>
-            </a:r>
-            <a:endParaRPr lang="en-IN" sz="2400" dirty="0"/>
-          </a:p>
-          <a:p>
-            <a:endParaRPr lang="en-IN" sz="2400" dirty="0"/>
+              <a:rPr lang="en-IN" b="1" dirty="0">
+                <a:latin typeface="Tw Cen MT Condensed Extra Bold" panose="020B0803020202020204" pitchFamily="34" charset="0"/>
+              </a:rPr>
+              <a:t>Justification:</a:t>
+            </a:r>
+            <a:br>
+              <a:rPr lang="en-IN" dirty="0">
+                <a:latin typeface="Tw Cen MT Condensed Extra Bold" panose="020B0803020202020204" pitchFamily="34" charset="0"/>
+              </a:rPr>
+            </a:br>
+            <a:r>
+              <a:rPr lang="en-IN" dirty="0">
+                <a:latin typeface="Tw Cen MT Condensed Extra Bold" panose="020B0803020202020204" pitchFamily="34" charset="0"/>
+              </a:rPr>
+              <a:t>Economics helps understand customer response to changing ticket prices and supports better pricing decisions.</a:t>
+            </a:r>
+          </a:p>
+          <a:p>
+            <a:endParaRPr lang="en-IN" dirty="0"/>
           </a:p>
         </p:txBody>
       </p:sp>
     </p:spTree>
     <p:extLst>
       <p:ext uri="{BB962C8B-B14F-4D97-AF65-F5344CB8AC3E}">
-        <p14:creationId xmlns:p14="http://schemas.microsoft.com/office/powerpoint/2010/main" val="4005528551"/>
+        <p14:creationId xmlns:p14="http://schemas.microsoft.com/office/powerpoint/2010/main" val="3881232960"/>
       </p:ext>
     </p:extLst>
   </p:cSld>
@@ -5787,10 +4701,10 @@
       </p:grpSpPr>
       <p:pic>
         <p:nvPicPr>
-          <p:cNvPr id="8" name="Picture 7">
-            <a:extLst>
-              <a:ext uri="{FF2B5EF4-FFF2-40B4-BE49-F238E27FC236}">
-                <a16:creationId xmlns:a16="http://schemas.microsoft.com/office/drawing/2014/main" id="{79764421-2E3C-0850-3A7D-AD515F00698C}"/>
+          <p:cNvPr id="3" name="Picture 2">
+            <a:extLst>
+              <a:ext uri="{FF2B5EF4-FFF2-40B4-BE49-F238E27FC236}">
+                <a16:creationId xmlns:a16="http://schemas.microsoft.com/office/drawing/2014/main" id="{400457DD-D832-1B0C-3F39-0A9C19268A10}"/>
               </a:ext>
             </a:extLst>
           </p:cNvPr>
@@ -5813,53 +4727,54 @@
         </p:blipFill>
         <p:spPr>
           <a:xfrm>
-            <a:off x="0" y="0"/>
-            <a:ext cx="12192000" cy="6918960"/>
+            <a:off x="6096000" y="0"/>
+            <a:ext cx="6096000" cy="6858000"/>
           </a:xfrm>
           <a:prstGeom prst="rect">
             <a:avLst/>
           </a:prstGeom>
         </p:spPr>
       </p:pic>
-      <p:sp>
-        <p:nvSpPr>
-          <p:cNvPr id="9" name="TextBox 8">
-            <a:extLst>
-              <a:ext uri="{FF2B5EF4-FFF2-40B4-BE49-F238E27FC236}">
-                <a16:creationId xmlns:a16="http://schemas.microsoft.com/office/drawing/2014/main" id="{6E971EA0-00C1-F370-719C-7992D8607953}"/>
-              </a:ext>
-            </a:extLst>
-          </p:cNvPr>
-          <p:cNvSpPr txBox="1"/>
+      <p:pic>
+        <p:nvPicPr>
+          <p:cNvPr id="5" name="Picture 4">
+            <a:extLst>
+              <a:ext uri="{FF2B5EF4-FFF2-40B4-BE49-F238E27FC236}">
+                <a16:creationId xmlns:a16="http://schemas.microsoft.com/office/drawing/2014/main" id="{2D8C34C4-61EF-E776-42E3-8D2A889248BB}"/>
+              </a:ext>
+            </a:extLst>
+          </p:cNvPr>
+          <p:cNvPicPr>
+            <a:picLocks noChangeAspect="1"/>
+          </p:cNvPicPr>
           <p:nvPr/>
-        </p:nvSpPr>
+        </p:nvPicPr>
+        <p:blipFill>
+          <a:blip r:embed="rId3">
+            <a:extLst>
+              <a:ext uri="{28A0092B-C50C-407E-A947-70E740481C1C}">
+                <a14:useLocalDpi xmlns:a14="http://schemas.microsoft.com/office/drawing/2010/main" val="0"/>
+              </a:ext>
+            </a:extLst>
+          </a:blip>
+          <a:stretch>
+            <a:fillRect/>
+          </a:stretch>
+        </p:blipFill>
         <p:spPr>
           <a:xfrm>
-            <a:off x="1663337" y="261257"/>
-            <a:ext cx="9814560" cy="584775"/>
+            <a:off x="0" y="-1"/>
+            <a:ext cx="6096000" cy="6857999"/>
           </a:xfrm>
           <a:prstGeom prst="rect">
             <a:avLst/>
           </a:prstGeom>
-          <a:noFill/>
         </p:spPr>
-        <p:txBody>
-          <a:bodyPr wrap="square" rtlCol="0">
-            <a:spAutoFit/>
-          </a:bodyPr>
-          <a:lstStyle/>
-          <a:p>
-            <a:r>
-              <a:rPr lang="en-IN" sz="3200" dirty="0"/>
-              <a:t>ICONS OF ECONOMICS, BUSINEES AND PYTHON  </a:t>
-            </a:r>
-          </a:p>
-        </p:txBody>
-      </p:sp>
+      </p:pic>
     </p:spTree>
     <p:extLst>
       <p:ext uri="{BB962C8B-B14F-4D97-AF65-F5344CB8AC3E}">
-        <p14:creationId xmlns:p14="http://schemas.microsoft.com/office/powerpoint/2010/main" val="3077186803"/>
+        <p14:creationId xmlns:p14="http://schemas.microsoft.com/office/powerpoint/2010/main" val="1330098770"/>
       </p:ext>
     </p:extLst>
   </p:cSld>
@@ -5891,7 +4806,7 @@
           <p:cNvPr id="3" name="Picture 2">
             <a:extLst>
               <a:ext uri="{FF2B5EF4-FFF2-40B4-BE49-F238E27FC236}">
-                <a16:creationId xmlns:a16="http://schemas.microsoft.com/office/drawing/2014/main" id="{09C2C9C8-D88D-CE18-38B7-E44AEFAD8AD9}"/>
+                <a16:creationId xmlns:a16="http://schemas.microsoft.com/office/drawing/2014/main" id="{B6F48316-0A9E-4FE2-E2BE-2C50B5C51C3A}"/>
               </a:ext>
             </a:extLst>
           </p:cNvPr>
@@ -5914,8 +4829,8 @@
         </p:blipFill>
         <p:spPr>
           <a:xfrm>
-            <a:off x="1" y="0"/>
-            <a:ext cx="12192000" cy="6858000"/>
+            <a:off x="0" y="0"/>
+            <a:ext cx="12192000" cy="6857999"/>
           </a:xfrm>
           <a:prstGeom prst="rect">
             <a:avLst/>
@@ -5924,165 +4839,197 @@
       </p:pic>
       <p:sp>
         <p:nvSpPr>
-          <p:cNvPr id="5" name="TextBox 4">
-            <a:extLst>
-              <a:ext uri="{FF2B5EF4-FFF2-40B4-BE49-F238E27FC236}">
-                <a16:creationId xmlns:a16="http://schemas.microsoft.com/office/drawing/2014/main" id="{4CD37EE5-041D-AED8-A37B-A11BD3CA8DC2}"/>
-              </a:ext>
-            </a:extLst>
-          </p:cNvPr>
-          <p:cNvSpPr txBox="1"/>
-          <p:nvPr/>
+          <p:cNvPr id="4" name="Title 3">
+            <a:extLst>
+              <a:ext uri="{FF2B5EF4-FFF2-40B4-BE49-F238E27FC236}">
+                <a16:creationId xmlns:a16="http://schemas.microsoft.com/office/drawing/2014/main" id="{C0C2712B-9563-CF0B-2C0F-E524BF586B3C}"/>
+              </a:ext>
+            </a:extLst>
+          </p:cNvPr>
+          <p:cNvSpPr>
+            <a:spLocks noGrp="1"/>
+          </p:cNvSpPr>
+          <p:nvPr>
+            <p:ph type="title"/>
+          </p:nvPr>
         </p:nvSpPr>
         <p:spPr>
           <a:xfrm>
-            <a:off x="4267200" y="644434"/>
-            <a:ext cx="3047309" cy="769441"/>
+            <a:off x="1681844" y="1224643"/>
+            <a:ext cx="9160328" cy="1191986"/>
           </a:xfrm>
-          <a:prstGeom prst="rect">
-            <a:avLst/>
-          </a:prstGeom>
-          <a:noFill/>
         </p:spPr>
         <p:txBody>
-          <a:bodyPr wrap="none" rtlCol="0">
-            <a:spAutoFit/>
-          </a:bodyPr>
-          <a:lstStyle/>
-          <a:p>
-            <a:r>
-              <a:rPr lang="en-IN" sz="4400" dirty="0"/>
-              <a:t>ECONOMICS</a:t>
-            </a:r>
-          </a:p>
-        </p:txBody>
-      </p:sp>
-      <p:sp>
-        <p:nvSpPr>
-          <p:cNvPr id="6" name="TextBox 5">
-            <a:extLst>
-              <a:ext uri="{FF2B5EF4-FFF2-40B4-BE49-F238E27FC236}">
-                <a16:creationId xmlns:a16="http://schemas.microsoft.com/office/drawing/2014/main" id="{F6CFBAB1-BA73-459A-7A94-2F4CCABA1D7F}"/>
-              </a:ext>
-            </a:extLst>
-          </p:cNvPr>
-          <p:cNvSpPr txBox="1"/>
-          <p:nvPr/>
+          <a:bodyPr/>
+          <a:lstStyle/>
+          <a:p>
+            <a:r>
+              <a:rPr lang="en-IN" dirty="0">
+                <a:latin typeface="Algerian" panose="04020705040A02060702" pitchFamily="82" charset="0"/>
+              </a:rPr>
+              <a:t>Business environment(co2)</a:t>
+            </a:r>
+          </a:p>
+        </p:txBody>
+      </p:sp>
+      <p:sp>
+        <p:nvSpPr>
+          <p:cNvPr id="5" name="Content Placeholder 4">
+            <a:extLst>
+              <a:ext uri="{FF2B5EF4-FFF2-40B4-BE49-F238E27FC236}">
+                <a16:creationId xmlns:a16="http://schemas.microsoft.com/office/drawing/2014/main" id="{114130C4-731A-E7C3-D63B-792E18BA3388}"/>
+              </a:ext>
+            </a:extLst>
+          </p:cNvPr>
+          <p:cNvSpPr>
+            <a:spLocks noGrp="1"/>
+          </p:cNvSpPr>
+          <p:nvPr>
+            <p:ph idx="1"/>
+          </p:nvPr>
         </p:nvSpPr>
         <p:spPr>
           <a:xfrm>
-            <a:off x="2394857" y="2072640"/>
-            <a:ext cx="7503529" cy="4154984"/>
+            <a:off x="1681844" y="2416629"/>
+            <a:ext cx="9013370" cy="3760334"/>
           </a:xfrm>
-          <a:prstGeom prst="rect">
-            <a:avLst/>
-          </a:prstGeom>
-          <a:noFill/>
         </p:spPr>
         <p:txBody>
-          <a:bodyPr wrap="none" rtlCol="0">
-            <a:spAutoFit/>
+          <a:bodyPr>
+            <a:normAutofit fontScale="85000" lnSpcReduction="20000"/>
           </a:bodyPr>
           <a:lstStyle/>
           <a:p>
-            <a:r>
-              <a:rPr lang="en-IN" sz="2400" b="1" dirty="0"/>
-              <a:t>Topic:</a:t>
-            </a:r>
-            <a:r>
-              <a:rPr lang="en-IN" sz="2400" dirty="0"/>
-              <a:t> Demand &amp; Supply Analysis with Elasticity.</a:t>
-            </a:r>
-          </a:p>
-          <a:p>
-            <a:endParaRPr lang="en-IN" sz="2400" dirty="0"/>
-          </a:p>
-          <a:p>
-            <a:r>
-              <a:rPr lang="en-IN" sz="2400" dirty="0"/>
+            <a:pPr marL="0" indent="0">
+              <a:buNone/>
+            </a:pPr>
+            <a:r>
+              <a:rPr lang="en-IN" b="1" dirty="0">
+                <a:latin typeface="Tw Cen MT Condensed Extra Bold" panose="020B0803020202020204" pitchFamily="34" charset="0"/>
+              </a:rPr>
+              <a:t>Topic: Porter’s Five Forces</a:t>
+            </a:r>
+            <a:endParaRPr lang="en-IN" dirty="0">
+              <a:latin typeface="Tw Cen MT Condensed Extra Bold" panose="020B0803020202020204" pitchFamily="34" charset="0"/>
+            </a:endParaRPr>
+          </a:p>
+          <a:p>
+            <a:pPr marL="0" indent="0">
+              <a:buNone/>
+            </a:pPr>
+            <a:r>
+              <a:rPr lang="en-IN" dirty="0">
+                <a:latin typeface="Tw Cen MT Condensed Extra Bold" panose="020B0803020202020204" pitchFamily="34" charset="0"/>
+              </a:rPr>
+              <a:t>Analyse:</a:t>
+            </a:r>
+          </a:p>
+          <a:p>
+            <a:pPr lvl="0"/>
+            <a:r>
+              <a:rPr lang="en-IN" b="1" dirty="0">
+                <a:latin typeface="Tw Cen MT Condensed Extra Bold" panose="020B0803020202020204" pitchFamily="34" charset="0"/>
+              </a:rPr>
+              <a:t>Competitive Rivalry</a:t>
+            </a:r>
+            <a:r>
+              <a:rPr lang="en-IN" dirty="0">
+                <a:latin typeface="Tw Cen MT Condensed Extra Bold" panose="020B0803020202020204" pitchFamily="34" charset="0"/>
+              </a:rPr>
+              <a:t> – competition among ticket-booking platforms. </a:t>
+            </a:r>
+          </a:p>
+          <a:p>
+            <a:pPr lvl="0"/>
+            <a:r>
+              <a:rPr lang="en-IN" b="1" dirty="0">
+                <a:latin typeface="Tw Cen MT Condensed Extra Bold" panose="020B0803020202020204" pitchFamily="34" charset="0"/>
+              </a:rPr>
+              <a:t>Threat of New Entrants</a:t>
+            </a:r>
+            <a:r>
+              <a:rPr lang="en-IN" dirty="0">
+                <a:latin typeface="Tw Cen MT Condensed Extra Bold" panose="020B0803020202020204" pitchFamily="34" charset="0"/>
+              </a:rPr>
               <a:t> </a:t>
             </a:r>
-            <a:r>
-              <a:rPr lang="en-IN" sz="2400" b="1" dirty="0"/>
-              <a:t>Application:</a:t>
-            </a:r>
-            <a:endParaRPr lang="en-IN" sz="2400" dirty="0"/>
-          </a:p>
-          <a:p>
-            <a:pPr marL="342900" lvl="0" indent="-342900">
-              <a:buFont typeface="Arial" panose="020B0604020202020204" pitchFamily="34" charset="0"/>
-              <a:buChar char="•"/>
+          </a:p>
+          <a:p>
+            <a:pPr lvl="0"/>
+            <a:r>
+              <a:rPr lang="en-IN" b="1" dirty="0">
+                <a:latin typeface="Tw Cen MT Condensed Extra Bold" panose="020B0803020202020204" pitchFamily="34" charset="0"/>
+              </a:rPr>
+              <a:t>Bargaining Power of Customers</a:t>
+            </a:r>
+            <a:r>
+              <a:rPr lang="en-IN" dirty="0">
+                <a:latin typeface="Tw Cen MT Condensed Extra Bold" panose="020B0803020202020204" pitchFamily="34" charset="0"/>
+              </a:rPr>
+              <a:t> </a:t>
+            </a:r>
+          </a:p>
+          <a:p>
+            <a:pPr lvl="0"/>
+            <a:r>
+              <a:rPr lang="en-IN" b="1" dirty="0">
+                <a:latin typeface="Tw Cen MT Condensed Extra Bold" panose="020B0803020202020204" pitchFamily="34" charset="0"/>
+              </a:rPr>
+              <a:t>Bargaining Power of Suppliers/Event Organisers</a:t>
+            </a:r>
+            <a:r>
+              <a:rPr lang="en-IN" dirty="0">
+                <a:latin typeface="Tw Cen MT Condensed Extra Bold" panose="020B0803020202020204" pitchFamily="34" charset="0"/>
+              </a:rPr>
+              <a:t> </a:t>
+            </a:r>
+          </a:p>
+          <a:p>
+            <a:pPr lvl="0"/>
+            <a:r>
+              <a:rPr lang="en-IN" b="1" dirty="0">
+                <a:latin typeface="Tw Cen MT Condensed Extra Bold" panose="020B0803020202020204" pitchFamily="34" charset="0"/>
+              </a:rPr>
+              <a:t>Threat of Substitutes</a:t>
+            </a:r>
+            <a:r>
+              <a:rPr lang="en-IN" dirty="0">
+                <a:latin typeface="Tw Cen MT Condensed Extra Bold" panose="020B0803020202020204" pitchFamily="34" charset="0"/>
+              </a:rPr>
+              <a:t> </a:t>
+            </a:r>
+          </a:p>
+          <a:p>
+            <a:pPr marL="0" indent="0">
+              <a:buNone/>
             </a:pPr>
             <a:r>
-              <a:rPr lang="en-IN" sz="2400" dirty="0"/>
-              <a:t>Study how ticket demand changes with price/time.</a:t>
-            </a:r>
-          </a:p>
-          <a:p>
-            <a:pPr marL="342900" lvl="0" indent="-342900">
-              <a:buFont typeface="Arial" panose="020B0604020202020204" pitchFamily="34" charset="0"/>
-              <a:buChar char="•"/>
-            </a:pPr>
-            <a:r>
-              <a:rPr lang="en-IN" sz="2400" dirty="0"/>
-              <a:t>Estimate elasticity for different show timings.</a:t>
-            </a:r>
-          </a:p>
-          <a:p>
-            <a:pPr marL="342900" lvl="0" indent="-342900">
-              <a:buFont typeface="Arial" panose="020B0604020202020204" pitchFamily="34" charset="0"/>
-              <a:buChar char="•"/>
-            </a:pPr>
-            <a:r>
-              <a:rPr lang="en-IN" sz="2400" dirty="0"/>
-              <a:t>Predict outcomes under taxes, subsidies, or regulations.</a:t>
-            </a:r>
-          </a:p>
-          <a:p>
-            <a:pPr lvl="0"/>
-            <a:r>
-              <a:rPr lang="en-IN" sz="2400" dirty="0"/>
-              <a:t> </a:t>
-            </a:r>
-          </a:p>
-          <a:p>
-            <a:pPr lvl="0"/>
-            <a:r>
-              <a:rPr lang="en-IN" sz="2400" b="1" dirty="0"/>
+              <a:rPr lang="en-IN" b="1" dirty="0">
+                <a:latin typeface="Tw Cen MT Condensed Extra Bold" panose="020B0803020202020204" pitchFamily="34" charset="0"/>
+              </a:rPr>
               <a:t>Justification:</a:t>
             </a:r>
-            <a:r>
-              <a:rPr lang="en-IN" sz="2400" dirty="0"/>
-              <a:t> Helps optimize pricing and predict consumer </a:t>
-            </a:r>
-          </a:p>
-          <a:p>
-            <a:pPr lvl="0"/>
-            <a:r>
-              <a:rPr lang="en-IN" sz="2400" dirty="0"/>
-              <a:t>response. </a:t>
-            </a:r>
-          </a:p>
-          <a:p>
-            <a:pPr lvl="0"/>
-            <a:r>
-              <a:rPr lang="en-IN" sz="2400" b="1" dirty="0"/>
-              <a:t>Visual:</a:t>
-            </a:r>
-            <a:r>
-              <a:rPr lang="en-IN" sz="2400" dirty="0"/>
-              <a:t> </a:t>
-            </a:r>
-          </a:p>
-          <a:p>
-            <a:endParaRPr lang="en-IN" sz="2400" dirty="0"/>
+            <a:br>
+              <a:rPr lang="en-IN" dirty="0">
+                <a:latin typeface="Tw Cen MT Condensed Extra Bold" panose="020B0803020202020204" pitchFamily="34" charset="0"/>
+              </a:rPr>
+            </a:br>
+            <a:r>
+              <a:rPr lang="en-IN" dirty="0">
+                <a:latin typeface="Tw Cen MT Condensed Extra Bold" panose="020B0803020202020204" pitchFamily="34" charset="0"/>
+              </a:rPr>
+              <a:t>Porter’s Five Forces helps understand the competitive environment influencing Book My Show’s live-event pricing strategy.</a:t>
+            </a:r>
+          </a:p>
+          <a:p>
+            <a:endParaRPr lang="en-IN" dirty="0"/>
           </a:p>
         </p:txBody>
       </p:sp>
     </p:spTree>
     <p:extLst>
       <p:ext uri="{BB962C8B-B14F-4D97-AF65-F5344CB8AC3E}">
-        <p14:creationId xmlns:p14="http://schemas.microsoft.com/office/powerpoint/2010/main" val="1188349219"/>
+        <p14:creationId xmlns:p14="http://schemas.microsoft.com/office/powerpoint/2010/main" val="185640487"/>
       </p:ext>
     </p:extLst>
   </p:cSld>
@@ -6111,10 +5058,10 @@
       </p:grpSpPr>
       <p:pic>
         <p:nvPicPr>
-          <p:cNvPr id="5" name="Picture 4">
-            <a:extLst>
-              <a:ext uri="{FF2B5EF4-FFF2-40B4-BE49-F238E27FC236}">
-                <a16:creationId xmlns:a16="http://schemas.microsoft.com/office/drawing/2014/main" id="{C400F1C4-1D56-5BAD-4FE9-5EC5F68398B4}"/>
+          <p:cNvPr id="3" name="Picture 2">
+            <a:extLst>
+              <a:ext uri="{FF2B5EF4-FFF2-40B4-BE49-F238E27FC236}">
+                <a16:creationId xmlns:a16="http://schemas.microsoft.com/office/drawing/2014/main" id="{0AEB3750-8051-E1B5-A508-F0617D409BA0}"/>
               </a:ext>
             </a:extLst>
           </p:cNvPr>
@@ -6137,8 +5084,44 @@
         </p:blipFill>
         <p:spPr>
           <a:xfrm>
-            <a:off x="0" y="0"/>
-            <a:ext cx="12192000" cy="6858000"/>
+            <a:off x="1" y="0"/>
+            <a:ext cx="6095999" cy="6858000"/>
+          </a:xfrm>
+          <a:prstGeom prst="rect">
+            <a:avLst/>
+          </a:prstGeom>
+        </p:spPr>
+      </p:pic>
+      <p:pic>
+        <p:nvPicPr>
+          <p:cNvPr id="5" name="Picture 4">
+            <a:extLst>
+              <a:ext uri="{FF2B5EF4-FFF2-40B4-BE49-F238E27FC236}">
+                <a16:creationId xmlns:a16="http://schemas.microsoft.com/office/drawing/2014/main" id="{755F0BBE-2B80-8F4A-DEC3-625CFC9C40F7}"/>
+              </a:ext>
+            </a:extLst>
+          </p:cNvPr>
+          <p:cNvPicPr>
+            <a:picLocks noChangeAspect="1"/>
+          </p:cNvPicPr>
+          <p:nvPr/>
+        </p:nvPicPr>
+        <p:blipFill>
+          <a:blip r:embed="rId3">
+            <a:extLst>
+              <a:ext uri="{28A0092B-C50C-407E-A947-70E740481C1C}">
+                <a14:useLocalDpi xmlns:a14="http://schemas.microsoft.com/office/drawing/2010/main" val="0"/>
+              </a:ext>
+            </a:extLst>
+          </a:blip>
+          <a:stretch>
+            <a:fillRect/>
+          </a:stretch>
+        </p:blipFill>
+        <p:spPr>
+          <a:xfrm>
+            <a:off x="6095999" y="0"/>
+            <a:ext cx="6095999" cy="6858000"/>
           </a:xfrm>
           <a:prstGeom prst="rect">
             <a:avLst/>
@@ -6148,7 +5131,7 @@
     </p:spTree>
     <p:extLst>
       <p:ext uri="{BB962C8B-B14F-4D97-AF65-F5344CB8AC3E}">
-        <p14:creationId xmlns:p14="http://schemas.microsoft.com/office/powerpoint/2010/main" val="4290253312"/>
+        <p14:creationId xmlns:p14="http://schemas.microsoft.com/office/powerpoint/2010/main" val="1616049124"/>
       </p:ext>
     </p:extLst>
   </p:cSld>
@@ -6180,7 +5163,7 @@
           <p:cNvPr id="3" name="Picture 2">
             <a:extLst>
               <a:ext uri="{FF2B5EF4-FFF2-40B4-BE49-F238E27FC236}">
-                <a16:creationId xmlns:a16="http://schemas.microsoft.com/office/drawing/2014/main" id="{8AE54293-276F-45D0-7753-14018B7F433A}"/>
+                <a16:creationId xmlns:a16="http://schemas.microsoft.com/office/drawing/2014/main" id="{712A89F9-B988-4F56-EDC6-C8A10822EC5E}"/>
               </a:ext>
             </a:extLst>
           </p:cNvPr>
@@ -6204,7 +5187,7 @@
         <p:spPr>
           <a:xfrm>
             <a:off x="0" y="0"/>
-            <a:ext cx="12192000" cy="6858000"/>
+            <a:ext cx="12192000" cy="6857999"/>
           </a:xfrm>
           <a:prstGeom prst="rect">
             <a:avLst/>
@@ -6213,166 +5196,159 @@
       </p:pic>
       <p:sp>
         <p:nvSpPr>
-          <p:cNvPr id="4" name="TextBox 3">
-            <a:extLst>
-              <a:ext uri="{FF2B5EF4-FFF2-40B4-BE49-F238E27FC236}">
-                <a16:creationId xmlns:a16="http://schemas.microsoft.com/office/drawing/2014/main" id="{02FD27F2-72C0-5EB0-F93D-B05FD75394FE}"/>
-              </a:ext>
-            </a:extLst>
-          </p:cNvPr>
-          <p:cNvSpPr txBox="1"/>
-          <p:nvPr/>
+          <p:cNvPr id="4" name="Title 3">
+            <a:extLst>
+              <a:ext uri="{FF2B5EF4-FFF2-40B4-BE49-F238E27FC236}">
+                <a16:creationId xmlns:a16="http://schemas.microsoft.com/office/drawing/2014/main" id="{D1CB794B-64EE-3200-487E-93D9290F5C24}"/>
+              </a:ext>
+            </a:extLst>
+          </p:cNvPr>
+          <p:cNvSpPr>
+            <a:spLocks noGrp="1"/>
+          </p:cNvSpPr>
+          <p:nvPr>
+            <p:ph type="title"/>
+          </p:nvPr>
         </p:nvSpPr>
         <p:spPr>
           <a:xfrm>
-            <a:off x="2873829" y="653143"/>
-            <a:ext cx="7502851" cy="769441"/>
+            <a:off x="1681842" y="1485899"/>
+            <a:ext cx="9307287" cy="1017135"/>
           </a:xfrm>
-          <a:prstGeom prst="rect">
-            <a:avLst/>
-          </a:prstGeom>
-          <a:noFill/>
         </p:spPr>
         <p:txBody>
-          <a:bodyPr wrap="square" rtlCol="0">
-            <a:spAutoFit/>
-          </a:bodyPr>
-          <a:lstStyle/>
-          <a:p>
-            <a:r>
-              <a:rPr lang="en-IN" sz="4400" dirty="0"/>
-              <a:t>BUSINESS ENVIRONMENT</a:t>
-            </a:r>
-          </a:p>
-        </p:txBody>
-      </p:sp>
-      <p:sp>
-        <p:nvSpPr>
-          <p:cNvPr id="5" name="TextBox 4">
-            <a:extLst>
-              <a:ext uri="{FF2B5EF4-FFF2-40B4-BE49-F238E27FC236}">
-                <a16:creationId xmlns:a16="http://schemas.microsoft.com/office/drawing/2014/main" id="{4DEFAC61-3D20-609C-6156-1828A681AD11}"/>
-              </a:ext>
-            </a:extLst>
-          </p:cNvPr>
-          <p:cNvSpPr txBox="1"/>
-          <p:nvPr/>
+          <a:bodyPr/>
+          <a:lstStyle/>
+          <a:p>
+            <a:r>
+              <a:rPr lang="en-IN" dirty="0">
+                <a:latin typeface="Algerian" panose="04020705040A02060702" pitchFamily="82" charset="0"/>
+              </a:rPr>
+              <a:t>Python(co3)</a:t>
+            </a:r>
+          </a:p>
+        </p:txBody>
+      </p:sp>
+      <p:sp>
+        <p:nvSpPr>
+          <p:cNvPr id="5" name="Content Placeholder 4">
+            <a:extLst>
+              <a:ext uri="{FF2B5EF4-FFF2-40B4-BE49-F238E27FC236}">
+                <a16:creationId xmlns:a16="http://schemas.microsoft.com/office/drawing/2014/main" id="{7DCA0CEE-374D-E508-C980-0F49F3473C03}"/>
+              </a:ext>
+            </a:extLst>
+          </p:cNvPr>
+          <p:cNvSpPr>
+            <a:spLocks noGrp="1"/>
+          </p:cNvSpPr>
+          <p:nvPr>
+            <p:ph idx="1"/>
+          </p:nvPr>
         </p:nvSpPr>
         <p:spPr>
           <a:xfrm>
-            <a:off x="2360023" y="1741714"/>
-            <a:ext cx="8148834" cy="4524315"/>
+            <a:off x="1681842" y="2503034"/>
+            <a:ext cx="9307287" cy="3673929"/>
           </a:xfrm>
-          <a:prstGeom prst="rect">
-            <a:avLst/>
-          </a:prstGeom>
-          <a:noFill/>
         </p:spPr>
         <p:txBody>
-          <a:bodyPr wrap="none" rtlCol="0">
-            <a:spAutoFit/>
+          <a:bodyPr>
+            <a:normAutofit fontScale="92500"/>
           </a:bodyPr>
           <a:lstStyle/>
           <a:p>
             <a:r>
-              <a:rPr lang="en-IN" sz="2400" b="1" dirty="0"/>
-              <a:t>Topic:</a:t>
-            </a:r>
-            <a:r>
-              <a:rPr lang="en-IN" sz="2400" dirty="0"/>
-              <a:t> Porter’s Five Forces — Indian Entertainment Industry.</a:t>
-            </a:r>
-          </a:p>
-          <a:p>
-            <a:endParaRPr lang="en-IN" sz="2400" b="1" dirty="0"/>
-          </a:p>
-          <a:p>
-            <a:r>
-              <a:rPr lang="en-IN" sz="2400" b="1" dirty="0"/>
-              <a:t>Application:</a:t>
-            </a:r>
-            <a:endParaRPr lang="en-IN" sz="2400" dirty="0"/>
-          </a:p>
-          <a:p>
-            <a:pPr marL="342900" lvl="0" indent="-342900">
-              <a:buFont typeface="Arial" panose="020B0604020202020204" pitchFamily="34" charset="0"/>
-              <a:buChar char="•"/>
-            </a:pPr>
-            <a:r>
-              <a:rPr lang="en-IN" sz="2400" dirty="0"/>
-              <a:t>Analyse competition (OTT platforms, local events).</a:t>
-            </a:r>
-          </a:p>
-          <a:p>
-            <a:pPr marL="342900" lvl="0" indent="-342900">
-              <a:buFont typeface="Arial" panose="020B0604020202020204" pitchFamily="34" charset="0"/>
-              <a:buChar char="•"/>
-            </a:pPr>
-            <a:r>
-              <a:rPr lang="en-IN" sz="2400" dirty="0"/>
-              <a:t>Assess supplier power (venues, artists).</a:t>
-            </a:r>
-          </a:p>
-          <a:p>
-            <a:pPr marL="342900" lvl="0" indent="-342900">
-              <a:buFont typeface="Arial" panose="020B0604020202020204" pitchFamily="34" charset="0"/>
-              <a:buChar char="•"/>
-            </a:pPr>
-            <a:r>
-              <a:rPr lang="en-IN" sz="2400" dirty="0"/>
-              <a:t>Evaluate buyer power (audience preferences). </a:t>
-            </a:r>
+              <a:rPr lang="en-IN" b="1" dirty="0">
+                <a:latin typeface="Tw Cen MT Condensed Extra Bold" panose="020B0803020202020204" pitchFamily="34" charset="0"/>
+              </a:rPr>
+              <a:t>Topic: Matplotlib &amp; </a:t>
+            </a:r>
+            <a:r>
+              <a:rPr lang="en-IN" b="1" dirty="0" err="1">
+                <a:latin typeface="Tw Cen MT Condensed Extra Bold" panose="020B0803020202020204" pitchFamily="34" charset="0"/>
+              </a:rPr>
+              <a:t>Plotly</a:t>
+            </a:r>
+            <a:endParaRPr lang="en-IN" dirty="0">
+              <a:latin typeface="Tw Cen MT Condensed Extra Bold" panose="020B0803020202020204" pitchFamily="34" charset="0"/>
+            </a:endParaRPr>
           </a:p>
           <a:p>
             <a:pPr lvl="0"/>
-            <a:endParaRPr lang="en-IN" sz="2400" dirty="0"/>
+            <a:r>
+              <a:rPr lang="en-IN" dirty="0">
+                <a:latin typeface="Tw Cen MT Condensed Extra Bold" panose="020B0803020202020204" pitchFamily="34" charset="0"/>
+              </a:rPr>
+              <a:t>Use Matplotlib to create clear business charts. </a:t>
+            </a:r>
           </a:p>
           <a:p>
             <a:pPr lvl="0"/>
             <a:r>
-              <a:rPr lang="en-IN" sz="2400" b="1" dirty="0"/>
+              <a:rPr lang="en-IN" dirty="0">
+                <a:latin typeface="Tw Cen MT Condensed Extra Bold" panose="020B0803020202020204" pitchFamily="34" charset="0"/>
+              </a:rPr>
+              <a:t>Use </a:t>
+            </a:r>
+            <a:r>
+              <a:rPr lang="en-IN" dirty="0" err="1">
+                <a:latin typeface="Tw Cen MT Condensed Extra Bold" panose="020B0803020202020204" pitchFamily="34" charset="0"/>
+              </a:rPr>
+              <a:t>Plotly</a:t>
+            </a:r>
+            <a:r>
+              <a:rPr lang="en-IN" dirty="0">
+                <a:latin typeface="Tw Cen MT Condensed Extra Bold" panose="020B0803020202020204" pitchFamily="34" charset="0"/>
+              </a:rPr>
+              <a:t> for interactive visualisations. </a:t>
+            </a:r>
+          </a:p>
+          <a:p>
+            <a:pPr lvl="0"/>
+            <a:r>
+              <a:rPr lang="en-IN" dirty="0">
+                <a:latin typeface="Tw Cen MT Condensed Extra Bold" panose="020B0803020202020204" pitchFamily="34" charset="0"/>
+              </a:rPr>
+              <a:t>Visualise ticket prices, demand, availability, and event categories. </a:t>
+            </a:r>
+          </a:p>
+          <a:p>
+            <a:pPr lvl="0"/>
+            <a:r>
+              <a:rPr lang="en-IN" dirty="0">
+                <a:latin typeface="Tw Cen MT Condensed Extra Bold" panose="020B0803020202020204" pitchFamily="34" charset="0"/>
+              </a:rPr>
+              <a:t>Present results through easy-to-understand graphs and dashboards. </a:t>
+            </a:r>
+          </a:p>
+          <a:p>
+            <a:r>
+              <a:rPr lang="en-IN" b="1" dirty="0">
+                <a:latin typeface="Tw Cen MT Condensed Extra Bold" panose="020B0803020202020204" pitchFamily="34" charset="0"/>
+              </a:rPr>
               <a:t>Justification:</a:t>
             </a:r>
-            <a:r>
-              <a:rPr lang="en-IN" sz="2400" dirty="0"/>
-              <a:t> Explains scarcity and loss-aversion-driven booking </a:t>
-            </a:r>
-          </a:p>
-          <a:p>
-            <a:pPr lvl="0"/>
-            <a:r>
-              <a:rPr lang="en-IN" sz="2400" dirty="0" err="1"/>
-              <a:t>behavior</a:t>
-            </a:r>
-            <a:r>
-              <a:rPr lang="en-IN" sz="2400" dirty="0"/>
-              <a:t>. </a:t>
-            </a:r>
-          </a:p>
-          <a:p>
-            <a:pPr lvl="0"/>
-            <a:endParaRPr lang="en-IN" sz="2400" dirty="0"/>
-          </a:p>
-          <a:p>
-            <a:pPr lvl="0"/>
-            <a:r>
-              <a:rPr lang="en-IN" sz="2400" b="1" dirty="0"/>
-              <a:t>Visual:</a:t>
-            </a:r>
-            <a:r>
-              <a:rPr lang="en-IN" sz="2400" dirty="0"/>
-              <a:t> </a:t>
-            </a:r>
-          </a:p>
-          <a:p>
-            <a:endParaRPr lang="en-IN" sz="2400" dirty="0"/>
+            <a:br>
+              <a:rPr lang="en-IN" dirty="0">
+                <a:latin typeface="Tw Cen MT Condensed Extra Bold" panose="020B0803020202020204" pitchFamily="34" charset="0"/>
+              </a:rPr>
+            </a:br>
+            <a:r>
+              <a:rPr lang="en-IN" dirty="0">
+                <a:latin typeface="Tw Cen MT Condensed Extra Bold" panose="020B0803020202020204" pitchFamily="34" charset="0"/>
+              </a:rPr>
+              <a:t>Python converts the collected data into meaningful visual insights for business decision-making.</a:t>
+            </a:r>
+          </a:p>
+          <a:p>
+            <a:endParaRPr lang="en-IN" dirty="0"/>
           </a:p>
         </p:txBody>
       </p:sp>
     </p:spTree>
     <p:extLst>
       <p:ext uri="{BB962C8B-B14F-4D97-AF65-F5344CB8AC3E}">
-        <p14:creationId xmlns:p14="http://schemas.microsoft.com/office/powerpoint/2010/main" val="3583637246"/>
+        <p14:creationId xmlns:p14="http://schemas.microsoft.com/office/powerpoint/2010/main" val="1563859033"/>
       </p:ext>
     </p:extLst>
   </p:cSld>
